--- a/docs/Finans_Portali_Sunum.pptx
+++ b/docs/Finans_Portali_Sunum.pptx
@@ -5,18 +5,18 @@
     <p:sldMasterId id="2147483648" r:id="rId1"/>
   </p:sldMasterIdLst>
   <p:sldIdLst>
-    <p:sldId id="256" r:id="rId7"/>
-    <p:sldId id="257" r:id="rId8"/>
-    <p:sldId id="258" r:id="rId9"/>
-    <p:sldId id="259" r:id="rId10"/>
-    <p:sldId id="260" r:id="rId11"/>
-    <p:sldId id="261" r:id="rId12"/>
-    <p:sldId id="262" r:id="rId13"/>
-    <p:sldId id="263" r:id="rId14"/>
-    <p:sldId id="264" r:id="rId15"/>
-    <p:sldId id="265" r:id="rId16"/>
+    <p:sldId id="256" r:id="rId2"/>
+    <p:sldId id="257" r:id="rId3"/>
+    <p:sldId id="258" r:id="rId4"/>
+    <p:sldId id="259" r:id="rId5"/>
+    <p:sldId id="260" r:id="rId6"/>
+    <p:sldId id="261" r:id="rId7"/>
+    <p:sldId id="262" r:id="rId8"/>
+    <p:sldId id="263" r:id="rId9"/>
+    <p:sldId id="264" r:id="rId10"/>
+    <p:sldId id="265" r:id="rId11"/>
   </p:sldIdLst>
-  <p:sldSz cx="12191695" cy="6858000" type="screen4x3"/>
+  <p:sldSz cx="12192000" cy="6858000"/>
   <p:notesSz cx="6858000" cy="9144000"/>
   <p:defaultTextStyle>
     <a:defPPr>
@@ -113,6 +113,22 @@
       </a:defRPr>
     </a:lvl9pPr>
   </p:defaultTextStyle>
+  <p:extLst>
+    <p:ext uri="{EFAFB233-063F-42B5-8137-9DF3F51BA10A}">
+      <p15:sldGuideLst xmlns:p15="http://schemas.microsoft.com/office/powerpoint/2012/main">
+        <p15:guide id="1" orient="horz" pos="2160">
+          <p15:clr>
+            <a:srgbClr val="A4A3A4"/>
+          </p15:clr>
+        </p15:guide>
+        <p15:guide id="2" pos="2880">
+          <p15:clr>
+            <a:srgbClr val="A4A3A4"/>
+          </p15:clr>
+        </p15:guide>
+      </p15:sldGuideLst>
+    </p:ext>
+  </p:extLst>
 </p:presentation>
 </file>
 
@@ -154,10 +170,9 @@
           <a:lstStyle/>
           <a:p>
             <a:r>
-              <a:rPr lang="en-US" smtClean="0"/>
+              <a:rPr lang="en-US"/>
               <a:t>Click to edit Master title style</a:t>
             </a:r>
-            <a:endParaRPr lang="en-US"/>
           </a:p>
         </p:txBody>
       </p:sp>
@@ -273,10 +288,9 @@
           </a:lstStyle>
           <a:p>
             <a:r>
-              <a:rPr lang="en-US" smtClean="0"/>
+              <a:rPr lang="en-US"/>
               <a:t>Click to edit Master subtitle style</a:t>
             </a:r>
-            <a:endParaRPr lang="en-US"/>
           </a:p>
         </p:txBody>
       </p:sp>
@@ -297,7 +311,7 @@
           <a:p>
             <a:fld id="{5BCAD085-E8A6-8845-BD4E-CB4CCA059FC4}" type="datetimeFigureOut">
               <a:rPr lang="en-US" smtClean="0"/>
-              <a:t>1/27/13</a:t>
+              <a:t>6/7/2026</a:t>
             </a:fld>
             <a:endParaRPr lang="en-US"/>
           </a:p>
@@ -391,10 +405,9 @@
           <a:lstStyle/>
           <a:p>
             <a:r>
-              <a:rPr lang="en-US" smtClean="0"/>
+              <a:rPr lang="en-US"/>
               <a:t>Click to edit Master title style</a:t>
             </a:r>
-            <a:endParaRPr lang="en-US"/>
           </a:p>
         </p:txBody>
       </p:sp>
@@ -415,38 +428,37 @@
           <a:p>
             <a:pPr lvl="0"/>
             <a:r>
-              <a:rPr lang="en-US" smtClean="0"/>
+              <a:rPr lang="en-US"/>
               <a:t>Click to edit Master text styles</a:t>
             </a:r>
           </a:p>
           <a:p>
             <a:pPr lvl="1"/>
             <a:r>
-              <a:rPr lang="en-US" smtClean="0"/>
+              <a:rPr lang="en-US"/>
               <a:t>Second level</a:t>
             </a:r>
           </a:p>
           <a:p>
             <a:pPr lvl="2"/>
             <a:r>
-              <a:rPr lang="en-US" smtClean="0"/>
+              <a:rPr lang="en-US"/>
               <a:t>Third level</a:t>
             </a:r>
           </a:p>
           <a:p>
             <a:pPr lvl="3"/>
             <a:r>
-              <a:rPr lang="en-US" smtClean="0"/>
+              <a:rPr lang="en-US"/>
               <a:t>Fourth level</a:t>
             </a:r>
           </a:p>
           <a:p>
             <a:pPr lvl="4"/>
             <a:r>
-              <a:rPr lang="en-US" smtClean="0"/>
+              <a:rPr lang="en-US"/>
               <a:t>Fifth level</a:t>
             </a:r>
-            <a:endParaRPr lang="en-US"/>
           </a:p>
         </p:txBody>
       </p:sp>
@@ -467,7 +479,7 @@
           <a:p>
             <a:fld id="{5BCAD085-E8A6-8845-BD4E-CB4CCA059FC4}" type="datetimeFigureOut">
               <a:rPr lang="en-US" smtClean="0"/>
-              <a:t>1/27/13</a:t>
+              <a:t>6/7/2026</a:t>
             </a:fld>
             <a:endParaRPr lang="en-US"/>
           </a:p>
@@ -566,10 +578,9 @@
           <a:lstStyle/>
           <a:p>
             <a:r>
-              <a:rPr lang="en-US" smtClean="0"/>
+              <a:rPr lang="en-US"/>
               <a:t>Click to edit Master title style</a:t>
             </a:r>
-            <a:endParaRPr lang="en-US"/>
           </a:p>
         </p:txBody>
       </p:sp>
@@ -595,38 +606,37 @@
           <a:p>
             <a:pPr lvl="0"/>
             <a:r>
-              <a:rPr lang="en-US" smtClean="0"/>
+              <a:rPr lang="en-US"/>
               <a:t>Click to edit Master text styles</a:t>
             </a:r>
           </a:p>
           <a:p>
             <a:pPr lvl="1"/>
             <a:r>
-              <a:rPr lang="en-US" smtClean="0"/>
+              <a:rPr lang="en-US"/>
               <a:t>Second level</a:t>
             </a:r>
           </a:p>
           <a:p>
             <a:pPr lvl="2"/>
             <a:r>
-              <a:rPr lang="en-US" smtClean="0"/>
+              <a:rPr lang="en-US"/>
               <a:t>Third level</a:t>
             </a:r>
           </a:p>
           <a:p>
             <a:pPr lvl="3"/>
             <a:r>
-              <a:rPr lang="en-US" smtClean="0"/>
+              <a:rPr lang="en-US"/>
               <a:t>Fourth level</a:t>
             </a:r>
           </a:p>
           <a:p>
             <a:pPr lvl="4"/>
             <a:r>
-              <a:rPr lang="en-US" smtClean="0"/>
+              <a:rPr lang="en-US"/>
               <a:t>Fifth level</a:t>
             </a:r>
-            <a:endParaRPr lang="en-US"/>
           </a:p>
         </p:txBody>
       </p:sp>
@@ -647,7 +657,7 @@
           <a:p>
             <a:fld id="{5BCAD085-E8A6-8845-BD4E-CB4CCA059FC4}" type="datetimeFigureOut">
               <a:rPr lang="en-US" smtClean="0"/>
-              <a:t>1/27/13</a:t>
+              <a:t>6/7/2026</a:t>
             </a:fld>
             <a:endParaRPr lang="en-US"/>
           </a:p>
@@ -741,10 +751,9 @@
           <a:lstStyle/>
           <a:p>
             <a:r>
-              <a:rPr lang="en-US" smtClean="0"/>
+              <a:rPr lang="en-US"/>
               <a:t>Click to edit Master title style</a:t>
             </a:r>
-            <a:endParaRPr lang="en-US"/>
           </a:p>
         </p:txBody>
       </p:sp>
@@ -765,38 +774,37 @@
           <a:p>
             <a:pPr lvl="0"/>
             <a:r>
-              <a:rPr lang="en-US" smtClean="0"/>
+              <a:rPr lang="en-US"/>
               <a:t>Click to edit Master text styles</a:t>
             </a:r>
           </a:p>
           <a:p>
             <a:pPr lvl="1"/>
             <a:r>
-              <a:rPr lang="en-US" smtClean="0"/>
+              <a:rPr lang="en-US"/>
               <a:t>Second level</a:t>
             </a:r>
           </a:p>
           <a:p>
             <a:pPr lvl="2"/>
             <a:r>
-              <a:rPr lang="en-US" smtClean="0"/>
+              <a:rPr lang="en-US"/>
               <a:t>Third level</a:t>
             </a:r>
           </a:p>
           <a:p>
             <a:pPr lvl="3"/>
             <a:r>
-              <a:rPr lang="en-US" smtClean="0"/>
+              <a:rPr lang="en-US"/>
               <a:t>Fourth level</a:t>
             </a:r>
           </a:p>
           <a:p>
             <a:pPr lvl="4"/>
             <a:r>
-              <a:rPr lang="en-US" smtClean="0"/>
+              <a:rPr lang="en-US"/>
               <a:t>Fifth level</a:t>
             </a:r>
-            <a:endParaRPr lang="en-US"/>
           </a:p>
         </p:txBody>
       </p:sp>
@@ -817,7 +825,7 @@
           <a:p>
             <a:fld id="{5BCAD085-E8A6-8845-BD4E-CB4CCA059FC4}" type="datetimeFigureOut">
               <a:rPr lang="en-US" smtClean="0"/>
-              <a:t>1/27/13</a:t>
+              <a:t>6/7/2026</a:t>
             </a:fld>
             <a:endParaRPr lang="en-US"/>
           </a:p>
@@ -920,10 +928,9 @@
           </a:lstStyle>
           <a:p>
             <a:r>
-              <a:rPr lang="en-US" smtClean="0"/>
+              <a:rPr lang="en-US"/>
               <a:t>Click to edit Master title style</a:t>
             </a:r>
-            <a:endParaRPr lang="en-US"/>
           </a:p>
         </p:txBody>
       </p:sp>
@@ -1040,7 +1047,7 @@
           <a:p>
             <a:pPr lvl="0"/>
             <a:r>
-              <a:rPr lang="en-US" smtClean="0"/>
+              <a:rPr lang="en-US"/>
               <a:t>Click to edit Master text styles</a:t>
             </a:r>
           </a:p>
@@ -1063,7 +1070,7 @@
           <a:p>
             <a:fld id="{5BCAD085-E8A6-8845-BD4E-CB4CCA059FC4}" type="datetimeFigureOut">
               <a:rPr lang="en-US" smtClean="0"/>
-              <a:t>1/27/13</a:t>
+              <a:t>6/7/2026</a:t>
             </a:fld>
             <a:endParaRPr lang="en-US"/>
           </a:p>
@@ -1157,10 +1164,9 @@
           <a:lstStyle/>
           <a:p>
             <a:r>
-              <a:rPr lang="en-US" smtClean="0"/>
+              <a:rPr lang="en-US"/>
               <a:t>Click to edit Master title style</a:t>
             </a:r>
-            <a:endParaRPr lang="en-US"/>
           </a:p>
         </p:txBody>
       </p:sp>
@@ -1214,38 +1220,37 @@
           <a:p>
             <a:pPr lvl="0"/>
             <a:r>
-              <a:rPr lang="en-US" smtClean="0"/>
+              <a:rPr lang="en-US"/>
               <a:t>Click to edit Master text styles</a:t>
             </a:r>
           </a:p>
           <a:p>
             <a:pPr lvl="1"/>
             <a:r>
-              <a:rPr lang="en-US" smtClean="0"/>
+              <a:rPr lang="en-US"/>
               <a:t>Second level</a:t>
             </a:r>
           </a:p>
           <a:p>
             <a:pPr lvl="2"/>
             <a:r>
-              <a:rPr lang="en-US" smtClean="0"/>
+              <a:rPr lang="en-US"/>
               <a:t>Third level</a:t>
             </a:r>
           </a:p>
           <a:p>
             <a:pPr lvl="3"/>
             <a:r>
-              <a:rPr lang="en-US" smtClean="0"/>
+              <a:rPr lang="en-US"/>
               <a:t>Fourth level</a:t>
             </a:r>
           </a:p>
           <a:p>
             <a:pPr lvl="4"/>
             <a:r>
-              <a:rPr lang="en-US" smtClean="0"/>
+              <a:rPr lang="en-US"/>
               <a:t>Fifth level</a:t>
             </a:r>
-            <a:endParaRPr lang="en-US"/>
           </a:p>
         </p:txBody>
       </p:sp>
@@ -1299,38 +1304,37 @@
           <a:p>
             <a:pPr lvl="0"/>
             <a:r>
-              <a:rPr lang="en-US" smtClean="0"/>
+              <a:rPr lang="en-US"/>
               <a:t>Click to edit Master text styles</a:t>
             </a:r>
           </a:p>
           <a:p>
             <a:pPr lvl="1"/>
             <a:r>
-              <a:rPr lang="en-US" smtClean="0"/>
+              <a:rPr lang="en-US"/>
               <a:t>Second level</a:t>
             </a:r>
           </a:p>
           <a:p>
             <a:pPr lvl="2"/>
             <a:r>
-              <a:rPr lang="en-US" smtClean="0"/>
+              <a:rPr lang="en-US"/>
               <a:t>Third level</a:t>
             </a:r>
           </a:p>
           <a:p>
             <a:pPr lvl="3"/>
             <a:r>
-              <a:rPr lang="en-US" smtClean="0"/>
+              <a:rPr lang="en-US"/>
               <a:t>Fourth level</a:t>
             </a:r>
           </a:p>
           <a:p>
             <a:pPr lvl="4"/>
             <a:r>
-              <a:rPr lang="en-US" smtClean="0"/>
+              <a:rPr lang="en-US"/>
               <a:t>Fifth level</a:t>
             </a:r>
-            <a:endParaRPr lang="en-US"/>
           </a:p>
         </p:txBody>
       </p:sp>
@@ -1351,7 +1355,7 @@
           <a:p>
             <a:fld id="{5BCAD085-E8A6-8845-BD4E-CB4CCA059FC4}" type="datetimeFigureOut">
               <a:rPr lang="en-US" smtClean="0"/>
-              <a:t>1/27/13</a:t>
+              <a:t>6/7/2026</a:t>
             </a:fld>
             <a:endParaRPr lang="en-US"/>
           </a:p>
@@ -1449,10 +1453,9 @@
           </a:lstStyle>
           <a:p>
             <a:r>
-              <a:rPr lang="en-US" smtClean="0"/>
+              <a:rPr lang="en-US"/>
               <a:t>Click to edit Master title style</a:t>
             </a:r>
-            <a:endParaRPr lang="en-US"/>
           </a:p>
         </p:txBody>
       </p:sp>
@@ -1515,7 +1518,7 @@
           <a:p>
             <a:pPr lvl="0"/>
             <a:r>
-              <a:rPr lang="en-US" smtClean="0"/>
+              <a:rPr lang="en-US"/>
               <a:t>Click to edit Master text styles</a:t>
             </a:r>
           </a:p>
@@ -1571,38 +1574,37 @@
           <a:p>
             <a:pPr lvl="0"/>
             <a:r>
-              <a:rPr lang="en-US" smtClean="0"/>
+              <a:rPr lang="en-US"/>
               <a:t>Click to edit Master text styles</a:t>
             </a:r>
           </a:p>
           <a:p>
             <a:pPr lvl="1"/>
             <a:r>
-              <a:rPr lang="en-US" smtClean="0"/>
+              <a:rPr lang="en-US"/>
               <a:t>Second level</a:t>
             </a:r>
           </a:p>
           <a:p>
             <a:pPr lvl="2"/>
             <a:r>
-              <a:rPr lang="en-US" smtClean="0"/>
+              <a:rPr lang="en-US"/>
               <a:t>Third level</a:t>
             </a:r>
           </a:p>
           <a:p>
             <a:pPr lvl="3"/>
             <a:r>
-              <a:rPr lang="en-US" smtClean="0"/>
+              <a:rPr lang="en-US"/>
               <a:t>Fourth level</a:t>
             </a:r>
           </a:p>
           <a:p>
             <a:pPr lvl="4"/>
             <a:r>
-              <a:rPr lang="en-US" smtClean="0"/>
+              <a:rPr lang="en-US"/>
               <a:t>Fifth level</a:t>
             </a:r>
-            <a:endParaRPr lang="en-US"/>
           </a:p>
         </p:txBody>
       </p:sp>
@@ -1665,7 +1667,7 @@
           <a:p>
             <a:pPr lvl="0"/>
             <a:r>
-              <a:rPr lang="en-US" smtClean="0"/>
+              <a:rPr lang="en-US"/>
               <a:t>Click to edit Master text styles</a:t>
             </a:r>
           </a:p>
@@ -1721,38 +1723,37 @@
           <a:p>
             <a:pPr lvl="0"/>
             <a:r>
-              <a:rPr lang="en-US" smtClean="0"/>
+              <a:rPr lang="en-US"/>
               <a:t>Click to edit Master text styles</a:t>
             </a:r>
           </a:p>
           <a:p>
             <a:pPr lvl="1"/>
             <a:r>
-              <a:rPr lang="en-US" smtClean="0"/>
+              <a:rPr lang="en-US"/>
               <a:t>Second level</a:t>
             </a:r>
           </a:p>
           <a:p>
             <a:pPr lvl="2"/>
             <a:r>
-              <a:rPr lang="en-US" smtClean="0"/>
+              <a:rPr lang="en-US"/>
               <a:t>Third level</a:t>
             </a:r>
           </a:p>
           <a:p>
             <a:pPr lvl="3"/>
             <a:r>
-              <a:rPr lang="en-US" smtClean="0"/>
+              <a:rPr lang="en-US"/>
               <a:t>Fourth level</a:t>
             </a:r>
           </a:p>
           <a:p>
             <a:pPr lvl="4"/>
             <a:r>
-              <a:rPr lang="en-US" smtClean="0"/>
+              <a:rPr lang="en-US"/>
               <a:t>Fifth level</a:t>
             </a:r>
-            <a:endParaRPr lang="en-US"/>
           </a:p>
         </p:txBody>
       </p:sp>
@@ -1773,7 +1774,7 @@
           <a:p>
             <a:fld id="{5BCAD085-E8A6-8845-BD4E-CB4CCA059FC4}" type="datetimeFigureOut">
               <a:rPr lang="en-US" smtClean="0"/>
-              <a:t>1/27/13</a:t>
+              <a:t>6/7/2026</a:t>
             </a:fld>
             <a:endParaRPr lang="en-US"/>
           </a:p>
@@ -1867,10 +1868,9 @@
           <a:lstStyle/>
           <a:p>
             <a:r>
-              <a:rPr lang="en-US" smtClean="0"/>
+              <a:rPr lang="en-US"/>
               <a:t>Click to edit Master title style</a:t>
             </a:r>
-            <a:endParaRPr lang="en-US"/>
           </a:p>
         </p:txBody>
       </p:sp>
@@ -1891,7 +1891,7 @@
           <a:p>
             <a:fld id="{5BCAD085-E8A6-8845-BD4E-CB4CCA059FC4}" type="datetimeFigureOut">
               <a:rPr lang="en-US" smtClean="0"/>
-              <a:t>1/27/13</a:t>
+              <a:t>6/7/2026</a:t>
             </a:fld>
             <a:endParaRPr lang="en-US"/>
           </a:p>
@@ -1986,7 +1986,7 @@
           <a:p>
             <a:fld id="{5BCAD085-E8A6-8845-BD4E-CB4CCA059FC4}" type="datetimeFigureOut">
               <a:rPr lang="en-US" smtClean="0"/>
-              <a:t>1/27/13</a:t>
+              <a:t>6/7/2026</a:t>
             </a:fld>
             <a:endParaRPr lang="en-US"/>
           </a:p>
@@ -2089,10 +2089,9 @@
           </a:lstStyle>
           <a:p>
             <a:r>
-              <a:rPr lang="en-US" smtClean="0"/>
+              <a:rPr lang="en-US"/>
               <a:t>Click to edit Master title style</a:t>
             </a:r>
-            <a:endParaRPr lang="en-US"/>
           </a:p>
         </p:txBody>
       </p:sp>
@@ -2146,38 +2145,37 @@
           <a:p>
             <a:pPr lvl="0"/>
             <a:r>
-              <a:rPr lang="en-US" smtClean="0"/>
+              <a:rPr lang="en-US"/>
               <a:t>Click to edit Master text styles</a:t>
             </a:r>
           </a:p>
           <a:p>
             <a:pPr lvl="1"/>
             <a:r>
-              <a:rPr lang="en-US" smtClean="0"/>
+              <a:rPr lang="en-US"/>
               <a:t>Second level</a:t>
             </a:r>
           </a:p>
           <a:p>
             <a:pPr lvl="2"/>
             <a:r>
-              <a:rPr lang="en-US" smtClean="0"/>
+              <a:rPr lang="en-US"/>
               <a:t>Third level</a:t>
             </a:r>
           </a:p>
           <a:p>
             <a:pPr lvl="3"/>
             <a:r>
-              <a:rPr lang="en-US" smtClean="0"/>
+              <a:rPr lang="en-US"/>
               <a:t>Fourth level</a:t>
             </a:r>
           </a:p>
           <a:p>
             <a:pPr lvl="4"/>
             <a:r>
-              <a:rPr lang="en-US" smtClean="0"/>
+              <a:rPr lang="en-US"/>
               <a:t>Fifth level</a:t>
             </a:r>
-            <a:endParaRPr lang="en-US"/>
           </a:p>
         </p:txBody>
       </p:sp>
@@ -2240,7 +2238,7 @@
           <a:p>
             <a:pPr lvl="0"/>
             <a:r>
-              <a:rPr lang="en-US" smtClean="0"/>
+              <a:rPr lang="en-US"/>
               <a:t>Click to edit Master text styles</a:t>
             </a:r>
           </a:p>
@@ -2263,7 +2261,7 @@
           <a:p>
             <a:fld id="{5BCAD085-E8A6-8845-BD4E-CB4CCA059FC4}" type="datetimeFigureOut">
               <a:rPr lang="en-US" smtClean="0"/>
-              <a:t>1/27/13</a:t>
+              <a:t>6/7/2026</a:t>
             </a:fld>
             <a:endParaRPr lang="en-US"/>
           </a:p>
@@ -2366,10 +2364,9 @@
           </a:lstStyle>
           <a:p>
             <a:r>
-              <a:rPr lang="en-US" smtClean="0"/>
+              <a:rPr lang="en-US"/>
               <a:t>Click to edit Master title style</a:t>
             </a:r>
-            <a:endParaRPr lang="en-US"/>
           </a:p>
         </p:txBody>
       </p:sp>
@@ -2493,7 +2490,7 @@
           <a:p>
             <a:pPr lvl="0"/>
             <a:r>
-              <a:rPr lang="en-US" smtClean="0"/>
+              <a:rPr lang="en-US"/>
               <a:t>Click to edit Master text styles</a:t>
             </a:r>
           </a:p>
@@ -2516,7 +2513,7 @@
           <a:p>
             <a:fld id="{5BCAD085-E8A6-8845-BD4E-CB4CCA059FC4}" type="datetimeFigureOut">
               <a:rPr lang="en-US" smtClean="0"/>
-              <a:t>1/27/13</a:t>
+              <a:t>6/7/2026</a:t>
             </a:fld>
             <a:endParaRPr lang="en-US"/>
           </a:p>
@@ -2625,10 +2622,9 @@
           <a:lstStyle/>
           <a:p>
             <a:r>
-              <a:rPr lang="en-US" smtClean="0"/>
+              <a:rPr lang="en-US"/>
               <a:t>Click to edit Master title style</a:t>
             </a:r>
-            <a:endParaRPr lang="en-US"/>
           </a:p>
         </p:txBody>
       </p:sp>
@@ -2659,38 +2655,37 @@
           <a:p>
             <a:pPr lvl="0"/>
             <a:r>
-              <a:rPr lang="en-US" smtClean="0"/>
+              <a:rPr lang="en-US"/>
               <a:t>Click to edit Master text styles</a:t>
             </a:r>
           </a:p>
           <a:p>
             <a:pPr lvl="1"/>
             <a:r>
-              <a:rPr lang="en-US" smtClean="0"/>
+              <a:rPr lang="en-US"/>
               <a:t>Second level</a:t>
             </a:r>
           </a:p>
           <a:p>
             <a:pPr lvl="2"/>
             <a:r>
-              <a:rPr lang="en-US" smtClean="0"/>
+              <a:rPr lang="en-US"/>
               <a:t>Third level</a:t>
             </a:r>
           </a:p>
           <a:p>
             <a:pPr lvl="3"/>
             <a:r>
-              <a:rPr lang="en-US" smtClean="0"/>
+              <a:rPr lang="en-US"/>
               <a:t>Fourth level</a:t>
             </a:r>
           </a:p>
           <a:p>
             <a:pPr lvl="4"/>
             <a:r>
-              <a:rPr lang="en-US" smtClean="0"/>
+              <a:rPr lang="en-US"/>
               <a:t>Fifth level</a:t>
             </a:r>
-            <a:endParaRPr lang="en-US"/>
           </a:p>
         </p:txBody>
       </p:sp>
@@ -2729,7 +2724,7 @@
           <a:p>
             <a:fld id="{5BCAD085-E8A6-8845-BD4E-CB4CCA059FC4}" type="datetimeFigureOut">
               <a:rPr lang="en-US" smtClean="0"/>
-              <a:t>1/27/13</a:t>
+              <a:t>6/7/2026</a:t>
             </a:fld>
             <a:endParaRPr lang="en-US"/>
           </a:p>
@@ -3088,7 +3083,7 @@
 </file>
 
 <file path=ppt/slides/slide1.xml><?xml version="1.0" encoding="utf-8"?>
-<p:sld xmlns:a="http://schemas.openxmlformats.org/drawingml/2006/main" xmlns:p="http://schemas.openxmlformats.org/presentationml/2006/main" xmlns:r="http://schemas.openxmlformats.org/officeDocument/2006/relationships">
+<p:sld xmlns:a="http://schemas.openxmlformats.org/drawingml/2006/main" xmlns:r="http://schemas.openxmlformats.org/officeDocument/2006/relationships" xmlns:p="http://schemas.openxmlformats.org/presentationml/2006/main">
   <p:cSld>
     <p:spTree>
       <p:nvGrpSpPr>
@@ -3096,7 +3091,14 @@
         <p:cNvGrpSpPr/>
         <p:nvPr/>
       </p:nvGrpSpPr>
-      <p:grpSpPr/>
+      <p:grpSpPr>
+        <a:xfrm>
+          <a:off x="0" y="0"/>
+          <a:ext cx="0" cy="0"/>
+          <a:chOff x="0" y="0"/>
+          <a:chExt cx="0" cy="0"/>
+        </a:xfrm>
+      </p:grpSpPr>
       <p:sp>
         <p:nvSpPr>
           <p:cNvPr id="2" name="Rectangle 1"/>
@@ -3138,6 +3140,7 @@
           <a:lstStyle/>
           <a:p>
             <a:pPr algn="ctr"/>
+            <a:endParaRPr/>
           </a:p>
         </p:txBody>
       </p:sp>
@@ -3182,6 +3185,7 @@
           <a:lstStyle/>
           <a:p>
             <a:pPr algn="ctr"/>
+            <a:endParaRPr/>
           </a:p>
         </p:txBody>
       </p:sp>
@@ -3226,6 +3230,7 @@
           <a:lstStyle/>
           <a:p>
             <a:pPr algn="ctr"/>
+            <a:endParaRPr/>
           </a:p>
         </p:txBody>
       </p:sp>
@@ -3270,6 +3275,7 @@
           <a:lstStyle/>
           <a:p>
             <a:pPr algn="ctr"/>
+            <a:endParaRPr/>
           </a:p>
         </p:txBody>
       </p:sp>
@@ -3290,7 +3296,7 @@
           <a:noFill/>
         </p:spPr>
         <p:txBody>
-          <a:bodyPr wrap="square" anchor="t" lIns="0" rIns="0" tIns="0" bIns="0">
+          <a:bodyPr wrap="square" lIns="0" tIns="0" rIns="0" bIns="0" anchor="t">
             <a:spAutoFit/>
           </a:bodyPr>
           <a:lstStyle/>
@@ -3369,6 +3375,7 @@
           <a:lstStyle/>
           <a:p>
             <a:pPr algn="ctr"/>
+            <a:endParaRPr/>
           </a:p>
         </p:txBody>
       </p:sp>
@@ -3389,7 +3396,7 @@
           <a:noFill/>
         </p:spPr>
         <p:txBody>
-          <a:bodyPr wrap="square" anchor="t" lIns="0" rIns="0" tIns="0" bIns="0">
+          <a:bodyPr wrap="square" lIns="0" tIns="0" rIns="0" bIns="0" anchor="t">
             <a:spAutoFit/>
           </a:bodyPr>
           <a:lstStyle/>
@@ -3452,7 +3459,7 @@
 </file>
 
 <file path=ppt/slides/slide10.xml><?xml version="1.0" encoding="utf-8"?>
-<p:sld xmlns:a="http://schemas.openxmlformats.org/drawingml/2006/main" xmlns:p="http://schemas.openxmlformats.org/presentationml/2006/main" xmlns:r="http://schemas.openxmlformats.org/officeDocument/2006/relationships">
+<p:sld xmlns:a="http://schemas.openxmlformats.org/drawingml/2006/main" xmlns:r="http://schemas.openxmlformats.org/officeDocument/2006/relationships" xmlns:p="http://schemas.openxmlformats.org/presentationml/2006/main">
   <p:cSld>
     <p:spTree>
       <p:nvGrpSpPr>
@@ -3460,7 +3467,14 @@
         <p:cNvGrpSpPr/>
         <p:nvPr/>
       </p:nvGrpSpPr>
-      <p:grpSpPr/>
+      <p:grpSpPr>
+        <a:xfrm>
+          <a:off x="0" y="0"/>
+          <a:ext cx="0" cy="0"/>
+          <a:chOff x="0" y="0"/>
+          <a:chExt cx="0" cy="0"/>
+        </a:xfrm>
+      </p:grpSpPr>
       <p:sp>
         <p:nvSpPr>
           <p:cNvPr id="2" name="Rectangle 1"/>
@@ -3502,6 +3516,7 @@
           <a:lstStyle/>
           <a:p>
             <a:pPr algn="ctr"/>
+            <a:endParaRPr/>
           </a:p>
         </p:txBody>
       </p:sp>
@@ -3546,6 +3561,7 @@
           <a:lstStyle/>
           <a:p>
             <a:pPr algn="ctr"/>
+            <a:endParaRPr/>
           </a:p>
         </p:txBody>
       </p:sp>
@@ -3566,7 +3582,7 @@
           <a:noFill/>
         </p:spPr>
         <p:txBody>
-          <a:bodyPr wrap="square" anchor="t" lIns="0" rIns="0" tIns="0" bIns="0">
+          <a:bodyPr wrap="square" lIns="0" tIns="0" rIns="0" bIns="0" anchor="t">
             <a:spAutoFit/>
           </a:bodyPr>
           <a:lstStyle/>
@@ -3645,7 +3661,7 @@
 </file>
 
 <file path=ppt/slides/slide2.xml><?xml version="1.0" encoding="utf-8"?>
-<p:sld xmlns:a="http://schemas.openxmlformats.org/drawingml/2006/main" xmlns:p="http://schemas.openxmlformats.org/presentationml/2006/main" xmlns:r="http://schemas.openxmlformats.org/officeDocument/2006/relationships">
+<p:sld xmlns:a="http://schemas.openxmlformats.org/drawingml/2006/main" xmlns:r="http://schemas.openxmlformats.org/officeDocument/2006/relationships" xmlns:p="http://schemas.openxmlformats.org/presentationml/2006/main">
   <p:cSld>
     <p:spTree>
       <p:nvGrpSpPr>
@@ -3653,17 +3669,420 @@
         <p:cNvGrpSpPr/>
         <p:nvPr/>
       </p:nvGrpSpPr>
-      <p:grpSpPr/>
-      <p:sp>
-        <p:nvSpPr>
-          <p:cNvPr id="2" name="Rectangle 1"/>
+      <p:grpSpPr>
+        <a:xfrm>
+          <a:off x="0" y="0"/>
+          <a:ext cx="0" cy="0"/>
+          <a:chOff x="0" y="0"/>
+          <a:chExt cx="0" cy="0"/>
+        </a:xfrm>
+      </p:grpSpPr>
+      <p:sp>
+        <p:nvSpPr>
+          <p:cNvPr id="6" name="Rectangle 5"/>
           <p:cNvSpPr/>
           <p:nvPr/>
         </p:nvSpPr>
         <p:spPr>
+          <a:xfrm>
+            <a:off x="777240" y="548640"/>
+            <a:ext cx="146304" cy="868680"/>
+          </a:xfrm>
+          <a:prstGeom prst="rect">
+            <a:avLst/>
+          </a:prstGeom>
+          <a:solidFill>
+            <a:srgbClr val="1D4ED8"/>
+          </a:solidFill>
+          <a:ln>
+            <a:noFill/>
+          </a:ln>
+          <a:effectLst/>
+        </p:spPr>
+        <p:style>
+          <a:lnRef idx="1">
+            <a:schemeClr val="accent1"/>
+          </a:lnRef>
+          <a:fillRef idx="3">
+            <a:schemeClr val="accent1"/>
+          </a:fillRef>
+          <a:effectRef idx="2">
+            <a:schemeClr val="accent1"/>
+          </a:effectRef>
+          <a:fontRef idx="minor">
+            <a:schemeClr val="lt1"/>
+          </a:fontRef>
+        </p:style>
+        <p:txBody>
+          <a:bodyPr rtlCol="0" anchor="ctr"/>
+          <a:lstStyle/>
+          <a:p>
+            <a:pPr algn="ctr"/>
+            <a:endParaRPr/>
+          </a:p>
+        </p:txBody>
+      </p:sp>
+      <p:sp>
+        <p:nvSpPr>
+          <p:cNvPr id="7" name="TextBox 6"/>
+          <p:cNvSpPr txBox="1"/>
+          <p:nvPr/>
+        </p:nvSpPr>
+        <p:spPr>
+          <a:xfrm>
+            <a:off x="1051560" y="502920"/>
+            <a:ext cx="10241280" cy="1005840"/>
+          </a:xfrm>
+          <a:prstGeom prst="rect">
+            <a:avLst/>
+          </a:prstGeom>
+          <a:noFill/>
+        </p:spPr>
+        <p:txBody>
+          <a:bodyPr wrap="square" lIns="0" tIns="0" rIns="0" bIns="0" anchor="t">
+            <a:spAutoFit/>
+          </a:bodyPr>
+          <a:lstStyle/>
+          <a:p>
+            <a:pPr algn="l">
+              <a:spcAft>
+                <a:spcPts val="200"/>
+              </a:spcAft>
+            </a:pPr>
+            <a:r>
+              <a:rPr sz="3400" b="1">
+                <a:solidFill>
+                  <a:srgbClr val="1E3A8A"/>
+                </a:solidFill>
+                <a:latin typeface="Cambria"/>
+              </a:rPr>
+              <a:t>Hakkımda</a:t>
+            </a:r>
+          </a:p>
+        </p:txBody>
+      </p:sp>
+      <p:sp>
+        <p:nvSpPr>
+          <p:cNvPr id="8" name="Rectangle 7"/>
+          <p:cNvSpPr/>
+          <p:nvPr/>
+        </p:nvSpPr>
+        <p:spPr>
+          <a:xfrm>
+            <a:off x="1051560" y="1481328"/>
+            <a:ext cx="2926080" cy="45720"/>
+          </a:xfrm>
+          <a:prstGeom prst="rect">
+            <a:avLst/>
+          </a:prstGeom>
+          <a:solidFill>
+            <a:srgbClr val="DBEAFE"/>
+          </a:solidFill>
+          <a:ln>
+            <a:noFill/>
+          </a:ln>
+          <a:effectLst/>
+        </p:spPr>
+        <p:style>
+          <a:lnRef idx="1">
+            <a:schemeClr val="accent1"/>
+          </a:lnRef>
+          <a:fillRef idx="3">
+            <a:schemeClr val="accent1"/>
+          </a:fillRef>
+          <a:effectRef idx="2">
+            <a:schemeClr val="accent1"/>
+          </a:effectRef>
+          <a:fontRef idx="minor">
+            <a:schemeClr val="lt1"/>
+          </a:fontRef>
+        </p:style>
+        <p:txBody>
+          <a:bodyPr rtlCol="0" anchor="ctr"/>
+          <a:lstStyle/>
+          <a:p>
+            <a:pPr algn="ctr"/>
+            <a:endParaRPr/>
+          </a:p>
+        </p:txBody>
+      </p:sp>
+      <p:sp>
+        <p:nvSpPr>
+          <p:cNvPr id="9" name="TextBox 8"/>
+          <p:cNvSpPr txBox="1"/>
+          <p:nvPr/>
+        </p:nvSpPr>
+        <p:spPr>
+          <a:xfrm>
+            <a:off x="1051560" y="1828800"/>
+            <a:ext cx="6583680" cy="4206240"/>
+          </a:xfrm>
+          <a:prstGeom prst="rect">
+            <a:avLst/>
+          </a:prstGeom>
+          <a:noFill/>
+        </p:spPr>
+        <p:txBody>
+          <a:bodyPr wrap="square" lIns="0" tIns="0" rIns="0" bIns="0" anchor="t">
+            <a:spAutoFit/>
+          </a:bodyPr>
+          <a:lstStyle/>
+          <a:p>
+            <a:pPr algn="l">
+              <a:spcAft>
+                <a:spcPts val="1200"/>
+              </a:spcAft>
+            </a:pPr>
+            <a:r>
+              <a:rPr sz="1700" b="0">
+                <a:solidFill>
+                  <a:srgbClr val="1F2937"/>
+                </a:solidFill>
+                <a:latin typeface="Calibri"/>
+              </a:rPr>
+              <a:t>Ben Yiğit Şeker. Sakarya Üniversitesi Yazılım Mühendisliği 3. sınıf öğrencisiyim.</a:t>
+            </a:r>
+          </a:p>
+          <a:p>
+            <a:pPr algn="l">
+              <a:spcAft>
+                <a:spcPts val="1000"/>
+              </a:spcAft>
+            </a:pPr>
+            <a:r>
+              <a:rPr sz="1700" b="0">
+                <a:solidFill>
+                  <a:srgbClr val="1F2937"/>
+                </a:solidFill>
+                <a:latin typeface="Calibri"/>
+              </a:rPr>
+              <a:t>Yazılım geliştirme alanında özellikle full-stack web teknolojileri ve yapay zeka tabanlı bilgisayarlı görü projeleri üzerine çalışıyorum. Backend, frontend ve veri odaklı sistemler geliştirmenin yanında, YOLO tabanlı nesne tespiti projeleriyle yapay zekanın gerçek dünya problemlerine uygulanması konusunda deneyim kazanıyorum.</a:t>
+            </a:r>
+          </a:p>
+        </p:txBody>
+      </p:sp>
+      <p:sp>
+        <p:nvSpPr>
+          <p:cNvPr id="10" name="Rectangle 9"/>
+          <p:cNvSpPr/>
+          <p:nvPr/>
+        </p:nvSpPr>
+        <p:spPr>
+          <a:xfrm>
+            <a:off x="7955279" y="1828800"/>
+            <a:ext cx="3291840" cy="3108960"/>
+          </a:xfrm>
+          <a:prstGeom prst="rect">
+            <a:avLst/>
+          </a:prstGeom>
+          <a:solidFill>
+            <a:srgbClr val="F1F5F9"/>
+          </a:solidFill>
+          <a:ln>
+            <a:noFill/>
+          </a:ln>
+          <a:effectLst/>
+        </p:spPr>
+        <p:style>
+          <a:lnRef idx="1">
+            <a:schemeClr val="accent1"/>
+          </a:lnRef>
+          <a:fillRef idx="3">
+            <a:schemeClr val="accent1"/>
+          </a:fillRef>
+          <a:effectRef idx="2">
+            <a:schemeClr val="accent1"/>
+          </a:effectRef>
+          <a:fontRef idx="minor">
+            <a:schemeClr val="lt1"/>
+          </a:fontRef>
+        </p:style>
+        <p:txBody>
+          <a:bodyPr rtlCol="0" anchor="ctr"/>
+          <a:lstStyle/>
+          <a:p>
+            <a:pPr algn="ctr"/>
+            <a:endParaRPr/>
+          </a:p>
+        </p:txBody>
+      </p:sp>
+      <p:sp>
+        <p:nvSpPr>
+          <p:cNvPr id="11" name="TextBox 10"/>
+          <p:cNvSpPr txBox="1"/>
+          <p:nvPr/>
+        </p:nvSpPr>
+        <p:spPr>
+          <a:xfrm>
+            <a:off x="8229600" y="2057400"/>
+            <a:ext cx="2743200" cy="2743200"/>
+          </a:xfrm>
+          <a:prstGeom prst="rect">
+            <a:avLst/>
+          </a:prstGeom>
+          <a:noFill/>
+        </p:spPr>
+        <p:txBody>
+          <a:bodyPr wrap="square" lIns="0" tIns="0" rIns="0" bIns="0" anchor="t">
+            <a:spAutoFit/>
+          </a:bodyPr>
+          <a:lstStyle/>
+          <a:p>
+            <a:pPr algn="l">
+              <a:spcAft>
+                <a:spcPts val="1000"/>
+              </a:spcAft>
+            </a:pPr>
+            <a:r>
+              <a:rPr sz="1300" b="1">
+                <a:solidFill>
+                  <a:srgbClr val="1D4ED8"/>
+                </a:solidFill>
+                <a:latin typeface="Cambria"/>
+              </a:rPr>
+              <a:t>Künye</a:t>
+            </a:r>
+          </a:p>
+          <a:p>
+            <a:pPr algn="l">
+              <a:spcAft>
+                <a:spcPts val="0"/>
+              </a:spcAft>
+            </a:pPr>
+            <a:r>
+              <a:rPr sz="1100" b="0">
+                <a:solidFill>
+                  <a:srgbClr val="475569"/>
+                </a:solidFill>
+                <a:latin typeface="Calibri"/>
+              </a:rPr>
+              <a:t>Bölüm</a:t>
+            </a:r>
+          </a:p>
+          <a:p>
+            <a:pPr algn="l">
+              <a:spcAft>
+                <a:spcPts val="800"/>
+              </a:spcAft>
+            </a:pPr>
+            <a:r>
+              <a:rPr sz="1400" b="1">
+                <a:solidFill>
+                  <a:srgbClr val="1F2937"/>
+                </a:solidFill>
+                <a:latin typeface="Calibri"/>
+              </a:rPr>
+              <a:t>Yazılım Müh. · 3. sınıf</a:t>
+            </a:r>
+          </a:p>
+          <a:p>
+            <a:pPr algn="l">
+              <a:spcAft>
+                <a:spcPts val="0"/>
+              </a:spcAft>
+            </a:pPr>
+            <a:r>
+              <a:rPr sz="1100" b="0">
+                <a:solidFill>
+                  <a:srgbClr val="475569"/>
+                </a:solidFill>
+                <a:latin typeface="Calibri"/>
+              </a:rPr>
+              <a:t>Not Ortalaması (GNO)</a:t>
+            </a:r>
+          </a:p>
+          <a:p>
+            <a:pPr algn="l">
+              <a:spcAft>
+                <a:spcPts val="800"/>
+              </a:spcAft>
+            </a:pPr>
+            <a:r>
+              <a:rPr sz="1400" b="1">
+                <a:solidFill>
+                  <a:srgbClr val="1F2937"/>
+                </a:solidFill>
+                <a:latin typeface="Calibri"/>
+              </a:rPr>
+              <a:t>2.78</a:t>
+            </a:r>
+          </a:p>
+          <a:p>
+            <a:pPr algn="l">
+              <a:spcAft>
+                <a:spcPts val="0"/>
+              </a:spcAft>
+            </a:pPr>
+            <a:r>
+              <a:rPr sz="1100" b="0">
+                <a:solidFill>
+                  <a:srgbClr val="475569"/>
+                </a:solidFill>
+                <a:latin typeface="Calibri"/>
+              </a:rPr>
+              <a:t>İngilizce</a:t>
+            </a:r>
+          </a:p>
+          <a:p>
+            <a:pPr algn="l">
+              <a:spcAft>
+                <a:spcPts val="800"/>
+              </a:spcAft>
+            </a:pPr>
+            <a:r>
+              <a:rPr sz="1400" b="1">
+                <a:solidFill>
+                  <a:srgbClr val="1F2937"/>
+                </a:solidFill>
+                <a:latin typeface="Calibri"/>
+              </a:rPr>
+              <a:t>B2</a:t>
+            </a:r>
+          </a:p>
+          <a:p>
+            <a:pPr algn="l">
+              <a:spcAft>
+                <a:spcPts val="0"/>
+              </a:spcAft>
+            </a:pPr>
+            <a:r>
+              <a:rPr sz="1100" b="0">
+                <a:solidFill>
+                  <a:srgbClr val="475569"/>
+                </a:solidFill>
+                <a:latin typeface="Calibri"/>
+              </a:rPr>
+              <a:t>İlgi alanları</a:t>
+            </a:r>
+          </a:p>
+          <a:p>
+            <a:pPr algn="l">
+              <a:spcAft>
+                <a:spcPts val="800"/>
+              </a:spcAft>
+            </a:pPr>
+            <a:r>
+              <a:rPr sz="1400" b="1">
+                <a:solidFill>
+                  <a:srgbClr val="1F2937"/>
+                </a:solidFill>
+                <a:latin typeface="Calibri"/>
+              </a:rPr>
+              <a:t>Full-stack web · Yapay zeka / bilgisayarlı görü (YOLO)</a:t>
+            </a:r>
+          </a:p>
+        </p:txBody>
+      </p:sp>
+      <p:sp>
+        <p:nvSpPr>
+          <p:cNvPr id="12" name="Rectangle 11"/>
+          <p:cNvSpPr/>
+          <p:nvPr/>
+        </p:nvSpPr>
+        <p:spPr>
           <a:xfrm rot="2100000">
-            <a:off x="11430000" y="-731520"/>
-            <a:ext cx="1920240" cy="1371600"/>
+            <a:off x="10835640" y="411480"/>
+            <a:ext cx="1280160" cy="457200"/>
           </a:xfrm>
           <a:prstGeom prst="rect">
             <a:avLst/>
@@ -3700,14 +4119,14 @@
       </p:sp>
       <p:sp>
         <p:nvSpPr>
-          <p:cNvPr id="3" name="Rectangle 2"/>
+          <p:cNvPr id="13" name="Rectangle 12"/>
           <p:cNvSpPr/>
           <p:nvPr/>
         </p:nvSpPr>
         <p:spPr>
           <a:xfrm rot="2100000">
-            <a:off x="11795760" y="-457200"/>
-            <a:ext cx="1645920" cy="1188720"/>
+            <a:off x="11109960" y="274320"/>
+            <a:ext cx="1005840" cy="365760"/>
           </a:xfrm>
           <a:prstGeom prst="rect">
             <a:avLst/>
@@ -3744,14 +4163,14 @@
       </p:sp>
       <p:sp>
         <p:nvSpPr>
-          <p:cNvPr id="4" name="Rectangle 3"/>
+          <p:cNvPr id="14" name="Rectangle 13"/>
           <p:cNvSpPr/>
           <p:nvPr/>
         </p:nvSpPr>
         <p:spPr>
           <a:xfrm rot="2100000">
-            <a:off x="11155680" y="6035040"/>
-            <a:ext cx="2377440" cy="1828800"/>
+            <a:off x="10835640" y="5989320"/>
+            <a:ext cx="1280160" cy="457200"/>
           </a:xfrm>
           <a:prstGeom prst="rect">
             <a:avLst/>
@@ -3788,14 +4207,14 @@
       </p:sp>
       <p:sp>
         <p:nvSpPr>
-          <p:cNvPr id="5" name="Rectangle 4"/>
+          <p:cNvPr id="15" name="Rectangle 14"/>
           <p:cNvSpPr/>
           <p:nvPr/>
         </p:nvSpPr>
         <p:spPr>
           <a:xfrm rot="2100000">
-            <a:off x="11521440" y="6400800"/>
-            <a:ext cx="2194560" cy="1645920"/>
+            <a:off x="11109960" y="6199632"/>
+            <a:ext cx="1005840" cy="365760"/>
           </a:xfrm>
           <a:prstGeom prst="rect">
             <a:avLst/>
@@ -3827,399 +4246,6 @@
           <a:lstStyle/>
           <a:p>
             <a:pPr algn="ctr"/>
-          </a:p>
-        </p:txBody>
-      </p:sp>
-      <p:sp>
-        <p:nvSpPr>
-          <p:cNvPr id="6" name="Rectangle 5"/>
-          <p:cNvSpPr/>
-          <p:nvPr/>
-        </p:nvSpPr>
-        <p:spPr>
-          <a:xfrm>
-            <a:off x="777240" y="548640"/>
-            <a:ext cx="146304" cy="868680"/>
-          </a:xfrm>
-          <a:prstGeom prst="rect">
-            <a:avLst/>
-          </a:prstGeom>
-          <a:solidFill>
-            <a:srgbClr val="1D4ED8"/>
-          </a:solidFill>
-          <a:ln>
-            <a:noFill/>
-          </a:ln>
-          <a:effectLst/>
-        </p:spPr>
-        <p:style>
-          <a:lnRef idx="1">
-            <a:schemeClr val="accent1"/>
-          </a:lnRef>
-          <a:fillRef idx="3">
-            <a:schemeClr val="accent1"/>
-          </a:fillRef>
-          <a:effectRef idx="2">
-            <a:schemeClr val="accent1"/>
-          </a:effectRef>
-          <a:fontRef idx="minor">
-            <a:schemeClr val="lt1"/>
-          </a:fontRef>
-        </p:style>
-        <p:txBody>
-          <a:bodyPr rtlCol="0" anchor="ctr"/>
-          <a:lstStyle/>
-          <a:p>
-            <a:pPr algn="ctr"/>
-          </a:p>
-        </p:txBody>
-      </p:sp>
-      <p:sp>
-        <p:nvSpPr>
-          <p:cNvPr id="7" name="TextBox 6"/>
-          <p:cNvSpPr txBox="1"/>
-          <p:nvPr/>
-        </p:nvSpPr>
-        <p:spPr>
-          <a:xfrm>
-            <a:off x="1051560" y="502920"/>
-            <a:ext cx="10241280" cy="1005840"/>
-          </a:xfrm>
-          <a:prstGeom prst="rect">
-            <a:avLst/>
-          </a:prstGeom>
-          <a:noFill/>
-        </p:spPr>
-        <p:txBody>
-          <a:bodyPr wrap="square" anchor="t" lIns="0" rIns="0" tIns="0" bIns="0">
-            <a:spAutoFit/>
-          </a:bodyPr>
-          <a:lstStyle/>
-          <a:p>
-            <a:pPr algn="l">
-              <a:spcAft>
-                <a:spcPts val="200"/>
-              </a:spcAft>
-            </a:pPr>
-            <a:r>
-              <a:rPr sz="3400" b="1">
-                <a:solidFill>
-                  <a:srgbClr val="1E3A8A"/>
-                </a:solidFill>
-                <a:latin typeface="Cambria"/>
-              </a:rPr>
-              <a:t>Hakkımda</a:t>
-            </a:r>
-          </a:p>
-        </p:txBody>
-      </p:sp>
-      <p:sp>
-        <p:nvSpPr>
-          <p:cNvPr id="8" name="Rectangle 7"/>
-          <p:cNvSpPr/>
-          <p:nvPr/>
-        </p:nvSpPr>
-        <p:spPr>
-          <a:xfrm>
-            <a:off x="1051560" y="1481328"/>
-            <a:ext cx="2926080" cy="45720"/>
-          </a:xfrm>
-          <a:prstGeom prst="rect">
-            <a:avLst/>
-          </a:prstGeom>
-          <a:solidFill>
-            <a:srgbClr val="DBEAFE"/>
-          </a:solidFill>
-          <a:ln>
-            <a:noFill/>
-          </a:ln>
-          <a:effectLst/>
-        </p:spPr>
-        <p:style>
-          <a:lnRef idx="1">
-            <a:schemeClr val="accent1"/>
-          </a:lnRef>
-          <a:fillRef idx="3">
-            <a:schemeClr val="accent1"/>
-          </a:fillRef>
-          <a:effectRef idx="2">
-            <a:schemeClr val="accent1"/>
-          </a:effectRef>
-          <a:fontRef idx="minor">
-            <a:schemeClr val="lt1"/>
-          </a:fontRef>
-        </p:style>
-        <p:txBody>
-          <a:bodyPr rtlCol="0" anchor="ctr"/>
-          <a:lstStyle/>
-          <a:p>
-            <a:pPr algn="ctr"/>
-          </a:p>
-        </p:txBody>
-      </p:sp>
-      <p:sp>
-        <p:nvSpPr>
-          <p:cNvPr id="9" name="TextBox 8"/>
-          <p:cNvSpPr txBox="1"/>
-          <p:nvPr/>
-        </p:nvSpPr>
-        <p:spPr>
-          <a:xfrm>
-            <a:off x="1051560" y="1828800"/>
-            <a:ext cx="6583680" cy="4206240"/>
-          </a:xfrm>
-          <a:prstGeom prst="rect">
-            <a:avLst/>
-          </a:prstGeom>
-          <a:noFill/>
-        </p:spPr>
-        <p:txBody>
-          <a:bodyPr wrap="square" anchor="t" lIns="0" rIns="0" tIns="0" bIns="0">
-            <a:spAutoFit/>
-          </a:bodyPr>
-          <a:lstStyle/>
-          <a:p>
-            <a:pPr algn="l">
-              <a:spcAft>
-                <a:spcPts val="1200"/>
-              </a:spcAft>
-            </a:pPr>
-            <a:r>
-              <a:rPr sz="1700" b="0">
-                <a:solidFill>
-                  <a:srgbClr val="1F2937"/>
-                </a:solidFill>
-                <a:latin typeface="Calibri"/>
-              </a:rPr>
-              <a:t>Ben Yiğit Şeker. Sakarya Üniversitesi Yazılım Mühendisliği 3. sınıf öğrencisiyim.</a:t>
-            </a:r>
-          </a:p>
-          <a:p>
-            <a:pPr algn="l">
-              <a:spcAft>
-                <a:spcPts val="1000"/>
-              </a:spcAft>
-            </a:pPr>
-            <a:r>
-              <a:rPr sz="1700" b="0">
-                <a:solidFill>
-                  <a:srgbClr val="1F2937"/>
-                </a:solidFill>
-                <a:latin typeface="Calibri"/>
-              </a:rPr>
-              <a:t>Yazılım geliştirme alanında özellikle full-stack web teknolojileri ve yapay zeka tabanlı bilgisayarlı görü projeleri üzerine çalışıyorum. Backend, frontend ve veri odaklı sistemler geliştirmenin yanında, YOLO tabanlı nesne tespiti projeleriyle yapay zekanın gerçek dünya problemlerine uygulanması konusunda deneyim kazanıyorum.</a:t>
-            </a:r>
-          </a:p>
-        </p:txBody>
-      </p:sp>
-      <p:sp>
-        <p:nvSpPr>
-          <p:cNvPr id="10" name="Rectangle 9"/>
-          <p:cNvSpPr/>
-          <p:nvPr/>
-        </p:nvSpPr>
-        <p:spPr>
-          <a:xfrm>
-            <a:off x="7955279" y="1828800"/>
-            <a:ext cx="3291840" cy="3108960"/>
-          </a:xfrm>
-          <a:prstGeom prst="rect">
-            <a:avLst/>
-          </a:prstGeom>
-          <a:solidFill>
-            <a:srgbClr val="F1F5F9"/>
-          </a:solidFill>
-          <a:ln>
-            <a:noFill/>
-          </a:ln>
-          <a:effectLst/>
-        </p:spPr>
-        <p:style>
-          <a:lnRef idx="1">
-            <a:schemeClr val="accent1"/>
-          </a:lnRef>
-          <a:fillRef idx="3">
-            <a:schemeClr val="accent1"/>
-          </a:fillRef>
-          <a:effectRef idx="2">
-            <a:schemeClr val="accent1"/>
-          </a:effectRef>
-          <a:fontRef idx="minor">
-            <a:schemeClr val="lt1"/>
-          </a:fontRef>
-        </p:style>
-        <p:txBody>
-          <a:bodyPr rtlCol="0" anchor="ctr"/>
-          <a:lstStyle/>
-          <a:p>
-            <a:pPr algn="ctr"/>
-          </a:p>
-        </p:txBody>
-      </p:sp>
-      <p:sp>
-        <p:nvSpPr>
-          <p:cNvPr id="11" name="TextBox 10"/>
-          <p:cNvSpPr txBox="1"/>
-          <p:nvPr/>
-        </p:nvSpPr>
-        <p:spPr>
-          <a:xfrm>
-            <a:off x="8229600" y="2057400"/>
-            <a:ext cx="2743200" cy="2743200"/>
-          </a:xfrm>
-          <a:prstGeom prst="rect">
-            <a:avLst/>
-          </a:prstGeom>
-          <a:noFill/>
-        </p:spPr>
-        <p:txBody>
-          <a:bodyPr wrap="square" anchor="t" lIns="0" rIns="0" tIns="0" bIns="0">
-            <a:spAutoFit/>
-          </a:bodyPr>
-          <a:lstStyle/>
-          <a:p>
-            <a:pPr algn="l">
-              <a:spcAft>
-                <a:spcPts val="1000"/>
-              </a:spcAft>
-            </a:pPr>
-            <a:r>
-              <a:rPr sz="1300" b="1">
-                <a:solidFill>
-                  <a:srgbClr val="1D4ED8"/>
-                </a:solidFill>
-                <a:latin typeface="Cambria"/>
-              </a:rPr>
-              <a:t>Künye</a:t>
-            </a:r>
-          </a:p>
-          <a:p>
-            <a:pPr algn="l">
-              <a:spcAft>
-                <a:spcPts val="0"/>
-              </a:spcAft>
-            </a:pPr>
-            <a:r>
-              <a:rPr sz="1100" b="0">
-                <a:solidFill>
-                  <a:srgbClr val="475569"/>
-                </a:solidFill>
-                <a:latin typeface="Calibri"/>
-              </a:rPr>
-              <a:t>Bölüm</a:t>
-            </a:r>
-          </a:p>
-          <a:p>
-            <a:pPr algn="l">
-              <a:spcAft>
-                <a:spcPts val="800"/>
-              </a:spcAft>
-            </a:pPr>
-            <a:r>
-              <a:rPr sz="1400" b="1">
-                <a:solidFill>
-                  <a:srgbClr val="1F2937"/>
-                </a:solidFill>
-                <a:latin typeface="Calibri"/>
-              </a:rPr>
-              <a:t>Yazılım Müh. · 3. sınıf</a:t>
-            </a:r>
-          </a:p>
-          <a:p>
-            <a:pPr algn="l">
-              <a:spcAft>
-                <a:spcPts val="0"/>
-              </a:spcAft>
-            </a:pPr>
-            <a:r>
-              <a:rPr sz="1100" b="0">
-                <a:solidFill>
-                  <a:srgbClr val="475569"/>
-                </a:solidFill>
-                <a:latin typeface="Calibri"/>
-              </a:rPr>
-              <a:t>Not Ortalaması (GNO)</a:t>
-            </a:r>
-          </a:p>
-          <a:p>
-            <a:pPr algn="l">
-              <a:spcAft>
-                <a:spcPts val="800"/>
-              </a:spcAft>
-            </a:pPr>
-            <a:r>
-              <a:rPr sz="1400" b="1">
-                <a:solidFill>
-                  <a:srgbClr val="1F2937"/>
-                </a:solidFill>
-                <a:latin typeface="Calibri"/>
-              </a:rPr>
-              <a:t>2.78</a:t>
-            </a:r>
-          </a:p>
-          <a:p>
-            <a:pPr algn="l">
-              <a:spcAft>
-                <a:spcPts val="0"/>
-              </a:spcAft>
-            </a:pPr>
-            <a:r>
-              <a:rPr sz="1100" b="0">
-                <a:solidFill>
-                  <a:srgbClr val="475569"/>
-                </a:solidFill>
-                <a:latin typeface="Calibri"/>
-              </a:rPr>
-              <a:t>İngilizce</a:t>
-            </a:r>
-          </a:p>
-          <a:p>
-            <a:pPr algn="l">
-              <a:spcAft>
-                <a:spcPts val="800"/>
-              </a:spcAft>
-            </a:pPr>
-            <a:r>
-              <a:rPr sz="1400" b="1">
-                <a:solidFill>
-                  <a:srgbClr val="1F2937"/>
-                </a:solidFill>
-                <a:latin typeface="Calibri"/>
-              </a:rPr>
-              <a:t>B2</a:t>
-            </a:r>
-          </a:p>
-          <a:p>
-            <a:pPr algn="l">
-              <a:spcAft>
-                <a:spcPts val="0"/>
-              </a:spcAft>
-            </a:pPr>
-            <a:r>
-              <a:rPr sz="1100" b="0">
-                <a:solidFill>
-                  <a:srgbClr val="475569"/>
-                </a:solidFill>
-                <a:latin typeface="Calibri"/>
-              </a:rPr>
-              <a:t>İlgi alanları</a:t>
-            </a:r>
-          </a:p>
-          <a:p>
-            <a:pPr algn="l">
-              <a:spcAft>
-                <a:spcPts val="800"/>
-              </a:spcAft>
-            </a:pPr>
-            <a:r>
-              <a:rPr sz="1400" b="1">
-                <a:solidFill>
-                  <a:srgbClr val="1F2937"/>
-                </a:solidFill>
-                <a:latin typeface="Calibri"/>
-              </a:rPr>
-              <a:t>Full-stack web · Yapay zeka / bilgisayarlı görü (YOLO)</a:t>
-            </a:r>
           </a:p>
         </p:txBody>
       </p:sp>
@@ -4232,7 +4258,7 @@
 </file>
 
 <file path=ppt/slides/slide3.xml><?xml version="1.0" encoding="utf-8"?>
-<p:sld xmlns:a="http://schemas.openxmlformats.org/drawingml/2006/main" xmlns:p="http://schemas.openxmlformats.org/presentationml/2006/main" xmlns:r="http://schemas.openxmlformats.org/officeDocument/2006/relationships">
+<p:sld xmlns:a="http://schemas.openxmlformats.org/drawingml/2006/main" xmlns:r="http://schemas.openxmlformats.org/officeDocument/2006/relationships" xmlns:p="http://schemas.openxmlformats.org/presentationml/2006/main">
   <p:cSld>
     <p:spTree>
       <p:nvGrpSpPr>
@@ -4240,17 +4266,311 @@
         <p:cNvGrpSpPr/>
         <p:nvPr/>
       </p:nvGrpSpPr>
-      <p:grpSpPr/>
-      <p:sp>
-        <p:nvSpPr>
-          <p:cNvPr id="2" name="Rectangle 1"/>
+      <p:grpSpPr>
+        <a:xfrm>
+          <a:off x="0" y="0"/>
+          <a:ext cx="0" cy="0"/>
+          <a:chOff x="0" y="0"/>
+          <a:chExt cx="0" cy="0"/>
+        </a:xfrm>
+      </p:grpSpPr>
+      <p:sp>
+        <p:nvSpPr>
+          <p:cNvPr id="6" name="Rectangle 5"/>
           <p:cNvSpPr/>
           <p:nvPr/>
         </p:nvSpPr>
         <p:spPr>
+          <a:xfrm>
+            <a:off x="777240" y="548640"/>
+            <a:ext cx="146304" cy="868680"/>
+          </a:xfrm>
+          <a:prstGeom prst="rect">
+            <a:avLst/>
+          </a:prstGeom>
+          <a:solidFill>
+            <a:srgbClr val="1D4ED8"/>
+          </a:solidFill>
+          <a:ln>
+            <a:noFill/>
+          </a:ln>
+          <a:effectLst/>
+        </p:spPr>
+        <p:style>
+          <a:lnRef idx="1">
+            <a:schemeClr val="accent1"/>
+          </a:lnRef>
+          <a:fillRef idx="3">
+            <a:schemeClr val="accent1"/>
+          </a:fillRef>
+          <a:effectRef idx="2">
+            <a:schemeClr val="accent1"/>
+          </a:effectRef>
+          <a:fontRef idx="minor">
+            <a:schemeClr val="lt1"/>
+          </a:fontRef>
+        </p:style>
+        <p:txBody>
+          <a:bodyPr rtlCol="0" anchor="ctr"/>
+          <a:lstStyle/>
+          <a:p>
+            <a:pPr algn="ctr"/>
+            <a:endParaRPr/>
+          </a:p>
+        </p:txBody>
+      </p:sp>
+      <p:sp>
+        <p:nvSpPr>
+          <p:cNvPr id="7" name="TextBox 6"/>
+          <p:cNvSpPr txBox="1"/>
+          <p:nvPr/>
+        </p:nvSpPr>
+        <p:spPr>
+          <a:xfrm>
+            <a:off x="1051560" y="502920"/>
+            <a:ext cx="10241280" cy="1005840"/>
+          </a:xfrm>
+          <a:prstGeom prst="rect">
+            <a:avLst/>
+          </a:prstGeom>
+          <a:noFill/>
+        </p:spPr>
+        <p:txBody>
+          <a:bodyPr wrap="square" lIns="0" tIns="0" rIns="0" bIns="0" anchor="t">
+            <a:spAutoFit/>
+          </a:bodyPr>
+          <a:lstStyle/>
+          <a:p>
+            <a:pPr algn="l">
+              <a:spcAft>
+                <a:spcPts val="200"/>
+              </a:spcAft>
+            </a:pPr>
+            <a:r>
+              <a:rPr sz="3400" b="1">
+                <a:solidFill>
+                  <a:srgbClr val="1E3A8A"/>
+                </a:solidFill>
+                <a:latin typeface="Cambria"/>
+              </a:rPr>
+              <a:t>Proje Hakkında &amp; Amaç</a:t>
+            </a:r>
+          </a:p>
+        </p:txBody>
+      </p:sp>
+      <p:sp>
+        <p:nvSpPr>
+          <p:cNvPr id="8" name="Rectangle 7"/>
+          <p:cNvSpPr/>
+          <p:nvPr/>
+        </p:nvSpPr>
+        <p:spPr>
+          <a:xfrm>
+            <a:off x="1051560" y="1481328"/>
+            <a:ext cx="2926080" cy="45720"/>
+          </a:xfrm>
+          <a:prstGeom prst="rect">
+            <a:avLst/>
+          </a:prstGeom>
+          <a:solidFill>
+            <a:srgbClr val="DBEAFE"/>
+          </a:solidFill>
+          <a:ln>
+            <a:noFill/>
+          </a:ln>
+          <a:effectLst/>
+        </p:spPr>
+        <p:style>
+          <a:lnRef idx="1">
+            <a:schemeClr val="accent1"/>
+          </a:lnRef>
+          <a:fillRef idx="3">
+            <a:schemeClr val="accent1"/>
+          </a:fillRef>
+          <a:effectRef idx="2">
+            <a:schemeClr val="accent1"/>
+          </a:effectRef>
+          <a:fontRef idx="minor">
+            <a:schemeClr val="lt1"/>
+          </a:fontRef>
+        </p:style>
+        <p:txBody>
+          <a:bodyPr rtlCol="0" anchor="ctr"/>
+          <a:lstStyle/>
+          <a:p>
+            <a:pPr algn="ctr"/>
+            <a:endParaRPr/>
+          </a:p>
+        </p:txBody>
+      </p:sp>
+      <p:sp>
+        <p:nvSpPr>
+          <p:cNvPr id="9" name="TextBox 8"/>
+          <p:cNvSpPr txBox="1"/>
+          <p:nvPr/>
+        </p:nvSpPr>
+        <p:spPr>
+          <a:xfrm>
+            <a:off x="1051560" y="1783080"/>
+            <a:ext cx="10058400" cy="1463040"/>
+          </a:xfrm>
+          <a:prstGeom prst="rect">
+            <a:avLst/>
+          </a:prstGeom>
+          <a:noFill/>
+        </p:spPr>
+        <p:txBody>
+          <a:bodyPr wrap="square" lIns="0" tIns="0" rIns="0" bIns="0" anchor="t">
+            <a:spAutoFit/>
+          </a:bodyPr>
+          <a:lstStyle/>
+          <a:p>
+            <a:pPr algn="l">
+              <a:spcAft>
+                <a:spcPts val="400"/>
+              </a:spcAft>
+            </a:pPr>
+            <a:r>
+              <a:rPr sz="1600" b="1">
+                <a:solidFill>
+                  <a:srgbClr val="1D4ED8"/>
+                </a:solidFill>
+                <a:latin typeface="Cambria"/>
+              </a:rPr>
+              <a:t>Ne sunar?</a:t>
+            </a:r>
+          </a:p>
+          <a:p>
+            <a:pPr algn="l">
+              <a:spcAft>
+                <a:spcPts val="800"/>
+              </a:spcAft>
+            </a:pPr>
+            <a:r>
+              <a:rPr sz="1550" b="0">
+                <a:solidFill>
+                  <a:srgbClr val="1F2937"/>
+                </a:solidFill>
+                <a:latin typeface="Calibri"/>
+              </a:rPr>
+              <a:t>Hisse, kripto, yatırım fonu, tahvil/bono, döviz, emtia ve VİOP'u; enflasyon, faiz ve döviz kuru gibi makro verileri; finans haberlerini ve kullanıcının kişisel portföyünü TEK bir modern web arayüzünde birleştirir.</a:t>
+            </a:r>
+          </a:p>
+        </p:txBody>
+      </p:sp>
+      <p:sp>
+        <p:nvSpPr>
+          <p:cNvPr id="10" name="TextBox 9"/>
+          <p:cNvSpPr txBox="1"/>
+          <p:nvPr/>
+        </p:nvSpPr>
+        <p:spPr>
+          <a:xfrm>
+            <a:off x="1051560" y="3566160"/>
+            <a:ext cx="10058400" cy="2377440"/>
+          </a:xfrm>
+          <a:prstGeom prst="rect">
+            <a:avLst/>
+          </a:prstGeom>
+          <a:noFill/>
+        </p:spPr>
+        <p:txBody>
+          <a:bodyPr wrap="square" lIns="0" tIns="0" rIns="0" bIns="0" anchor="t">
+            <a:spAutoFit/>
+          </a:bodyPr>
+          <a:lstStyle/>
+          <a:p>
+            <a:pPr algn="l">
+              <a:spcAft>
+                <a:spcPts val="400"/>
+              </a:spcAft>
+            </a:pPr>
+            <a:r>
+              <a:rPr sz="1600" b="1">
+                <a:solidFill>
+                  <a:srgbClr val="1D4ED8"/>
+                </a:solidFill>
+                <a:latin typeface="Cambria"/>
+              </a:rPr>
+              <a:t>Amaç</a:t>
+            </a:r>
+          </a:p>
+          <a:p>
+            <a:pPr algn="l">
+              <a:spcAft>
+                <a:spcPts val="600"/>
+              </a:spcAft>
+            </a:pPr>
+            <a:r>
+              <a:rPr sz="1550" b="0">
+                <a:solidFill>
+                  <a:srgbClr val="1F2937"/>
+                </a:solidFill>
+                <a:latin typeface="Calibri"/>
+              </a:rPr>
+              <a:t>Dağınık finans uygulamalarını tek ekranda toplamak ve veriyi yalnızca göstermekle kalmayıp anlamlandırmak:</a:t>
+            </a:r>
+          </a:p>
+          <a:p>
+            <a:pPr algn="l">
+              <a:spcAft>
+                <a:spcPts val="500"/>
+              </a:spcAft>
+            </a:pPr>
+            <a:r>
+              <a:rPr sz="1500" b="0">
+                <a:solidFill>
+                  <a:srgbClr val="1F2937"/>
+                </a:solidFill>
+                <a:latin typeface="Calibri"/>
+              </a:rPr>
+              <a:t>▸  Enflasyondan arındırılmış gerçek (reel) getiri — “kazandım mı, gerçekten kazandım mı?”</a:t>
+            </a:r>
+          </a:p>
+          <a:p>
+            <a:pPr algn="l">
+              <a:spcAft>
+                <a:spcPts val="500"/>
+              </a:spcAft>
+            </a:pPr>
+            <a:r>
+              <a:rPr sz="1500" b="0">
+                <a:solidFill>
+                  <a:srgbClr val="1F2937"/>
+                </a:solidFill>
+                <a:latin typeface="Calibri"/>
+              </a:rPr>
+              <a:t>▸  Risk ve kısa/uzun vade sinyalleri ile çapraz-varlık analiz</a:t>
+            </a:r>
+          </a:p>
+          <a:p>
+            <a:pPr algn="l">
+              <a:spcAft>
+                <a:spcPts val="500"/>
+              </a:spcAft>
+            </a:pPr>
+            <a:r>
+              <a:rPr sz="1500" b="0">
+                <a:solidFill>
+                  <a:srgbClr val="1F2937"/>
+                </a:solidFill>
+                <a:latin typeface="Calibri"/>
+              </a:rPr>
+              <a:t>▸  Sorumlu yapay zeka danışman (yatırım tavsiyesi değildir uyarısıyla)</a:t>
+            </a:r>
+          </a:p>
+        </p:txBody>
+      </p:sp>
+      <p:sp>
+        <p:nvSpPr>
+          <p:cNvPr id="11" name="Rectangle 10"/>
+          <p:cNvSpPr/>
+          <p:nvPr/>
+        </p:nvSpPr>
+        <p:spPr>
           <a:xfrm rot="2100000">
-            <a:off x="11430000" y="-731520"/>
-            <a:ext cx="1920240" cy="1371600"/>
+            <a:off x="10835640" y="411480"/>
+            <a:ext cx="1280160" cy="457200"/>
           </a:xfrm>
           <a:prstGeom prst="rect">
             <a:avLst/>
@@ -4287,14 +4607,14 @@
       </p:sp>
       <p:sp>
         <p:nvSpPr>
-          <p:cNvPr id="3" name="Rectangle 2"/>
+          <p:cNvPr id="12" name="Rectangle 11"/>
           <p:cNvSpPr/>
           <p:nvPr/>
         </p:nvSpPr>
         <p:spPr>
           <a:xfrm rot="2100000">
-            <a:off x="11795760" y="-457200"/>
-            <a:ext cx="1645920" cy="1188720"/>
+            <a:off x="11109960" y="274320"/>
+            <a:ext cx="1005840" cy="365760"/>
           </a:xfrm>
           <a:prstGeom prst="rect">
             <a:avLst/>
@@ -4331,14 +4651,14 @@
       </p:sp>
       <p:sp>
         <p:nvSpPr>
-          <p:cNvPr id="4" name="Rectangle 3"/>
+          <p:cNvPr id="13" name="Rectangle 12"/>
           <p:cNvSpPr/>
           <p:nvPr/>
         </p:nvSpPr>
         <p:spPr>
           <a:xfrm rot="2100000">
-            <a:off x="11155680" y="6035040"/>
-            <a:ext cx="2377440" cy="1828800"/>
+            <a:off x="10835640" y="5989320"/>
+            <a:ext cx="1280160" cy="457200"/>
           </a:xfrm>
           <a:prstGeom prst="rect">
             <a:avLst/>
@@ -4375,14 +4695,14 @@
       </p:sp>
       <p:sp>
         <p:nvSpPr>
-          <p:cNvPr id="5" name="Rectangle 4"/>
+          <p:cNvPr id="14" name="Rectangle 13"/>
           <p:cNvSpPr/>
           <p:nvPr/>
         </p:nvSpPr>
         <p:spPr>
           <a:xfrm rot="2100000">
-            <a:off x="11521440" y="6400800"/>
-            <a:ext cx="2194560" cy="1645920"/>
+            <a:off x="11109960" y="6199632"/>
+            <a:ext cx="1005840" cy="365760"/>
           </a:xfrm>
           <a:prstGeom prst="rect">
             <a:avLst/>
@@ -4414,291 +4734,6 @@
           <a:lstStyle/>
           <a:p>
             <a:pPr algn="ctr"/>
-          </a:p>
-        </p:txBody>
-      </p:sp>
-      <p:sp>
-        <p:nvSpPr>
-          <p:cNvPr id="6" name="Rectangle 5"/>
-          <p:cNvSpPr/>
-          <p:nvPr/>
-        </p:nvSpPr>
-        <p:spPr>
-          <a:xfrm>
-            <a:off x="777240" y="548640"/>
-            <a:ext cx="146304" cy="868680"/>
-          </a:xfrm>
-          <a:prstGeom prst="rect">
-            <a:avLst/>
-          </a:prstGeom>
-          <a:solidFill>
-            <a:srgbClr val="1D4ED8"/>
-          </a:solidFill>
-          <a:ln>
-            <a:noFill/>
-          </a:ln>
-          <a:effectLst/>
-        </p:spPr>
-        <p:style>
-          <a:lnRef idx="1">
-            <a:schemeClr val="accent1"/>
-          </a:lnRef>
-          <a:fillRef idx="3">
-            <a:schemeClr val="accent1"/>
-          </a:fillRef>
-          <a:effectRef idx="2">
-            <a:schemeClr val="accent1"/>
-          </a:effectRef>
-          <a:fontRef idx="minor">
-            <a:schemeClr val="lt1"/>
-          </a:fontRef>
-        </p:style>
-        <p:txBody>
-          <a:bodyPr rtlCol="0" anchor="ctr"/>
-          <a:lstStyle/>
-          <a:p>
-            <a:pPr algn="ctr"/>
-          </a:p>
-        </p:txBody>
-      </p:sp>
-      <p:sp>
-        <p:nvSpPr>
-          <p:cNvPr id="7" name="TextBox 6"/>
-          <p:cNvSpPr txBox="1"/>
-          <p:nvPr/>
-        </p:nvSpPr>
-        <p:spPr>
-          <a:xfrm>
-            <a:off x="1051560" y="502920"/>
-            <a:ext cx="10241280" cy="1005840"/>
-          </a:xfrm>
-          <a:prstGeom prst="rect">
-            <a:avLst/>
-          </a:prstGeom>
-          <a:noFill/>
-        </p:spPr>
-        <p:txBody>
-          <a:bodyPr wrap="square" anchor="t" lIns="0" rIns="0" tIns="0" bIns="0">
-            <a:spAutoFit/>
-          </a:bodyPr>
-          <a:lstStyle/>
-          <a:p>
-            <a:pPr algn="l">
-              <a:spcAft>
-                <a:spcPts val="200"/>
-              </a:spcAft>
-            </a:pPr>
-            <a:r>
-              <a:rPr sz="3400" b="1">
-                <a:solidFill>
-                  <a:srgbClr val="1E3A8A"/>
-                </a:solidFill>
-                <a:latin typeface="Cambria"/>
-              </a:rPr>
-              <a:t>Proje Hakkında &amp; Amaç</a:t>
-            </a:r>
-          </a:p>
-        </p:txBody>
-      </p:sp>
-      <p:sp>
-        <p:nvSpPr>
-          <p:cNvPr id="8" name="Rectangle 7"/>
-          <p:cNvSpPr/>
-          <p:nvPr/>
-        </p:nvSpPr>
-        <p:spPr>
-          <a:xfrm>
-            <a:off x="1051560" y="1481328"/>
-            <a:ext cx="2926080" cy="45720"/>
-          </a:xfrm>
-          <a:prstGeom prst="rect">
-            <a:avLst/>
-          </a:prstGeom>
-          <a:solidFill>
-            <a:srgbClr val="DBEAFE"/>
-          </a:solidFill>
-          <a:ln>
-            <a:noFill/>
-          </a:ln>
-          <a:effectLst/>
-        </p:spPr>
-        <p:style>
-          <a:lnRef idx="1">
-            <a:schemeClr val="accent1"/>
-          </a:lnRef>
-          <a:fillRef idx="3">
-            <a:schemeClr val="accent1"/>
-          </a:fillRef>
-          <a:effectRef idx="2">
-            <a:schemeClr val="accent1"/>
-          </a:effectRef>
-          <a:fontRef idx="minor">
-            <a:schemeClr val="lt1"/>
-          </a:fontRef>
-        </p:style>
-        <p:txBody>
-          <a:bodyPr rtlCol="0" anchor="ctr"/>
-          <a:lstStyle/>
-          <a:p>
-            <a:pPr algn="ctr"/>
-          </a:p>
-        </p:txBody>
-      </p:sp>
-      <p:sp>
-        <p:nvSpPr>
-          <p:cNvPr id="9" name="TextBox 8"/>
-          <p:cNvSpPr txBox="1"/>
-          <p:nvPr/>
-        </p:nvSpPr>
-        <p:spPr>
-          <a:xfrm>
-            <a:off x="1051560" y="1783080"/>
-            <a:ext cx="10058400" cy="1463040"/>
-          </a:xfrm>
-          <a:prstGeom prst="rect">
-            <a:avLst/>
-          </a:prstGeom>
-          <a:noFill/>
-        </p:spPr>
-        <p:txBody>
-          <a:bodyPr wrap="square" anchor="t" lIns="0" rIns="0" tIns="0" bIns="0">
-            <a:spAutoFit/>
-          </a:bodyPr>
-          <a:lstStyle/>
-          <a:p>
-            <a:pPr algn="l">
-              <a:spcAft>
-                <a:spcPts val="400"/>
-              </a:spcAft>
-            </a:pPr>
-            <a:r>
-              <a:rPr sz="1600" b="1">
-                <a:solidFill>
-                  <a:srgbClr val="1D4ED8"/>
-                </a:solidFill>
-                <a:latin typeface="Cambria"/>
-              </a:rPr>
-              <a:t>Ne sunar?</a:t>
-            </a:r>
-          </a:p>
-          <a:p>
-            <a:pPr algn="l">
-              <a:spcAft>
-                <a:spcPts val="800"/>
-              </a:spcAft>
-            </a:pPr>
-            <a:r>
-              <a:rPr sz="1550" b="0">
-                <a:solidFill>
-                  <a:srgbClr val="1F2937"/>
-                </a:solidFill>
-                <a:latin typeface="Calibri"/>
-              </a:rPr>
-              <a:t>Hisse, kripto, yatırım fonu, tahvil/bono, döviz, emtia ve VİOP'u; enflasyon, faiz ve döviz kuru gibi makro verileri; finans haberlerini ve kullanıcının kişisel portföyünü TEK bir modern web arayüzünde birleştirir.</a:t>
-            </a:r>
-          </a:p>
-        </p:txBody>
-      </p:sp>
-      <p:sp>
-        <p:nvSpPr>
-          <p:cNvPr id="10" name="TextBox 9"/>
-          <p:cNvSpPr txBox="1"/>
-          <p:nvPr/>
-        </p:nvSpPr>
-        <p:spPr>
-          <a:xfrm>
-            <a:off x="1051560" y="3566160"/>
-            <a:ext cx="10058400" cy="2377440"/>
-          </a:xfrm>
-          <a:prstGeom prst="rect">
-            <a:avLst/>
-          </a:prstGeom>
-          <a:noFill/>
-        </p:spPr>
-        <p:txBody>
-          <a:bodyPr wrap="square" anchor="t" lIns="0" rIns="0" tIns="0" bIns="0">
-            <a:spAutoFit/>
-          </a:bodyPr>
-          <a:lstStyle/>
-          <a:p>
-            <a:pPr algn="l">
-              <a:spcAft>
-                <a:spcPts val="400"/>
-              </a:spcAft>
-            </a:pPr>
-            <a:r>
-              <a:rPr sz="1600" b="1">
-                <a:solidFill>
-                  <a:srgbClr val="1D4ED8"/>
-                </a:solidFill>
-                <a:latin typeface="Cambria"/>
-              </a:rPr>
-              <a:t>Amaç</a:t>
-            </a:r>
-          </a:p>
-          <a:p>
-            <a:pPr algn="l">
-              <a:spcAft>
-                <a:spcPts val="600"/>
-              </a:spcAft>
-            </a:pPr>
-            <a:r>
-              <a:rPr sz="1550" b="0">
-                <a:solidFill>
-                  <a:srgbClr val="1F2937"/>
-                </a:solidFill>
-                <a:latin typeface="Calibri"/>
-              </a:rPr>
-              <a:t>Dağınık finans uygulamalarını tek ekranda toplamak ve veriyi yalnızca göstermekle kalmayıp anlamlandırmak:</a:t>
-            </a:r>
-          </a:p>
-          <a:p>
-            <a:pPr algn="l">
-              <a:spcAft>
-                <a:spcPts val="500"/>
-              </a:spcAft>
-            </a:pPr>
-            <a:r>
-              <a:rPr sz="1500" b="0">
-                <a:solidFill>
-                  <a:srgbClr val="1F2937"/>
-                </a:solidFill>
-                <a:latin typeface="Calibri"/>
-              </a:rPr>
-              <a:t>▸  Enflasyondan arındırılmış gerçek (reel) getiri — “kazandım mı, gerçekten kazandım mı?”</a:t>
-            </a:r>
-          </a:p>
-          <a:p>
-            <a:pPr algn="l">
-              <a:spcAft>
-                <a:spcPts val="500"/>
-              </a:spcAft>
-            </a:pPr>
-            <a:r>
-              <a:rPr sz="1500" b="0">
-                <a:solidFill>
-                  <a:srgbClr val="1F2937"/>
-                </a:solidFill>
-                <a:latin typeface="Calibri"/>
-              </a:rPr>
-              <a:t>▸  Risk ve kısa/uzun vade sinyalleri ile çapraz-varlık analiz</a:t>
-            </a:r>
-          </a:p>
-          <a:p>
-            <a:pPr algn="l">
-              <a:spcAft>
-                <a:spcPts val="500"/>
-              </a:spcAft>
-            </a:pPr>
-            <a:r>
-              <a:rPr sz="1500" b="0">
-                <a:solidFill>
-                  <a:srgbClr val="1F2937"/>
-                </a:solidFill>
-                <a:latin typeface="Calibri"/>
-              </a:rPr>
-              <a:t>▸  Sorumlu yapay zeka danışman (yatırım tavsiyesi değildir uyarısıyla)</a:t>
-            </a:r>
           </a:p>
         </p:txBody>
       </p:sp>
@@ -4711,7 +4746,7 @@
 </file>
 
 <file path=ppt/slides/slide4.xml><?xml version="1.0" encoding="utf-8"?>
-<p:sld xmlns:a="http://schemas.openxmlformats.org/drawingml/2006/main" xmlns:p="http://schemas.openxmlformats.org/presentationml/2006/main" xmlns:r="http://schemas.openxmlformats.org/officeDocument/2006/relationships">
+<p:sld xmlns:a="http://schemas.openxmlformats.org/drawingml/2006/main" xmlns:r="http://schemas.openxmlformats.org/officeDocument/2006/relationships" xmlns:p="http://schemas.openxmlformats.org/presentationml/2006/main">
   <p:cSld>
     <p:spTree>
       <p:nvGrpSpPr>
@@ -4719,17 +4754,1023 @@
         <p:cNvGrpSpPr/>
         <p:nvPr/>
       </p:nvGrpSpPr>
-      <p:grpSpPr/>
-      <p:sp>
-        <p:nvSpPr>
-          <p:cNvPr id="2" name="Rectangle 1"/>
+      <p:grpSpPr>
+        <a:xfrm>
+          <a:off x="0" y="0"/>
+          <a:ext cx="0" cy="0"/>
+          <a:chOff x="0" y="0"/>
+          <a:chExt cx="0" cy="0"/>
+        </a:xfrm>
+      </p:grpSpPr>
+      <p:sp>
+        <p:nvSpPr>
+          <p:cNvPr id="6" name="Rectangle 5"/>
           <p:cNvSpPr/>
           <p:nvPr/>
         </p:nvSpPr>
         <p:spPr>
+          <a:xfrm>
+            <a:off x="777240" y="548640"/>
+            <a:ext cx="146304" cy="868680"/>
+          </a:xfrm>
+          <a:prstGeom prst="rect">
+            <a:avLst/>
+          </a:prstGeom>
+          <a:solidFill>
+            <a:srgbClr val="1D4ED8"/>
+          </a:solidFill>
+          <a:ln>
+            <a:noFill/>
+          </a:ln>
+          <a:effectLst/>
+        </p:spPr>
+        <p:style>
+          <a:lnRef idx="1">
+            <a:schemeClr val="accent1"/>
+          </a:lnRef>
+          <a:fillRef idx="3">
+            <a:schemeClr val="accent1"/>
+          </a:fillRef>
+          <a:effectRef idx="2">
+            <a:schemeClr val="accent1"/>
+          </a:effectRef>
+          <a:fontRef idx="minor">
+            <a:schemeClr val="lt1"/>
+          </a:fontRef>
+        </p:style>
+        <p:txBody>
+          <a:bodyPr rtlCol="0" anchor="ctr"/>
+          <a:lstStyle/>
+          <a:p>
+            <a:pPr algn="ctr"/>
+            <a:endParaRPr/>
+          </a:p>
+        </p:txBody>
+      </p:sp>
+      <p:sp>
+        <p:nvSpPr>
+          <p:cNvPr id="7" name="TextBox 6"/>
+          <p:cNvSpPr txBox="1"/>
+          <p:nvPr/>
+        </p:nvSpPr>
+        <p:spPr>
+          <a:xfrm>
+            <a:off x="1051560" y="502920"/>
+            <a:ext cx="10241280" cy="1005840"/>
+          </a:xfrm>
+          <a:prstGeom prst="rect">
+            <a:avLst/>
+          </a:prstGeom>
+          <a:noFill/>
+        </p:spPr>
+        <p:txBody>
+          <a:bodyPr wrap="square" lIns="0" tIns="0" rIns="0" bIns="0" anchor="t">
+            <a:spAutoFit/>
+          </a:bodyPr>
+          <a:lstStyle/>
+          <a:p>
+            <a:pPr algn="l">
+              <a:spcAft>
+                <a:spcPts val="200"/>
+              </a:spcAft>
+            </a:pPr>
+            <a:r>
+              <a:rPr sz="3400" b="1">
+                <a:solidFill>
+                  <a:srgbClr val="1E3A8A"/>
+                </a:solidFill>
+                <a:latin typeface="Cambria"/>
+              </a:rPr>
+              <a:t>Öne Çıkan Özellikler</a:t>
+            </a:r>
+          </a:p>
+        </p:txBody>
+      </p:sp>
+      <p:sp>
+        <p:nvSpPr>
+          <p:cNvPr id="8" name="Rectangle 7"/>
+          <p:cNvSpPr/>
+          <p:nvPr/>
+        </p:nvSpPr>
+        <p:spPr>
+          <a:xfrm>
+            <a:off x="1051560" y="1481328"/>
+            <a:ext cx="2926080" cy="45720"/>
+          </a:xfrm>
+          <a:prstGeom prst="rect">
+            <a:avLst/>
+          </a:prstGeom>
+          <a:solidFill>
+            <a:srgbClr val="DBEAFE"/>
+          </a:solidFill>
+          <a:ln>
+            <a:noFill/>
+          </a:ln>
+          <a:effectLst/>
+        </p:spPr>
+        <p:style>
+          <a:lnRef idx="1">
+            <a:schemeClr val="accent1"/>
+          </a:lnRef>
+          <a:fillRef idx="3">
+            <a:schemeClr val="accent1"/>
+          </a:fillRef>
+          <a:effectRef idx="2">
+            <a:schemeClr val="accent1"/>
+          </a:effectRef>
+          <a:fontRef idx="minor">
+            <a:schemeClr val="lt1"/>
+          </a:fontRef>
+        </p:style>
+        <p:txBody>
+          <a:bodyPr rtlCol="0" anchor="ctr"/>
+          <a:lstStyle/>
+          <a:p>
+            <a:pPr algn="ctr"/>
+            <a:endParaRPr/>
+          </a:p>
+        </p:txBody>
+      </p:sp>
+      <p:sp>
+        <p:nvSpPr>
+          <p:cNvPr id="9" name="Rectangle 8"/>
+          <p:cNvSpPr/>
+          <p:nvPr/>
+        </p:nvSpPr>
+        <p:spPr>
+          <a:xfrm>
+            <a:off x="1051560" y="1828800"/>
+            <a:ext cx="5074920" cy="1371600"/>
+          </a:xfrm>
+          <a:prstGeom prst="rect">
+            <a:avLst/>
+          </a:prstGeom>
+          <a:solidFill>
+            <a:srgbClr val="F1F5F9"/>
+          </a:solidFill>
+          <a:ln>
+            <a:noFill/>
+          </a:ln>
+          <a:effectLst/>
+        </p:spPr>
+        <p:style>
+          <a:lnRef idx="1">
+            <a:schemeClr val="accent1"/>
+          </a:lnRef>
+          <a:fillRef idx="3">
+            <a:schemeClr val="accent1"/>
+          </a:fillRef>
+          <a:effectRef idx="2">
+            <a:schemeClr val="accent1"/>
+          </a:effectRef>
+          <a:fontRef idx="minor">
+            <a:schemeClr val="lt1"/>
+          </a:fontRef>
+        </p:style>
+        <p:txBody>
+          <a:bodyPr rtlCol="0" anchor="ctr"/>
+          <a:lstStyle/>
+          <a:p>
+            <a:pPr algn="ctr"/>
+            <a:endParaRPr/>
+          </a:p>
+        </p:txBody>
+      </p:sp>
+      <p:sp>
+        <p:nvSpPr>
+          <p:cNvPr id="10" name="Rectangle 9"/>
+          <p:cNvSpPr/>
+          <p:nvPr/>
+        </p:nvSpPr>
+        <p:spPr>
+          <a:xfrm>
+            <a:off x="1051560" y="1828800"/>
+            <a:ext cx="82296" cy="1371600"/>
+          </a:xfrm>
+          <a:prstGeom prst="rect">
+            <a:avLst/>
+          </a:prstGeom>
+          <a:solidFill>
+            <a:srgbClr val="1D4ED8"/>
+          </a:solidFill>
+          <a:ln>
+            <a:noFill/>
+          </a:ln>
+          <a:effectLst/>
+        </p:spPr>
+        <p:style>
+          <a:lnRef idx="1">
+            <a:schemeClr val="accent1"/>
+          </a:lnRef>
+          <a:fillRef idx="3">
+            <a:schemeClr val="accent1"/>
+          </a:fillRef>
+          <a:effectRef idx="2">
+            <a:schemeClr val="accent1"/>
+          </a:effectRef>
+          <a:fontRef idx="minor">
+            <a:schemeClr val="lt1"/>
+          </a:fontRef>
+        </p:style>
+        <p:txBody>
+          <a:bodyPr rtlCol="0" anchor="ctr"/>
+          <a:lstStyle/>
+          <a:p>
+            <a:pPr algn="ctr"/>
+            <a:endParaRPr/>
+          </a:p>
+        </p:txBody>
+      </p:sp>
+      <p:sp>
+        <p:nvSpPr>
+          <p:cNvPr id="11" name="TextBox 10"/>
+          <p:cNvSpPr txBox="1"/>
+          <p:nvPr/>
+        </p:nvSpPr>
+        <p:spPr>
+          <a:xfrm>
+            <a:off x="1307592" y="1956816"/>
+            <a:ext cx="4617720" cy="1188720"/>
+          </a:xfrm>
+          <a:prstGeom prst="rect">
+            <a:avLst/>
+          </a:prstGeom>
+          <a:noFill/>
+        </p:spPr>
+        <p:txBody>
+          <a:bodyPr wrap="square" lIns="0" tIns="0" rIns="0" bIns="0" anchor="t">
+            <a:spAutoFit/>
+          </a:bodyPr>
+          <a:lstStyle/>
+          <a:p>
+            <a:pPr algn="l">
+              <a:spcAft>
+                <a:spcPts val="300"/>
+              </a:spcAft>
+            </a:pPr>
+            <a:r>
+              <a:rPr sz="1500" b="1">
+                <a:solidFill>
+                  <a:srgbClr val="1E3A8A"/>
+                </a:solidFill>
+                <a:latin typeface="Cambria"/>
+              </a:rPr>
+              <a:t>Çok varlıklı canlı piyasa</a:t>
+            </a:r>
+          </a:p>
+          <a:p>
+            <a:pPr algn="l">
+              <a:spcAft>
+                <a:spcPts val="600"/>
+              </a:spcAft>
+            </a:pPr>
+            <a:r>
+              <a:rPr sz="1300" b="0">
+                <a:solidFill>
+                  <a:srgbClr val="1F2937"/>
+                </a:solidFill>
+                <a:latin typeface="Calibri"/>
+              </a:rPr>
+              <a:t>Hisse/kripto/fon/tahvil/döviz/emtia/VİOP; grafikler, sparkline, arama-filtre.</a:t>
+            </a:r>
+          </a:p>
+        </p:txBody>
+      </p:sp>
+      <p:sp>
+        <p:nvSpPr>
+          <p:cNvPr id="12" name="Rectangle 11"/>
+          <p:cNvSpPr/>
+          <p:nvPr/>
+        </p:nvSpPr>
+        <p:spPr>
+          <a:xfrm>
+            <a:off x="6537960" y="1828800"/>
+            <a:ext cx="5074920" cy="1371600"/>
+          </a:xfrm>
+          <a:prstGeom prst="rect">
+            <a:avLst/>
+          </a:prstGeom>
+          <a:solidFill>
+            <a:srgbClr val="F1F5F9"/>
+          </a:solidFill>
+          <a:ln>
+            <a:noFill/>
+          </a:ln>
+          <a:effectLst/>
+        </p:spPr>
+        <p:style>
+          <a:lnRef idx="1">
+            <a:schemeClr val="accent1"/>
+          </a:lnRef>
+          <a:fillRef idx="3">
+            <a:schemeClr val="accent1"/>
+          </a:fillRef>
+          <a:effectRef idx="2">
+            <a:schemeClr val="accent1"/>
+          </a:effectRef>
+          <a:fontRef idx="minor">
+            <a:schemeClr val="lt1"/>
+          </a:fontRef>
+        </p:style>
+        <p:txBody>
+          <a:bodyPr rtlCol="0" anchor="ctr"/>
+          <a:lstStyle/>
+          <a:p>
+            <a:pPr algn="ctr"/>
+            <a:endParaRPr/>
+          </a:p>
+        </p:txBody>
+      </p:sp>
+      <p:sp>
+        <p:nvSpPr>
+          <p:cNvPr id="13" name="Rectangle 12"/>
+          <p:cNvSpPr/>
+          <p:nvPr/>
+        </p:nvSpPr>
+        <p:spPr>
+          <a:xfrm>
+            <a:off x="6537960" y="1828800"/>
+            <a:ext cx="82296" cy="1371600"/>
+          </a:xfrm>
+          <a:prstGeom prst="rect">
+            <a:avLst/>
+          </a:prstGeom>
+          <a:solidFill>
+            <a:srgbClr val="1D4ED8"/>
+          </a:solidFill>
+          <a:ln>
+            <a:noFill/>
+          </a:ln>
+          <a:effectLst/>
+        </p:spPr>
+        <p:style>
+          <a:lnRef idx="1">
+            <a:schemeClr val="accent1"/>
+          </a:lnRef>
+          <a:fillRef idx="3">
+            <a:schemeClr val="accent1"/>
+          </a:fillRef>
+          <a:effectRef idx="2">
+            <a:schemeClr val="accent1"/>
+          </a:effectRef>
+          <a:fontRef idx="minor">
+            <a:schemeClr val="lt1"/>
+          </a:fontRef>
+        </p:style>
+        <p:txBody>
+          <a:bodyPr rtlCol="0" anchor="ctr"/>
+          <a:lstStyle/>
+          <a:p>
+            <a:pPr algn="ctr"/>
+            <a:endParaRPr/>
+          </a:p>
+        </p:txBody>
+      </p:sp>
+      <p:sp>
+        <p:nvSpPr>
+          <p:cNvPr id="14" name="TextBox 13"/>
+          <p:cNvSpPr txBox="1"/>
+          <p:nvPr/>
+        </p:nvSpPr>
+        <p:spPr>
+          <a:xfrm>
+            <a:off x="6793992" y="1956816"/>
+            <a:ext cx="4617720" cy="1188720"/>
+          </a:xfrm>
+          <a:prstGeom prst="rect">
+            <a:avLst/>
+          </a:prstGeom>
+          <a:noFill/>
+        </p:spPr>
+        <p:txBody>
+          <a:bodyPr wrap="square" lIns="0" tIns="0" rIns="0" bIns="0" anchor="t">
+            <a:spAutoFit/>
+          </a:bodyPr>
+          <a:lstStyle/>
+          <a:p>
+            <a:pPr algn="l">
+              <a:spcAft>
+                <a:spcPts val="300"/>
+              </a:spcAft>
+            </a:pPr>
+            <a:r>
+              <a:rPr sz="1500" b="1">
+                <a:solidFill>
+                  <a:srgbClr val="1E3A8A"/>
+                </a:solidFill>
+                <a:latin typeface="Cambria"/>
+              </a:rPr>
+              <a:t>Portföy &amp; reel getiri</a:t>
+            </a:r>
+          </a:p>
+          <a:p>
+            <a:pPr algn="l">
+              <a:spcAft>
+                <a:spcPts val="600"/>
+              </a:spcAft>
+            </a:pPr>
+            <a:r>
+              <a:rPr sz="1300" b="0">
+                <a:solidFill>
+                  <a:srgbClr val="1F2937"/>
+                </a:solidFill>
+                <a:latin typeface="Calibri"/>
+              </a:rPr>
+              <a:t>Kâr/zarar, dağılım grafiği, enflasyona göre reel getiri, Excel ile içe aktarma.</a:t>
+            </a:r>
+          </a:p>
+        </p:txBody>
+      </p:sp>
+      <p:sp>
+        <p:nvSpPr>
+          <p:cNvPr id="15" name="Rectangle 14"/>
+          <p:cNvSpPr/>
+          <p:nvPr/>
+        </p:nvSpPr>
+        <p:spPr>
+          <a:xfrm>
+            <a:off x="1051560" y="3520440"/>
+            <a:ext cx="5074920" cy="1371600"/>
+          </a:xfrm>
+          <a:prstGeom prst="rect">
+            <a:avLst/>
+          </a:prstGeom>
+          <a:solidFill>
+            <a:srgbClr val="F1F5F9"/>
+          </a:solidFill>
+          <a:ln>
+            <a:noFill/>
+          </a:ln>
+          <a:effectLst/>
+        </p:spPr>
+        <p:style>
+          <a:lnRef idx="1">
+            <a:schemeClr val="accent1"/>
+          </a:lnRef>
+          <a:fillRef idx="3">
+            <a:schemeClr val="accent1"/>
+          </a:fillRef>
+          <a:effectRef idx="2">
+            <a:schemeClr val="accent1"/>
+          </a:effectRef>
+          <a:fontRef idx="minor">
+            <a:schemeClr val="lt1"/>
+          </a:fontRef>
+        </p:style>
+        <p:txBody>
+          <a:bodyPr rtlCol="0" anchor="ctr"/>
+          <a:lstStyle/>
+          <a:p>
+            <a:pPr algn="ctr"/>
+            <a:endParaRPr/>
+          </a:p>
+        </p:txBody>
+      </p:sp>
+      <p:sp>
+        <p:nvSpPr>
+          <p:cNvPr id="16" name="Rectangle 15"/>
+          <p:cNvSpPr/>
+          <p:nvPr/>
+        </p:nvSpPr>
+        <p:spPr>
+          <a:xfrm>
+            <a:off x="1051560" y="3520440"/>
+            <a:ext cx="82296" cy="1371600"/>
+          </a:xfrm>
+          <a:prstGeom prst="rect">
+            <a:avLst/>
+          </a:prstGeom>
+          <a:solidFill>
+            <a:srgbClr val="1D4ED8"/>
+          </a:solidFill>
+          <a:ln>
+            <a:noFill/>
+          </a:ln>
+          <a:effectLst/>
+        </p:spPr>
+        <p:style>
+          <a:lnRef idx="1">
+            <a:schemeClr val="accent1"/>
+          </a:lnRef>
+          <a:fillRef idx="3">
+            <a:schemeClr val="accent1"/>
+          </a:fillRef>
+          <a:effectRef idx="2">
+            <a:schemeClr val="accent1"/>
+          </a:effectRef>
+          <a:fontRef idx="minor">
+            <a:schemeClr val="lt1"/>
+          </a:fontRef>
+        </p:style>
+        <p:txBody>
+          <a:bodyPr rtlCol="0" anchor="ctr"/>
+          <a:lstStyle/>
+          <a:p>
+            <a:pPr algn="ctr"/>
+            <a:endParaRPr/>
+          </a:p>
+        </p:txBody>
+      </p:sp>
+      <p:sp>
+        <p:nvSpPr>
+          <p:cNvPr id="17" name="TextBox 16"/>
+          <p:cNvSpPr txBox="1"/>
+          <p:nvPr/>
+        </p:nvSpPr>
+        <p:spPr>
+          <a:xfrm>
+            <a:off x="1307592" y="3648456"/>
+            <a:ext cx="4617720" cy="1188720"/>
+          </a:xfrm>
+          <a:prstGeom prst="rect">
+            <a:avLst/>
+          </a:prstGeom>
+          <a:noFill/>
+        </p:spPr>
+        <p:txBody>
+          <a:bodyPr wrap="square" lIns="0" tIns="0" rIns="0" bIns="0" anchor="t">
+            <a:spAutoFit/>
+          </a:bodyPr>
+          <a:lstStyle/>
+          <a:p>
+            <a:pPr algn="l">
+              <a:spcAft>
+                <a:spcPts val="300"/>
+              </a:spcAft>
+            </a:pPr>
+            <a:r>
+              <a:rPr sz="1500" b="1">
+                <a:solidFill>
+                  <a:srgbClr val="1E3A8A"/>
+                </a:solidFill>
+                <a:latin typeface="Cambria"/>
+              </a:rPr>
+              <a:t>Fiyat alarmları &amp; listeler</a:t>
+            </a:r>
+          </a:p>
+          <a:p>
+            <a:pPr algn="l">
+              <a:spcAft>
+                <a:spcPts val="600"/>
+              </a:spcAft>
+            </a:pPr>
+            <a:r>
+              <a:rPr sz="1300" b="0">
+                <a:solidFill>
+                  <a:srgbClr val="1F2937"/>
+                </a:solidFill>
+                <a:latin typeface="Calibri"/>
+              </a:rPr>
+              <a:t>Hedef fiyat alarmı (uygulama içi + e-posta), kişisel takip listeleri.</a:t>
+            </a:r>
+          </a:p>
+        </p:txBody>
+      </p:sp>
+      <p:sp>
+        <p:nvSpPr>
+          <p:cNvPr id="18" name="Rectangle 17"/>
+          <p:cNvSpPr/>
+          <p:nvPr/>
+        </p:nvSpPr>
+        <p:spPr>
+          <a:xfrm>
+            <a:off x="6537960" y="3520440"/>
+            <a:ext cx="5074920" cy="1371600"/>
+          </a:xfrm>
+          <a:prstGeom prst="rect">
+            <a:avLst/>
+          </a:prstGeom>
+          <a:solidFill>
+            <a:srgbClr val="F1F5F9"/>
+          </a:solidFill>
+          <a:ln>
+            <a:noFill/>
+          </a:ln>
+          <a:effectLst/>
+        </p:spPr>
+        <p:style>
+          <a:lnRef idx="1">
+            <a:schemeClr val="accent1"/>
+          </a:lnRef>
+          <a:fillRef idx="3">
+            <a:schemeClr val="accent1"/>
+          </a:fillRef>
+          <a:effectRef idx="2">
+            <a:schemeClr val="accent1"/>
+          </a:effectRef>
+          <a:fontRef idx="minor">
+            <a:schemeClr val="lt1"/>
+          </a:fontRef>
+        </p:style>
+        <p:txBody>
+          <a:bodyPr rtlCol="0" anchor="ctr"/>
+          <a:lstStyle/>
+          <a:p>
+            <a:pPr algn="ctr"/>
+            <a:endParaRPr/>
+          </a:p>
+        </p:txBody>
+      </p:sp>
+      <p:sp>
+        <p:nvSpPr>
+          <p:cNvPr id="19" name="Rectangle 18"/>
+          <p:cNvSpPr/>
+          <p:nvPr/>
+        </p:nvSpPr>
+        <p:spPr>
+          <a:xfrm>
+            <a:off x="6537960" y="3520440"/>
+            <a:ext cx="82296" cy="1371600"/>
+          </a:xfrm>
+          <a:prstGeom prst="rect">
+            <a:avLst/>
+          </a:prstGeom>
+          <a:solidFill>
+            <a:srgbClr val="1D4ED8"/>
+          </a:solidFill>
+          <a:ln>
+            <a:noFill/>
+          </a:ln>
+          <a:effectLst/>
+        </p:spPr>
+        <p:style>
+          <a:lnRef idx="1">
+            <a:schemeClr val="accent1"/>
+          </a:lnRef>
+          <a:fillRef idx="3">
+            <a:schemeClr val="accent1"/>
+          </a:fillRef>
+          <a:effectRef idx="2">
+            <a:schemeClr val="accent1"/>
+          </a:effectRef>
+          <a:fontRef idx="minor">
+            <a:schemeClr val="lt1"/>
+          </a:fontRef>
+        </p:style>
+        <p:txBody>
+          <a:bodyPr rtlCol="0" anchor="ctr"/>
+          <a:lstStyle/>
+          <a:p>
+            <a:pPr algn="ctr"/>
+            <a:endParaRPr/>
+          </a:p>
+        </p:txBody>
+      </p:sp>
+      <p:sp>
+        <p:nvSpPr>
+          <p:cNvPr id="20" name="TextBox 19"/>
+          <p:cNvSpPr txBox="1"/>
+          <p:nvPr/>
+        </p:nvSpPr>
+        <p:spPr>
+          <a:xfrm>
+            <a:off x="6793992" y="3648456"/>
+            <a:ext cx="4617720" cy="1188720"/>
+          </a:xfrm>
+          <a:prstGeom prst="rect">
+            <a:avLst/>
+          </a:prstGeom>
+          <a:noFill/>
+        </p:spPr>
+        <p:txBody>
+          <a:bodyPr wrap="square" lIns="0" tIns="0" rIns="0" bIns="0" anchor="t">
+            <a:spAutoFit/>
+          </a:bodyPr>
+          <a:lstStyle/>
+          <a:p>
+            <a:pPr algn="l">
+              <a:spcAft>
+                <a:spcPts val="300"/>
+              </a:spcAft>
+            </a:pPr>
+            <a:r>
+              <a:rPr sz="1500" b="1">
+                <a:solidFill>
+                  <a:srgbClr val="1E3A8A"/>
+                </a:solidFill>
+                <a:latin typeface="Cambria"/>
+              </a:rPr>
+              <a:t>Yapay zeka danışman</a:t>
+            </a:r>
+          </a:p>
+          <a:p>
+            <a:pPr algn="l">
+              <a:spcAft>
+                <a:spcPts val="600"/>
+              </a:spcAft>
+            </a:pPr>
+            <a:r>
+              <a:rPr sz="1300" b="0">
+                <a:solidFill>
+                  <a:srgbClr val="1F2937"/>
+                </a:solidFill>
+                <a:latin typeface="Calibri"/>
+              </a:rPr>
+              <a:t>Sohbet tabanlı finans asistanı + çapraz-varlık analiz tablosu.</a:t>
+            </a:r>
+          </a:p>
+        </p:txBody>
+      </p:sp>
+      <p:sp>
+        <p:nvSpPr>
+          <p:cNvPr id="21" name="Rectangle 20"/>
+          <p:cNvSpPr/>
+          <p:nvPr/>
+        </p:nvSpPr>
+        <p:spPr>
+          <a:xfrm>
+            <a:off x="1051560" y="5212080"/>
+            <a:ext cx="5074920" cy="1371600"/>
+          </a:xfrm>
+          <a:prstGeom prst="rect">
+            <a:avLst/>
+          </a:prstGeom>
+          <a:solidFill>
+            <a:srgbClr val="F1F5F9"/>
+          </a:solidFill>
+          <a:ln>
+            <a:noFill/>
+          </a:ln>
+          <a:effectLst/>
+        </p:spPr>
+        <p:style>
+          <a:lnRef idx="1">
+            <a:schemeClr val="accent1"/>
+          </a:lnRef>
+          <a:fillRef idx="3">
+            <a:schemeClr val="accent1"/>
+          </a:fillRef>
+          <a:effectRef idx="2">
+            <a:schemeClr val="accent1"/>
+          </a:effectRef>
+          <a:fontRef idx="minor">
+            <a:schemeClr val="lt1"/>
+          </a:fontRef>
+        </p:style>
+        <p:txBody>
+          <a:bodyPr rtlCol="0" anchor="ctr"/>
+          <a:lstStyle/>
+          <a:p>
+            <a:pPr algn="ctr"/>
+            <a:endParaRPr/>
+          </a:p>
+        </p:txBody>
+      </p:sp>
+      <p:sp>
+        <p:nvSpPr>
+          <p:cNvPr id="22" name="Rectangle 21"/>
+          <p:cNvSpPr/>
+          <p:nvPr/>
+        </p:nvSpPr>
+        <p:spPr>
+          <a:xfrm>
+            <a:off x="1051560" y="5212080"/>
+            <a:ext cx="82296" cy="1371600"/>
+          </a:xfrm>
+          <a:prstGeom prst="rect">
+            <a:avLst/>
+          </a:prstGeom>
+          <a:solidFill>
+            <a:srgbClr val="1D4ED8"/>
+          </a:solidFill>
+          <a:ln>
+            <a:noFill/>
+          </a:ln>
+          <a:effectLst/>
+        </p:spPr>
+        <p:style>
+          <a:lnRef idx="1">
+            <a:schemeClr val="accent1"/>
+          </a:lnRef>
+          <a:fillRef idx="3">
+            <a:schemeClr val="accent1"/>
+          </a:fillRef>
+          <a:effectRef idx="2">
+            <a:schemeClr val="accent1"/>
+          </a:effectRef>
+          <a:fontRef idx="minor">
+            <a:schemeClr val="lt1"/>
+          </a:fontRef>
+        </p:style>
+        <p:txBody>
+          <a:bodyPr rtlCol="0" anchor="ctr"/>
+          <a:lstStyle/>
+          <a:p>
+            <a:pPr algn="ctr"/>
+            <a:endParaRPr/>
+          </a:p>
+        </p:txBody>
+      </p:sp>
+      <p:sp>
+        <p:nvSpPr>
+          <p:cNvPr id="23" name="TextBox 22"/>
+          <p:cNvSpPr txBox="1"/>
+          <p:nvPr/>
+        </p:nvSpPr>
+        <p:spPr>
+          <a:xfrm>
+            <a:off x="1307592" y="5340096"/>
+            <a:ext cx="4617720" cy="1188720"/>
+          </a:xfrm>
+          <a:prstGeom prst="rect">
+            <a:avLst/>
+          </a:prstGeom>
+          <a:noFill/>
+        </p:spPr>
+        <p:txBody>
+          <a:bodyPr wrap="square" lIns="0" tIns="0" rIns="0" bIns="0" anchor="t">
+            <a:spAutoFit/>
+          </a:bodyPr>
+          <a:lstStyle/>
+          <a:p>
+            <a:pPr algn="l">
+              <a:spcAft>
+                <a:spcPts val="300"/>
+              </a:spcAft>
+            </a:pPr>
+            <a:r>
+              <a:rPr sz="1500" b="1">
+                <a:solidFill>
+                  <a:srgbClr val="1E3A8A"/>
+                </a:solidFill>
+                <a:latin typeface="Cambria"/>
+              </a:rPr>
+              <a:t>Tahvil &amp; VİOP simülasyonu</a:t>
+            </a:r>
+          </a:p>
+          <a:p>
+            <a:pPr algn="l">
+              <a:spcAft>
+                <a:spcPts val="600"/>
+              </a:spcAft>
+            </a:pPr>
+            <a:r>
+              <a:rPr sz="1300" b="0">
+                <a:solidFill>
+                  <a:srgbClr val="1F2937"/>
+                </a:solidFill>
+                <a:latin typeface="Calibri"/>
+              </a:rPr>
+              <a:t>Long/short, teminat, nominal/kupon/itfa — gerçek emir değil, simülasyon.</a:t>
+            </a:r>
+          </a:p>
+        </p:txBody>
+      </p:sp>
+      <p:sp>
+        <p:nvSpPr>
+          <p:cNvPr id="24" name="Rectangle 23"/>
+          <p:cNvSpPr/>
+          <p:nvPr/>
+        </p:nvSpPr>
+        <p:spPr>
+          <a:xfrm>
+            <a:off x="6537960" y="5212080"/>
+            <a:ext cx="5074920" cy="1371600"/>
+          </a:xfrm>
+          <a:prstGeom prst="rect">
+            <a:avLst/>
+          </a:prstGeom>
+          <a:solidFill>
+            <a:srgbClr val="F1F5F9"/>
+          </a:solidFill>
+          <a:ln>
+            <a:noFill/>
+          </a:ln>
+          <a:effectLst/>
+        </p:spPr>
+        <p:style>
+          <a:lnRef idx="1">
+            <a:schemeClr val="accent1"/>
+          </a:lnRef>
+          <a:fillRef idx="3">
+            <a:schemeClr val="accent1"/>
+          </a:fillRef>
+          <a:effectRef idx="2">
+            <a:schemeClr val="accent1"/>
+          </a:effectRef>
+          <a:fontRef idx="minor">
+            <a:schemeClr val="lt1"/>
+          </a:fontRef>
+        </p:style>
+        <p:txBody>
+          <a:bodyPr rtlCol="0" anchor="ctr"/>
+          <a:lstStyle/>
+          <a:p>
+            <a:pPr algn="ctr"/>
+            <a:endParaRPr/>
+          </a:p>
+        </p:txBody>
+      </p:sp>
+      <p:sp>
+        <p:nvSpPr>
+          <p:cNvPr id="25" name="Rectangle 24"/>
+          <p:cNvSpPr/>
+          <p:nvPr/>
+        </p:nvSpPr>
+        <p:spPr>
+          <a:xfrm>
+            <a:off x="6537960" y="5212080"/>
+            <a:ext cx="82296" cy="1371600"/>
+          </a:xfrm>
+          <a:prstGeom prst="rect">
+            <a:avLst/>
+          </a:prstGeom>
+          <a:solidFill>
+            <a:srgbClr val="1D4ED8"/>
+          </a:solidFill>
+          <a:ln>
+            <a:noFill/>
+          </a:ln>
+          <a:effectLst/>
+        </p:spPr>
+        <p:style>
+          <a:lnRef idx="1">
+            <a:schemeClr val="accent1"/>
+          </a:lnRef>
+          <a:fillRef idx="3">
+            <a:schemeClr val="accent1"/>
+          </a:fillRef>
+          <a:effectRef idx="2">
+            <a:schemeClr val="accent1"/>
+          </a:effectRef>
+          <a:fontRef idx="minor">
+            <a:schemeClr val="lt1"/>
+          </a:fontRef>
+        </p:style>
+        <p:txBody>
+          <a:bodyPr rtlCol="0" anchor="ctr"/>
+          <a:lstStyle/>
+          <a:p>
+            <a:pPr algn="ctr"/>
+            <a:endParaRPr/>
+          </a:p>
+        </p:txBody>
+      </p:sp>
+      <p:sp>
+        <p:nvSpPr>
+          <p:cNvPr id="26" name="TextBox 25"/>
+          <p:cNvSpPr txBox="1"/>
+          <p:nvPr/>
+        </p:nvSpPr>
+        <p:spPr>
+          <a:xfrm>
+            <a:off x="6793992" y="5340096"/>
+            <a:ext cx="4617720" cy="1188720"/>
+          </a:xfrm>
+          <a:prstGeom prst="rect">
+            <a:avLst/>
+          </a:prstGeom>
+          <a:noFill/>
+        </p:spPr>
+        <p:txBody>
+          <a:bodyPr wrap="square" lIns="0" tIns="0" rIns="0" bIns="0" anchor="t">
+            <a:spAutoFit/>
+          </a:bodyPr>
+          <a:lstStyle/>
+          <a:p>
+            <a:pPr algn="l">
+              <a:spcAft>
+                <a:spcPts val="300"/>
+              </a:spcAft>
+            </a:pPr>
+            <a:r>
+              <a:rPr sz="1500" b="1">
+                <a:solidFill>
+                  <a:srgbClr val="1E3A8A"/>
+                </a:solidFill>
+                <a:latin typeface="Cambria"/>
+              </a:rPr>
+              <a:t>Çok dilli &amp; güvenli</a:t>
+            </a:r>
+          </a:p>
+          <a:p>
+            <a:pPr algn="l">
+              <a:spcAft>
+                <a:spcPts val="600"/>
+              </a:spcAft>
+            </a:pPr>
+            <a:r>
+              <a:rPr sz="1300" b="0">
+                <a:solidFill>
+                  <a:srgbClr val="1F2937"/>
+                </a:solidFill>
+                <a:latin typeface="Calibri"/>
+              </a:rPr>
+              <a:t>TR/EN arayüz + otomatik haber çevirisi; 2FA ile güvenli giriş.</a:t>
+            </a:r>
+          </a:p>
+        </p:txBody>
+      </p:sp>
+      <p:sp>
+        <p:nvSpPr>
+          <p:cNvPr id="27" name="Rectangle 26"/>
+          <p:cNvSpPr/>
+          <p:nvPr/>
+        </p:nvSpPr>
+        <p:spPr>
           <a:xfrm rot="2100000">
-            <a:off x="11430000" y="-731520"/>
-            <a:ext cx="1920240" cy="1371600"/>
+            <a:off x="10835640" y="411480"/>
+            <a:ext cx="1280160" cy="457200"/>
           </a:xfrm>
           <a:prstGeom prst="rect">
             <a:avLst/>
@@ -4766,14 +5807,14 @@
       </p:sp>
       <p:sp>
         <p:nvSpPr>
-          <p:cNvPr id="3" name="Rectangle 2"/>
+          <p:cNvPr id="28" name="Rectangle 27"/>
           <p:cNvSpPr/>
           <p:nvPr/>
         </p:nvSpPr>
         <p:spPr>
           <a:xfrm rot="2100000">
-            <a:off x="11795760" y="-457200"/>
-            <a:ext cx="1645920" cy="1188720"/>
+            <a:off x="11109960" y="274320"/>
+            <a:ext cx="1005840" cy="365760"/>
           </a:xfrm>
           <a:prstGeom prst="rect">
             <a:avLst/>
@@ -4810,14 +5851,14 @@
       </p:sp>
       <p:sp>
         <p:nvSpPr>
-          <p:cNvPr id="4" name="Rectangle 3"/>
+          <p:cNvPr id="29" name="Rectangle 28"/>
           <p:cNvSpPr/>
           <p:nvPr/>
         </p:nvSpPr>
         <p:spPr>
           <a:xfrm rot="2100000">
-            <a:off x="11155680" y="6035040"/>
-            <a:ext cx="2377440" cy="1828800"/>
+            <a:off x="10835640" y="5989320"/>
+            <a:ext cx="1280160" cy="457200"/>
           </a:xfrm>
           <a:prstGeom prst="rect">
             <a:avLst/>
@@ -4854,14 +5895,14 @@
       </p:sp>
       <p:sp>
         <p:nvSpPr>
-          <p:cNvPr id="5" name="Rectangle 4"/>
+          <p:cNvPr id="30" name="Rectangle 29"/>
           <p:cNvSpPr/>
           <p:nvPr/>
         </p:nvSpPr>
         <p:spPr>
           <a:xfrm rot="2100000">
-            <a:off x="11521440" y="6400800"/>
-            <a:ext cx="2194560" cy="1645920"/>
+            <a:off x="11109960" y="6199632"/>
+            <a:ext cx="1005840" cy="365760"/>
           </a:xfrm>
           <a:prstGeom prst="rect">
             <a:avLst/>
@@ -4893,991 +5934,6 @@
           <a:lstStyle/>
           <a:p>
             <a:pPr algn="ctr"/>
-          </a:p>
-        </p:txBody>
-      </p:sp>
-      <p:sp>
-        <p:nvSpPr>
-          <p:cNvPr id="6" name="Rectangle 5"/>
-          <p:cNvSpPr/>
-          <p:nvPr/>
-        </p:nvSpPr>
-        <p:spPr>
-          <a:xfrm>
-            <a:off x="777240" y="548640"/>
-            <a:ext cx="146304" cy="868680"/>
-          </a:xfrm>
-          <a:prstGeom prst="rect">
-            <a:avLst/>
-          </a:prstGeom>
-          <a:solidFill>
-            <a:srgbClr val="1D4ED8"/>
-          </a:solidFill>
-          <a:ln>
-            <a:noFill/>
-          </a:ln>
-          <a:effectLst/>
-        </p:spPr>
-        <p:style>
-          <a:lnRef idx="1">
-            <a:schemeClr val="accent1"/>
-          </a:lnRef>
-          <a:fillRef idx="3">
-            <a:schemeClr val="accent1"/>
-          </a:fillRef>
-          <a:effectRef idx="2">
-            <a:schemeClr val="accent1"/>
-          </a:effectRef>
-          <a:fontRef idx="minor">
-            <a:schemeClr val="lt1"/>
-          </a:fontRef>
-        </p:style>
-        <p:txBody>
-          <a:bodyPr rtlCol="0" anchor="ctr"/>
-          <a:lstStyle/>
-          <a:p>
-            <a:pPr algn="ctr"/>
-          </a:p>
-        </p:txBody>
-      </p:sp>
-      <p:sp>
-        <p:nvSpPr>
-          <p:cNvPr id="7" name="TextBox 6"/>
-          <p:cNvSpPr txBox="1"/>
-          <p:nvPr/>
-        </p:nvSpPr>
-        <p:spPr>
-          <a:xfrm>
-            <a:off x="1051560" y="502920"/>
-            <a:ext cx="10241280" cy="1005840"/>
-          </a:xfrm>
-          <a:prstGeom prst="rect">
-            <a:avLst/>
-          </a:prstGeom>
-          <a:noFill/>
-        </p:spPr>
-        <p:txBody>
-          <a:bodyPr wrap="square" anchor="t" lIns="0" rIns="0" tIns="0" bIns="0">
-            <a:spAutoFit/>
-          </a:bodyPr>
-          <a:lstStyle/>
-          <a:p>
-            <a:pPr algn="l">
-              <a:spcAft>
-                <a:spcPts val="200"/>
-              </a:spcAft>
-            </a:pPr>
-            <a:r>
-              <a:rPr sz="3400" b="1">
-                <a:solidFill>
-                  <a:srgbClr val="1E3A8A"/>
-                </a:solidFill>
-                <a:latin typeface="Cambria"/>
-              </a:rPr>
-              <a:t>Öne Çıkan Özellikler</a:t>
-            </a:r>
-          </a:p>
-        </p:txBody>
-      </p:sp>
-      <p:sp>
-        <p:nvSpPr>
-          <p:cNvPr id="8" name="Rectangle 7"/>
-          <p:cNvSpPr/>
-          <p:nvPr/>
-        </p:nvSpPr>
-        <p:spPr>
-          <a:xfrm>
-            <a:off x="1051560" y="1481328"/>
-            <a:ext cx="2926080" cy="45720"/>
-          </a:xfrm>
-          <a:prstGeom prst="rect">
-            <a:avLst/>
-          </a:prstGeom>
-          <a:solidFill>
-            <a:srgbClr val="DBEAFE"/>
-          </a:solidFill>
-          <a:ln>
-            <a:noFill/>
-          </a:ln>
-          <a:effectLst/>
-        </p:spPr>
-        <p:style>
-          <a:lnRef idx="1">
-            <a:schemeClr val="accent1"/>
-          </a:lnRef>
-          <a:fillRef idx="3">
-            <a:schemeClr val="accent1"/>
-          </a:fillRef>
-          <a:effectRef idx="2">
-            <a:schemeClr val="accent1"/>
-          </a:effectRef>
-          <a:fontRef idx="minor">
-            <a:schemeClr val="lt1"/>
-          </a:fontRef>
-        </p:style>
-        <p:txBody>
-          <a:bodyPr rtlCol="0" anchor="ctr"/>
-          <a:lstStyle/>
-          <a:p>
-            <a:pPr algn="ctr"/>
-          </a:p>
-        </p:txBody>
-      </p:sp>
-      <p:sp>
-        <p:nvSpPr>
-          <p:cNvPr id="9" name="Rectangle 8"/>
-          <p:cNvSpPr/>
-          <p:nvPr/>
-        </p:nvSpPr>
-        <p:spPr>
-          <a:xfrm>
-            <a:off x="1051560" y="1828800"/>
-            <a:ext cx="5074920" cy="1371600"/>
-          </a:xfrm>
-          <a:prstGeom prst="rect">
-            <a:avLst/>
-          </a:prstGeom>
-          <a:solidFill>
-            <a:srgbClr val="F1F5F9"/>
-          </a:solidFill>
-          <a:ln>
-            <a:noFill/>
-          </a:ln>
-          <a:effectLst/>
-        </p:spPr>
-        <p:style>
-          <a:lnRef idx="1">
-            <a:schemeClr val="accent1"/>
-          </a:lnRef>
-          <a:fillRef idx="3">
-            <a:schemeClr val="accent1"/>
-          </a:fillRef>
-          <a:effectRef idx="2">
-            <a:schemeClr val="accent1"/>
-          </a:effectRef>
-          <a:fontRef idx="minor">
-            <a:schemeClr val="lt1"/>
-          </a:fontRef>
-        </p:style>
-        <p:txBody>
-          <a:bodyPr rtlCol="0" anchor="ctr"/>
-          <a:lstStyle/>
-          <a:p>
-            <a:pPr algn="ctr"/>
-          </a:p>
-        </p:txBody>
-      </p:sp>
-      <p:sp>
-        <p:nvSpPr>
-          <p:cNvPr id="10" name="Rectangle 9"/>
-          <p:cNvSpPr/>
-          <p:nvPr/>
-        </p:nvSpPr>
-        <p:spPr>
-          <a:xfrm>
-            <a:off x="1051560" y="1828800"/>
-            <a:ext cx="82296" cy="1371600"/>
-          </a:xfrm>
-          <a:prstGeom prst="rect">
-            <a:avLst/>
-          </a:prstGeom>
-          <a:solidFill>
-            <a:srgbClr val="1D4ED8"/>
-          </a:solidFill>
-          <a:ln>
-            <a:noFill/>
-          </a:ln>
-          <a:effectLst/>
-        </p:spPr>
-        <p:style>
-          <a:lnRef idx="1">
-            <a:schemeClr val="accent1"/>
-          </a:lnRef>
-          <a:fillRef idx="3">
-            <a:schemeClr val="accent1"/>
-          </a:fillRef>
-          <a:effectRef idx="2">
-            <a:schemeClr val="accent1"/>
-          </a:effectRef>
-          <a:fontRef idx="minor">
-            <a:schemeClr val="lt1"/>
-          </a:fontRef>
-        </p:style>
-        <p:txBody>
-          <a:bodyPr rtlCol="0" anchor="ctr"/>
-          <a:lstStyle/>
-          <a:p>
-            <a:pPr algn="ctr"/>
-          </a:p>
-        </p:txBody>
-      </p:sp>
-      <p:sp>
-        <p:nvSpPr>
-          <p:cNvPr id="11" name="TextBox 10"/>
-          <p:cNvSpPr txBox="1"/>
-          <p:nvPr/>
-        </p:nvSpPr>
-        <p:spPr>
-          <a:xfrm>
-            <a:off x="1307592" y="1956816"/>
-            <a:ext cx="4617720" cy="1188720"/>
-          </a:xfrm>
-          <a:prstGeom prst="rect">
-            <a:avLst/>
-          </a:prstGeom>
-          <a:noFill/>
-        </p:spPr>
-        <p:txBody>
-          <a:bodyPr wrap="square" anchor="t" lIns="0" rIns="0" tIns="0" bIns="0">
-            <a:spAutoFit/>
-          </a:bodyPr>
-          <a:lstStyle/>
-          <a:p>
-            <a:pPr algn="l">
-              <a:spcAft>
-                <a:spcPts val="300"/>
-              </a:spcAft>
-            </a:pPr>
-            <a:r>
-              <a:rPr sz="1500" b="1">
-                <a:solidFill>
-                  <a:srgbClr val="1E3A8A"/>
-                </a:solidFill>
-                <a:latin typeface="Cambria"/>
-              </a:rPr>
-              <a:t>Çok varlıklı canlı piyasa</a:t>
-            </a:r>
-          </a:p>
-          <a:p>
-            <a:pPr algn="l">
-              <a:spcAft>
-                <a:spcPts val="600"/>
-              </a:spcAft>
-            </a:pPr>
-            <a:r>
-              <a:rPr sz="1150" b="0">
-                <a:solidFill>
-                  <a:srgbClr val="475569"/>
-                </a:solidFill>
-                <a:latin typeface="Calibri"/>
-              </a:rPr>
-              <a:t>Hisse/kripto/fon/tahvil/döviz/emtia/VİOP; grafikler, sparkline, arama-filtre.</a:t>
-            </a:r>
-          </a:p>
-        </p:txBody>
-      </p:sp>
-      <p:sp>
-        <p:nvSpPr>
-          <p:cNvPr id="12" name="Rectangle 11"/>
-          <p:cNvSpPr/>
-          <p:nvPr/>
-        </p:nvSpPr>
-        <p:spPr>
-          <a:xfrm>
-            <a:off x="6537960" y="1828800"/>
-            <a:ext cx="5074920" cy="1371600"/>
-          </a:xfrm>
-          <a:prstGeom prst="rect">
-            <a:avLst/>
-          </a:prstGeom>
-          <a:solidFill>
-            <a:srgbClr val="F1F5F9"/>
-          </a:solidFill>
-          <a:ln>
-            <a:noFill/>
-          </a:ln>
-          <a:effectLst/>
-        </p:spPr>
-        <p:style>
-          <a:lnRef idx="1">
-            <a:schemeClr val="accent1"/>
-          </a:lnRef>
-          <a:fillRef idx="3">
-            <a:schemeClr val="accent1"/>
-          </a:fillRef>
-          <a:effectRef idx="2">
-            <a:schemeClr val="accent1"/>
-          </a:effectRef>
-          <a:fontRef idx="minor">
-            <a:schemeClr val="lt1"/>
-          </a:fontRef>
-        </p:style>
-        <p:txBody>
-          <a:bodyPr rtlCol="0" anchor="ctr"/>
-          <a:lstStyle/>
-          <a:p>
-            <a:pPr algn="ctr"/>
-          </a:p>
-        </p:txBody>
-      </p:sp>
-      <p:sp>
-        <p:nvSpPr>
-          <p:cNvPr id="13" name="Rectangle 12"/>
-          <p:cNvSpPr/>
-          <p:nvPr/>
-        </p:nvSpPr>
-        <p:spPr>
-          <a:xfrm>
-            <a:off x="6537960" y="1828800"/>
-            <a:ext cx="82296" cy="1371600"/>
-          </a:xfrm>
-          <a:prstGeom prst="rect">
-            <a:avLst/>
-          </a:prstGeom>
-          <a:solidFill>
-            <a:srgbClr val="1D4ED8"/>
-          </a:solidFill>
-          <a:ln>
-            <a:noFill/>
-          </a:ln>
-          <a:effectLst/>
-        </p:spPr>
-        <p:style>
-          <a:lnRef idx="1">
-            <a:schemeClr val="accent1"/>
-          </a:lnRef>
-          <a:fillRef idx="3">
-            <a:schemeClr val="accent1"/>
-          </a:fillRef>
-          <a:effectRef idx="2">
-            <a:schemeClr val="accent1"/>
-          </a:effectRef>
-          <a:fontRef idx="minor">
-            <a:schemeClr val="lt1"/>
-          </a:fontRef>
-        </p:style>
-        <p:txBody>
-          <a:bodyPr rtlCol="0" anchor="ctr"/>
-          <a:lstStyle/>
-          <a:p>
-            <a:pPr algn="ctr"/>
-          </a:p>
-        </p:txBody>
-      </p:sp>
-      <p:sp>
-        <p:nvSpPr>
-          <p:cNvPr id="14" name="TextBox 13"/>
-          <p:cNvSpPr txBox="1"/>
-          <p:nvPr/>
-        </p:nvSpPr>
-        <p:spPr>
-          <a:xfrm>
-            <a:off x="6793992" y="1956816"/>
-            <a:ext cx="4617720" cy="1188720"/>
-          </a:xfrm>
-          <a:prstGeom prst="rect">
-            <a:avLst/>
-          </a:prstGeom>
-          <a:noFill/>
-        </p:spPr>
-        <p:txBody>
-          <a:bodyPr wrap="square" anchor="t" lIns="0" rIns="0" tIns="0" bIns="0">
-            <a:spAutoFit/>
-          </a:bodyPr>
-          <a:lstStyle/>
-          <a:p>
-            <a:pPr algn="l">
-              <a:spcAft>
-                <a:spcPts val="300"/>
-              </a:spcAft>
-            </a:pPr>
-            <a:r>
-              <a:rPr sz="1500" b="1">
-                <a:solidFill>
-                  <a:srgbClr val="1E3A8A"/>
-                </a:solidFill>
-                <a:latin typeface="Cambria"/>
-              </a:rPr>
-              <a:t>Portföy &amp; reel getiri</a:t>
-            </a:r>
-          </a:p>
-          <a:p>
-            <a:pPr algn="l">
-              <a:spcAft>
-                <a:spcPts val="600"/>
-              </a:spcAft>
-            </a:pPr>
-            <a:r>
-              <a:rPr sz="1150" b="0">
-                <a:solidFill>
-                  <a:srgbClr val="475569"/>
-                </a:solidFill>
-                <a:latin typeface="Calibri"/>
-              </a:rPr>
-              <a:t>Kâr/zarar, dağılım grafiği, enflasyona göre reel getiri, Excel ile içe aktarma.</a:t>
-            </a:r>
-          </a:p>
-        </p:txBody>
-      </p:sp>
-      <p:sp>
-        <p:nvSpPr>
-          <p:cNvPr id="15" name="Rectangle 14"/>
-          <p:cNvSpPr/>
-          <p:nvPr/>
-        </p:nvSpPr>
-        <p:spPr>
-          <a:xfrm>
-            <a:off x="1051560" y="3520440"/>
-            <a:ext cx="5074920" cy="1371600"/>
-          </a:xfrm>
-          <a:prstGeom prst="rect">
-            <a:avLst/>
-          </a:prstGeom>
-          <a:solidFill>
-            <a:srgbClr val="F1F5F9"/>
-          </a:solidFill>
-          <a:ln>
-            <a:noFill/>
-          </a:ln>
-          <a:effectLst/>
-        </p:spPr>
-        <p:style>
-          <a:lnRef idx="1">
-            <a:schemeClr val="accent1"/>
-          </a:lnRef>
-          <a:fillRef idx="3">
-            <a:schemeClr val="accent1"/>
-          </a:fillRef>
-          <a:effectRef idx="2">
-            <a:schemeClr val="accent1"/>
-          </a:effectRef>
-          <a:fontRef idx="minor">
-            <a:schemeClr val="lt1"/>
-          </a:fontRef>
-        </p:style>
-        <p:txBody>
-          <a:bodyPr rtlCol="0" anchor="ctr"/>
-          <a:lstStyle/>
-          <a:p>
-            <a:pPr algn="ctr"/>
-          </a:p>
-        </p:txBody>
-      </p:sp>
-      <p:sp>
-        <p:nvSpPr>
-          <p:cNvPr id="16" name="Rectangle 15"/>
-          <p:cNvSpPr/>
-          <p:nvPr/>
-        </p:nvSpPr>
-        <p:spPr>
-          <a:xfrm>
-            <a:off x="1051560" y="3520440"/>
-            <a:ext cx="82296" cy="1371600"/>
-          </a:xfrm>
-          <a:prstGeom prst="rect">
-            <a:avLst/>
-          </a:prstGeom>
-          <a:solidFill>
-            <a:srgbClr val="1D4ED8"/>
-          </a:solidFill>
-          <a:ln>
-            <a:noFill/>
-          </a:ln>
-          <a:effectLst/>
-        </p:spPr>
-        <p:style>
-          <a:lnRef idx="1">
-            <a:schemeClr val="accent1"/>
-          </a:lnRef>
-          <a:fillRef idx="3">
-            <a:schemeClr val="accent1"/>
-          </a:fillRef>
-          <a:effectRef idx="2">
-            <a:schemeClr val="accent1"/>
-          </a:effectRef>
-          <a:fontRef idx="minor">
-            <a:schemeClr val="lt1"/>
-          </a:fontRef>
-        </p:style>
-        <p:txBody>
-          <a:bodyPr rtlCol="0" anchor="ctr"/>
-          <a:lstStyle/>
-          <a:p>
-            <a:pPr algn="ctr"/>
-          </a:p>
-        </p:txBody>
-      </p:sp>
-      <p:sp>
-        <p:nvSpPr>
-          <p:cNvPr id="17" name="TextBox 16"/>
-          <p:cNvSpPr txBox="1"/>
-          <p:nvPr/>
-        </p:nvSpPr>
-        <p:spPr>
-          <a:xfrm>
-            <a:off x="1307592" y="3648456"/>
-            <a:ext cx="4617720" cy="1188720"/>
-          </a:xfrm>
-          <a:prstGeom prst="rect">
-            <a:avLst/>
-          </a:prstGeom>
-          <a:noFill/>
-        </p:spPr>
-        <p:txBody>
-          <a:bodyPr wrap="square" anchor="t" lIns="0" rIns="0" tIns="0" bIns="0">
-            <a:spAutoFit/>
-          </a:bodyPr>
-          <a:lstStyle/>
-          <a:p>
-            <a:pPr algn="l">
-              <a:spcAft>
-                <a:spcPts val="300"/>
-              </a:spcAft>
-            </a:pPr>
-            <a:r>
-              <a:rPr sz="1500" b="1">
-                <a:solidFill>
-                  <a:srgbClr val="1E3A8A"/>
-                </a:solidFill>
-                <a:latin typeface="Cambria"/>
-              </a:rPr>
-              <a:t>Fiyat alarmları &amp; listeler</a:t>
-            </a:r>
-          </a:p>
-          <a:p>
-            <a:pPr algn="l">
-              <a:spcAft>
-                <a:spcPts val="600"/>
-              </a:spcAft>
-            </a:pPr>
-            <a:r>
-              <a:rPr sz="1150" b="0">
-                <a:solidFill>
-                  <a:srgbClr val="475569"/>
-                </a:solidFill>
-                <a:latin typeface="Calibri"/>
-              </a:rPr>
-              <a:t>Hedef fiyat alarmı (uygulama içi + e-posta), kişisel takip listeleri.</a:t>
-            </a:r>
-          </a:p>
-        </p:txBody>
-      </p:sp>
-      <p:sp>
-        <p:nvSpPr>
-          <p:cNvPr id="18" name="Rectangle 17"/>
-          <p:cNvSpPr/>
-          <p:nvPr/>
-        </p:nvSpPr>
-        <p:spPr>
-          <a:xfrm>
-            <a:off x="6537960" y="3520440"/>
-            <a:ext cx="5074920" cy="1371600"/>
-          </a:xfrm>
-          <a:prstGeom prst="rect">
-            <a:avLst/>
-          </a:prstGeom>
-          <a:solidFill>
-            <a:srgbClr val="F1F5F9"/>
-          </a:solidFill>
-          <a:ln>
-            <a:noFill/>
-          </a:ln>
-          <a:effectLst/>
-        </p:spPr>
-        <p:style>
-          <a:lnRef idx="1">
-            <a:schemeClr val="accent1"/>
-          </a:lnRef>
-          <a:fillRef idx="3">
-            <a:schemeClr val="accent1"/>
-          </a:fillRef>
-          <a:effectRef idx="2">
-            <a:schemeClr val="accent1"/>
-          </a:effectRef>
-          <a:fontRef idx="minor">
-            <a:schemeClr val="lt1"/>
-          </a:fontRef>
-        </p:style>
-        <p:txBody>
-          <a:bodyPr rtlCol="0" anchor="ctr"/>
-          <a:lstStyle/>
-          <a:p>
-            <a:pPr algn="ctr"/>
-          </a:p>
-        </p:txBody>
-      </p:sp>
-      <p:sp>
-        <p:nvSpPr>
-          <p:cNvPr id="19" name="Rectangle 18"/>
-          <p:cNvSpPr/>
-          <p:nvPr/>
-        </p:nvSpPr>
-        <p:spPr>
-          <a:xfrm>
-            <a:off x="6537960" y="3520440"/>
-            <a:ext cx="82296" cy="1371600"/>
-          </a:xfrm>
-          <a:prstGeom prst="rect">
-            <a:avLst/>
-          </a:prstGeom>
-          <a:solidFill>
-            <a:srgbClr val="1D4ED8"/>
-          </a:solidFill>
-          <a:ln>
-            <a:noFill/>
-          </a:ln>
-          <a:effectLst/>
-        </p:spPr>
-        <p:style>
-          <a:lnRef idx="1">
-            <a:schemeClr val="accent1"/>
-          </a:lnRef>
-          <a:fillRef idx="3">
-            <a:schemeClr val="accent1"/>
-          </a:fillRef>
-          <a:effectRef idx="2">
-            <a:schemeClr val="accent1"/>
-          </a:effectRef>
-          <a:fontRef idx="minor">
-            <a:schemeClr val="lt1"/>
-          </a:fontRef>
-        </p:style>
-        <p:txBody>
-          <a:bodyPr rtlCol="0" anchor="ctr"/>
-          <a:lstStyle/>
-          <a:p>
-            <a:pPr algn="ctr"/>
-          </a:p>
-        </p:txBody>
-      </p:sp>
-      <p:sp>
-        <p:nvSpPr>
-          <p:cNvPr id="20" name="TextBox 19"/>
-          <p:cNvSpPr txBox="1"/>
-          <p:nvPr/>
-        </p:nvSpPr>
-        <p:spPr>
-          <a:xfrm>
-            <a:off x="6793992" y="3648456"/>
-            <a:ext cx="4617720" cy="1188720"/>
-          </a:xfrm>
-          <a:prstGeom prst="rect">
-            <a:avLst/>
-          </a:prstGeom>
-          <a:noFill/>
-        </p:spPr>
-        <p:txBody>
-          <a:bodyPr wrap="square" anchor="t" lIns="0" rIns="0" tIns="0" bIns="0">
-            <a:spAutoFit/>
-          </a:bodyPr>
-          <a:lstStyle/>
-          <a:p>
-            <a:pPr algn="l">
-              <a:spcAft>
-                <a:spcPts val="300"/>
-              </a:spcAft>
-            </a:pPr>
-            <a:r>
-              <a:rPr sz="1500" b="1">
-                <a:solidFill>
-                  <a:srgbClr val="1E3A8A"/>
-                </a:solidFill>
-                <a:latin typeface="Cambria"/>
-              </a:rPr>
-              <a:t>Yapay zeka danışman</a:t>
-            </a:r>
-          </a:p>
-          <a:p>
-            <a:pPr algn="l">
-              <a:spcAft>
-                <a:spcPts val="600"/>
-              </a:spcAft>
-            </a:pPr>
-            <a:r>
-              <a:rPr sz="1150" b="0">
-                <a:solidFill>
-                  <a:srgbClr val="475569"/>
-                </a:solidFill>
-                <a:latin typeface="Calibri"/>
-              </a:rPr>
-              <a:t>Sohbet tabanlı finans asistanı + çapraz-varlık analiz tablosu.</a:t>
-            </a:r>
-          </a:p>
-        </p:txBody>
-      </p:sp>
-      <p:sp>
-        <p:nvSpPr>
-          <p:cNvPr id="21" name="Rectangle 20"/>
-          <p:cNvSpPr/>
-          <p:nvPr/>
-        </p:nvSpPr>
-        <p:spPr>
-          <a:xfrm>
-            <a:off x="1051560" y="5212080"/>
-            <a:ext cx="5074920" cy="1371600"/>
-          </a:xfrm>
-          <a:prstGeom prst="rect">
-            <a:avLst/>
-          </a:prstGeom>
-          <a:solidFill>
-            <a:srgbClr val="F1F5F9"/>
-          </a:solidFill>
-          <a:ln>
-            <a:noFill/>
-          </a:ln>
-          <a:effectLst/>
-        </p:spPr>
-        <p:style>
-          <a:lnRef idx="1">
-            <a:schemeClr val="accent1"/>
-          </a:lnRef>
-          <a:fillRef idx="3">
-            <a:schemeClr val="accent1"/>
-          </a:fillRef>
-          <a:effectRef idx="2">
-            <a:schemeClr val="accent1"/>
-          </a:effectRef>
-          <a:fontRef idx="minor">
-            <a:schemeClr val="lt1"/>
-          </a:fontRef>
-        </p:style>
-        <p:txBody>
-          <a:bodyPr rtlCol="0" anchor="ctr"/>
-          <a:lstStyle/>
-          <a:p>
-            <a:pPr algn="ctr"/>
-          </a:p>
-        </p:txBody>
-      </p:sp>
-      <p:sp>
-        <p:nvSpPr>
-          <p:cNvPr id="22" name="Rectangle 21"/>
-          <p:cNvSpPr/>
-          <p:nvPr/>
-        </p:nvSpPr>
-        <p:spPr>
-          <a:xfrm>
-            <a:off x="1051560" y="5212080"/>
-            <a:ext cx="82296" cy="1371600"/>
-          </a:xfrm>
-          <a:prstGeom prst="rect">
-            <a:avLst/>
-          </a:prstGeom>
-          <a:solidFill>
-            <a:srgbClr val="1D4ED8"/>
-          </a:solidFill>
-          <a:ln>
-            <a:noFill/>
-          </a:ln>
-          <a:effectLst/>
-        </p:spPr>
-        <p:style>
-          <a:lnRef idx="1">
-            <a:schemeClr val="accent1"/>
-          </a:lnRef>
-          <a:fillRef idx="3">
-            <a:schemeClr val="accent1"/>
-          </a:fillRef>
-          <a:effectRef idx="2">
-            <a:schemeClr val="accent1"/>
-          </a:effectRef>
-          <a:fontRef idx="minor">
-            <a:schemeClr val="lt1"/>
-          </a:fontRef>
-        </p:style>
-        <p:txBody>
-          <a:bodyPr rtlCol="0" anchor="ctr"/>
-          <a:lstStyle/>
-          <a:p>
-            <a:pPr algn="ctr"/>
-          </a:p>
-        </p:txBody>
-      </p:sp>
-      <p:sp>
-        <p:nvSpPr>
-          <p:cNvPr id="23" name="TextBox 22"/>
-          <p:cNvSpPr txBox="1"/>
-          <p:nvPr/>
-        </p:nvSpPr>
-        <p:spPr>
-          <a:xfrm>
-            <a:off x="1307592" y="5340096"/>
-            <a:ext cx="4617720" cy="1188720"/>
-          </a:xfrm>
-          <a:prstGeom prst="rect">
-            <a:avLst/>
-          </a:prstGeom>
-          <a:noFill/>
-        </p:spPr>
-        <p:txBody>
-          <a:bodyPr wrap="square" anchor="t" lIns="0" rIns="0" tIns="0" bIns="0">
-            <a:spAutoFit/>
-          </a:bodyPr>
-          <a:lstStyle/>
-          <a:p>
-            <a:pPr algn="l">
-              <a:spcAft>
-                <a:spcPts val="300"/>
-              </a:spcAft>
-            </a:pPr>
-            <a:r>
-              <a:rPr sz="1500" b="1">
-                <a:solidFill>
-                  <a:srgbClr val="1E3A8A"/>
-                </a:solidFill>
-                <a:latin typeface="Cambria"/>
-              </a:rPr>
-              <a:t>Tahvil &amp; VİOP simülasyonu</a:t>
-            </a:r>
-          </a:p>
-          <a:p>
-            <a:pPr algn="l">
-              <a:spcAft>
-                <a:spcPts val="600"/>
-              </a:spcAft>
-            </a:pPr>
-            <a:r>
-              <a:rPr sz="1150" b="0">
-                <a:solidFill>
-                  <a:srgbClr val="475569"/>
-                </a:solidFill>
-                <a:latin typeface="Calibri"/>
-              </a:rPr>
-              <a:t>Long/short, teminat, nominal/kupon/itfa — gerçek emir değil, simülasyon.</a:t>
-            </a:r>
-          </a:p>
-        </p:txBody>
-      </p:sp>
-      <p:sp>
-        <p:nvSpPr>
-          <p:cNvPr id="24" name="Rectangle 23"/>
-          <p:cNvSpPr/>
-          <p:nvPr/>
-        </p:nvSpPr>
-        <p:spPr>
-          <a:xfrm>
-            <a:off x="6537960" y="5212080"/>
-            <a:ext cx="5074920" cy="1371600"/>
-          </a:xfrm>
-          <a:prstGeom prst="rect">
-            <a:avLst/>
-          </a:prstGeom>
-          <a:solidFill>
-            <a:srgbClr val="F1F5F9"/>
-          </a:solidFill>
-          <a:ln>
-            <a:noFill/>
-          </a:ln>
-          <a:effectLst/>
-        </p:spPr>
-        <p:style>
-          <a:lnRef idx="1">
-            <a:schemeClr val="accent1"/>
-          </a:lnRef>
-          <a:fillRef idx="3">
-            <a:schemeClr val="accent1"/>
-          </a:fillRef>
-          <a:effectRef idx="2">
-            <a:schemeClr val="accent1"/>
-          </a:effectRef>
-          <a:fontRef idx="minor">
-            <a:schemeClr val="lt1"/>
-          </a:fontRef>
-        </p:style>
-        <p:txBody>
-          <a:bodyPr rtlCol="0" anchor="ctr"/>
-          <a:lstStyle/>
-          <a:p>
-            <a:pPr algn="ctr"/>
-          </a:p>
-        </p:txBody>
-      </p:sp>
-      <p:sp>
-        <p:nvSpPr>
-          <p:cNvPr id="25" name="Rectangle 24"/>
-          <p:cNvSpPr/>
-          <p:nvPr/>
-        </p:nvSpPr>
-        <p:spPr>
-          <a:xfrm>
-            <a:off x="6537960" y="5212080"/>
-            <a:ext cx="82296" cy="1371600"/>
-          </a:xfrm>
-          <a:prstGeom prst="rect">
-            <a:avLst/>
-          </a:prstGeom>
-          <a:solidFill>
-            <a:srgbClr val="1D4ED8"/>
-          </a:solidFill>
-          <a:ln>
-            <a:noFill/>
-          </a:ln>
-          <a:effectLst/>
-        </p:spPr>
-        <p:style>
-          <a:lnRef idx="1">
-            <a:schemeClr val="accent1"/>
-          </a:lnRef>
-          <a:fillRef idx="3">
-            <a:schemeClr val="accent1"/>
-          </a:fillRef>
-          <a:effectRef idx="2">
-            <a:schemeClr val="accent1"/>
-          </a:effectRef>
-          <a:fontRef idx="minor">
-            <a:schemeClr val="lt1"/>
-          </a:fontRef>
-        </p:style>
-        <p:txBody>
-          <a:bodyPr rtlCol="0" anchor="ctr"/>
-          <a:lstStyle/>
-          <a:p>
-            <a:pPr algn="ctr"/>
-          </a:p>
-        </p:txBody>
-      </p:sp>
-      <p:sp>
-        <p:nvSpPr>
-          <p:cNvPr id="26" name="TextBox 25"/>
-          <p:cNvSpPr txBox="1"/>
-          <p:nvPr/>
-        </p:nvSpPr>
-        <p:spPr>
-          <a:xfrm>
-            <a:off x="6793992" y="5340096"/>
-            <a:ext cx="4617720" cy="1188720"/>
-          </a:xfrm>
-          <a:prstGeom prst="rect">
-            <a:avLst/>
-          </a:prstGeom>
-          <a:noFill/>
-        </p:spPr>
-        <p:txBody>
-          <a:bodyPr wrap="square" anchor="t" lIns="0" rIns="0" tIns="0" bIns="0">
-            <a:spAutoFit/>
-          </a:bodyPr>
-          <a:lstStyle/>
-          <a:p>
-            <a:pPr algn="l">
-              <a:spcAft>
-                <a:spcPts val="300"/>
-              </a:spcAft>
-            </a:pPr>
-            <a:r>
-              <a:rPr sz="1500" b="1">
-                <a:solidFill>
-                  <a:srgbClr val="1E3A8A"/>
-                </a:solidFill>
-                <a:latin typeface="Cambria"/>
-              </a:rPr>
-              <a:t>Çok dilli &amp; güvenli</a:t>
-            </a:r>
-          </a:p>
-          <a:p>
-            <a:pPr algn="l">
-              <a:spcAft>
-                <a:spcPts val="600"/>
-              </a:spcAft>
-            </a:pPr>
-            <a:r>
-              <a:rPr sz="1150" b="0">
-                <a:solidFill>
-                  <a:srgbClr val="475569"/>
-                </a:solidFill>
-                <a:latin typeface="Calibri"/>
-              </a:rPr>
-              <a:t>TR/EN arayüz + otomatik haber çevirisi; 2FA ile güvenli giriş.</a:t>
-            </a:r>
           </a:p>
         </p:txBody>
       </p:sp>
@@ -5890,7 +5946,7 @@
 </file>
 
 <file path=ppt/slides/slide5.xml><?xml version="1.0" encoding="utf-8"?>
-<p:sld xmlns:a="http://schemas.openxmlformats.org/drawingml/2006/main" xmlns:p="http://schemas.openxmlformats.org/presentationml/2006/main" xmlns:r="http://schemas.openxmlformats.org/officeDocument/2006/relationships">
+<p:sld xmlns:a="http://schemas.openxmlformats.org/drawingml/2006/main" xmlns:r="http://schemas.openxmlformats.org/officeDocument/2006/relationships" xmlns:p="http://schemas.openxmlformats.org/presentationml/2006/main">
   <p:cSld>
     <p:spTree>
       <p:nvGrpSpPr>
@@ -5898,61 +5954,24 @@
         <p:cNvGrpSpPr/>
         <p:nvPr/>
       </p:nvGrpSpPr>
-      <p:grpSpPr/>
-      <p:sp>
-        <p:nvSpPr>
-          <p:cNvPr id="2" name="Rectangle 1"/>
+      <p:grpSpPr>
+        <a:xfrm>
+          <a:off x="0" y="0"/>
+          <a:ext cx="0" cy="0"/>
+          <a:chOff x="0" y="0"/>
+          <a:chExt cx="0" cy="0"/>
+        </a:xfrm>
+      </p:grpSpPr>
+      <p:sp>
+        <p:nvSpPr>
+          <p:cNvPr id="6" name="Rectangle 5"/>
           <p:cNvSpPr/>
           <p:nvPr/>
         </p:nvSpPr>
         <p:spPr>
-          <a:xfrm rot="2100000">
-            <a:off x="11430000" y="-731520"/>
-            <a:ext cx="1920240" cy="1371600"/>
-          </a:xfrm>
-          <a:prstGeom prst="rect">
-            <a:avLst/>
-          </a:prstGeom>
-          <a:solidFill>
-            <a:srgbClr val="1E3A8A"/>
-          </a:solidFill>
-          <a:ln>
-            <a:noFill/>
-          </a:ln>
-          <a:effectLst/>
-        </p:spPr>
-        <p:style>
-          <a:lnRef idx="1">
-            <a:schemeClr val="accent1"/>
-          </a:lnRef>
-          <a:fillRef idx="3">
-            <a:schemeClr val="accent1"/>
-          </a:fillRef>
-          <a:effectRef idx="2">
-            <a:schemeClr val="accent1"/>
-          </a:effectRef>
-          <a:fontRef idx="minor">
-            <a:schemeClr val="lt1"/>
-          </a:fontRef>
-        </p:style>
-        <p:txBody>
-          <a:bodyPr rtlCol="0" anchor="ctr"/>
-          <a:lstStyle/>
-          <a:p>
-            <a:pPr algn="ctr"/>
-          </a:p>
-        </p:txBody>
-      </p:sp>
-      <p:sp>
-        <p:nvSpPr>
-          <p:cNvPr id="3" name="Rectangle 2"/>
-          <p:cNvSpPr/>
-          <p:nvPr/>
-        </p:nvSpPr>
-        <p:spPr>
-          <a:xfrm rot="2100000">
-            <a:off x="11795760" y="-457200"/>
-            <a:ext cx="1645920" cy="1188720"/>
+          <a:xfrm>
+            <a:off x="777240" y="548640"/>
+            <a:ext cx="146304" cy="868680"/>
           </a:xfrm>
           <a:prstGeom prst="rect">
             <a:avLst/>
@@ -5984,138 +6003,7 @@
           <a:lstStyle/>
           <a:p>
             <a:pPr algn="ctr"/>
-          </a:p>
-        </p:txBody>
-      </p:sp>
-      <p:sp>
-        <p:nvSpPr>
-          <p:cNvPr id="4" name="Rectangle 3"/>
-          <p:cNvSpPr/>
-          <p:nvPr/>
-        </p:nvSpPr>
-        <p:spPr>
-          <a:xfrm rot="2100000">
-            <a:off x="11155680" y="6035040"/>
-            <a:ext cx="2377440" cy="1828800"/>
-          </a:xfrm>
-          <a:prstGeom prst="rect">
-            <a:avLst/>
-          </a:prstGeom>
-          <a:solidFill>
-            <a:srgbClr val="1E3A8A"/>
-          </a:solidFill>
-          <a:ln>
-            <a:noFill/>
-          </a:ln>
-          <a:effectLst/>
-        </p:spPr>
-        <p:style>
-          <a:lnRef idx="1">
-            <a:schemeClr val="accent1"/>
-          </a:lnRef>
-          <a:fillRef idx="3">
-            <a:schemeClr val="accent1"/>
-          </a:fillRef>
-          <a:effectRef idx="2">
-            <a:schemeClr val="accent1"/>
-          </a:effectRef>
-          <a:fontRef idx="minor">
-            <a:schemeClr val="lt1"/>
-          </a:fontRef>
-        </p:style>
-        <p:txBody>
-          <a:bodyPr rtlCol="0" anchor="ctr"/>
-          <a:lstStyle/>
-          <a:p>
-            <a:pPr algn="ctr"/>
-          </a:p>
-        </p:txBody>
-      </p:sp>
-      <p:sp>
-        <p:nvSpPr>
-          <p:cNvPr id="5" name="Rectangle 4"/>
-          <p:cNvSpPr/>
-          <p:nvPr/>
-        </p:nvSpPr>
-        <p:spPr>
-          <a:xfrm rot="2100000">
-            <a:off x="11521440" y="6400800"/>
-            <a:ext cx="2194560" cy="1645920"/>
-          </a:xfrm>
-          <a:prstGeom prst="rect">
-            <a:avLst/>
-          </a:prstGeom>
-          <a:solidFill>
-            <a:srgbClr val="1D4ED8"/>
-          </a:solidFill>
-          <a:ln>
-            <a:noFill/>
-          </a:ln>
-          <a:effectLst/>
-        </p:spPr>
-        <p:style>
-          <a:lnRef idx="1">
-            <a:schemeClr val="accent1"/>
-          </a:lnRef>
-          <a:fillRef idx="3">
-            <a:schemeClr val="accent1"/>
-          </a:fillRef>
-          <a:effectRef idx="2">
-            <a:schemeClr val="accent1"/>
-          </a:effectRef>
-          <a:fontRef idx="minor">
-            <a:schemeClr val="lt1"/>
-          </a:fontRef>
-        </p:style>
-        <p:txBody>
-          <a:bodyPr rtlCol="0" anchor="ctr"/>
-          <a:lstStyle/>
-          <a:p>
-            <a:pPr algn="ctr"/>
-          </a:p>
-        </p:txBody>
-      </p:sp>
-      <p:sp>
-        <p:nvSpPr>
-          <p:cNvPr id="6" name="Rectangle 5"/>
-          <p:cNvSpPr/>
-          <p:nvPr/>
-        </p:nvSpPr>
-        <p:spPr>
-          <a:xfrm>
-            <a:off x="777240" y="548640"/>
-            <a:ext cx="146304" cy="868680"/>
-          </a:xfrm>
-          <a:prstGeom prst="rect">
-            <a:avLst/>
-          </a:prstGeom>
-          <a:solidFill>
-            <a:srgbClr val="1D4ED8"/>
-          </a:solidFill>
-          <a:ln>
-            <a:noFill/>
-          </a:ln>
-          <a:effectLst/>
-        </p:spPr>
-        <p:style>
-          <a:lnRef idx="1">
-            <a:schemeClr val="accent1"/>
-          </a:lnRef>
-          <a:fillRef idx="3">
-            <a:schemeClr val="accent1"/>
-          </a:fillRef>
-          <a:effectRef idx="2">
-            <a:schemeClr val="accent1"/>
-          </a:effectRef>
-          <a:fontRef idx="minor">
-            <a:schemeClr val="lt1"/>
-          </a:fontRef>
-        </p:style>
-        <p:txBody>
-          <a:bodyPr rtlCol="0" anchor="ctr"/>
-          <a:lstStyle/>
-          <a:p>
-            <a:pPr algn="ctr"/>
+            <a:endParaRPr/>
           </a:p>
         </p:txBody>
       </p:sp>
@@ -6136,7 +6024,7 @@
           <a:noFill/>
         </p:spPr>
         <p:txBody>
-          <a:bodyPr wrap="square" anchor="t" lIns="0" rIns="0" tIns="0" bIns="0">
+          <a:bodyPr wrap="square" lIns="0" tIns="0" rIns="0" bIns="0" anchor="t">
             <a:spAutoFit/>
           </a:bodyPr>
           <a:lstStyle/>
@@ -6199,6 +6087,7 @@
           <a:lstStyle/>
           <a:p>
             <a:pPr algn="ctr"/>
+            <a:endParaRPr/>
           </a:p>
         </p:txBody>
       </p:sp>
@@ -6245,6 +6134,7 @@
           <a:lstStyle/>
           <a:p>
             <a:pPr algn="ctr"/>
+            <a:endParaRPr/>
           </a:p>
         </p:txBody>
       </p:sp>
@@ -6265,7 +6155,7 @@
           <a:noFill/>
         </p:spPr>
         <p:txBody>
-          <a:bodyPr wrap="square" anchor="t" lIns="0" rIns="0" tIns="0" bIns="0">
+          <a:bodyPr wrap="square" lIns="0" tIns="0" rIns="0" bIns="0" anchor="t">
             <a:spAutoFit/>
           </a:bodyPr>
           <a:lstStyle/>
@@ -6292,9 +6182,9 @@
               </a:spcAft>
             </a:pPr>
             <a:r>
-              <a:rPr sz="1100" b="0">
-                <a:solidFill>
-                  <a:srgbClr val="475569"/>
+              <a:rPr sz="1300" b="0">
+                <a:solidFill>
+                  <a:srgbClr val="1F2937"/>
                 </a:solidFill>
                 <a:latin typeface="Calibri"/>
               </a:rPr>
@@ -6320,7 +6210,7 @@
           <a:noFill/>
         </p:spPr>
         <p:txBody>
-          <a:bodyPr wrap="square" anchor="ctr" lIns="0" rIns="0" tIns="0" bIns="0">
+          <a:bodyPr wrap="square" lIns="0" tIns="0" rIns="0" bIns="0" anchor="ctr">
             <a:spAutoFit/>
           </a:bodyPr>
           <a:lstStyle/>
@@ -6385,6 +6275,7 @@
           <a:lstStyle/>
           <a:p>
             <a:pPr algn="ctr"/>
+            <a:endParaRPr/>
           </a:p>
         </p:txBody>
       </p:sp>
@@ -6405,7 +6296,7 @@
           <a:noFill/>
         </p:spPr>
         <p:txBody>
-          <a:bodyPr wrap="square" anchor="t" lIns="0" rIns="0" tIns="0" bIns="0">
+          <a:bodyPr wrap="square" lIns="0" tIns="0" rIns="0" bIns="0" anchor="t">
             <a:spAutoFit/>
           </a:bodyPr>
           <a:lstStyle/>
@@ -6432,9 +6323,9 @@
               </a:spcAft>
             </a:pPr>
             <a:r>
-              <a:rPr sz="1100" b="0">
-                <a:solidFill>
-                  <a:srgbClr val="475569"/>
+              <a:rPr sz="1300" b="0">
+                <a:solidFill>
+                  <a:srgbClr val="1F2937"/>
                 </a:solidFill>
                 <a:latin typeface="Calibri"/>
               </a:rPr>
@@ -6460,7 +6351,7 @@
           <a:noFill/>
         </p:spPr>
         <p:txBody>
-          <a:bodyPr wrap="square" anchor="ctr" lIns="0" rIns="0" tIns="0" bIns="0">
+          <a:bodyPr wrap="square" lIns="0" tIns="0" rIns="0" bIns="0" anchor="ctr">
             <a:spAutoFit/>
           </a:bodyPr>
           <a:lstStyle/>
@@ -6525,6 +6416,7 @@
           <a:lstStyle/>
           <a:p>
             <a:pPr algn="ctr"/>
+            <a:endParaRPr/>
           </a:p>
         </p:txBody>
       </p:sp>
@@ -6545,7 +6437,7 @@
           <a:noFill/>
         </p:spPr>
         <p:txBody>
-          <a:bodyPr wrap="square" anchor="t" lIns="0" rIns="0" tIns="0" bIns="0">
+          <a:bodyPr wrap="square" lIns="0" tIns="0" rIns="0" bIns="0" anchor="t">
             <a:spAutoFit/>
           </a:bodyPr>
           <a:lstStyle/>
@@ -6572,9 +6464,9 @@
               </a:spcAft>
             </a:pPr>
             <a:r>
-              <a:rPr sz="1100" b="0">
-                <a:solidFill>
-                  <a:srgbClr val="475569"/>
+              <a:rPr sz="1300" b="0">
+                <a:solidFill>
+                  <a:srgbClr val="1F2937"/>
                 </a:solidFill>
                 <a:latin typeface="Calibri"/>
               </a:rPr>
@@ -6600,7 +6492,7 @@
           <a:noFill/>
         </p:spPr>
         <p:txBody>
-          <a:bodyPr wrap="square" anchor="ctr" lIns="0" rIns="0" tIns="0" bIns="0">
+          <a:bodyPr wrap="square" lIns="0" tIns="0" rIns="0" bIns="0" anchor="ctr">
             <a:spAutoFit/>
           </a:bodyPr>
           <a:lstStyle/>
@@ -6665,6 +6557,7 @@
           <a:lstStyle/>
           <a:p>
             <a:pPr algn="ctr"/>
+            <a:endParaRPr/>
           </a:p>
         </p:txBody>
       </p:sp>
@@ -6685,7 +6578,7 @@
           <a:noFill/>
         </p:spPr>
         <p:txBody>
-          <a:bodyPr wrap="square" anchor="t" lIns="0" rIns="0" tIns="0" bIns="0">
+          <a:bodyPr wrap="square" lIns="0" tIns="0" rIns="0" bIns="0" anchor="t">
             <a:spAutoFit/>
           </a:bodyPr>
           <a:lstStyle/>
@@ -6712,9 +6605,9 @@
               </a:spcAft>
             </a:pPr>
             <a:r>
-              <a:rPr sz="1100" b="0">
-                <a:solidFill>
-                  <a:srgbClr val="475569"/>
+              <a:rPr sz="1300" b="0">
+                <a:solidFill>
+                  <a:srgbClr val="1F2937"/>
                 </a:solidFill>
                 <a:latin typeface="Calibri"/>
               </a:rPr>
@@ -6740,7 +6633,7 @@
           <a:noFill/>
         </p:spPr>
         <p:txBody>
-          <a:bodyPr wrap="square" anchor="t" lIns="0" rIns="0" tIns="0" bIns="0">
+          <a:bodyPr wrap="square" lIns="0" tIns="0" rIns="0" bIns="0" anchor="t">
             <a:spAutoFit/>
           </a:bodyPr>
           <a:lstStyle/>
@@ -6855,6 +6748,182 @@
               </a:rPr>
               <a:t>Docker Compose (tüm yığın) + Kubernetes / Kustomize / GKE; Caffeine in-memory cache.</a:t>
             </a:r>
+          </a:p>
+        </p:txBody>
+      </p:sp>
+      <p:sp>
+        <p:nvSpPr>
+          <p:cNvPr id="21" name="Rectangle 20"/>
+          <p:cNvSpPr/>
+          <p:nvPr/>
+        </p:nvSpPr>
+        <p:spPr>
+          <a:xfrm rot="2100000">
+            <a:off x="10835640" y="411480"/>
+            <a:ext cx="1280160" cy="457200"/>
+          </a:xfrm>
+          <a:prstGeom prst="rect">
+            <a:avLst/>
+          </a:prstGeom>
+          <a:solidFill>
+            <a:srgbClr val="1E3A8A"/>
+          </a:solidFill>
+          <a:ln>
+            <a:noFill/>
+          </a:ln>
+          <a:effectLst/>
+        </p:spPr>
+        <p:style>
+          <a:lnRef idx="1">
+            <a:schemeClr val="accent1"/>
+          </a:lnRef>
+          <a:fillRef idx="3">
+            <a:schemeClr val="accent1"/>
+          </a:fillRef>
+          <a:effectRef idx="2">
+            <a:schemeClr val="accent1"/>
+          </a:effectRef>
+          <a:fontRef idx="minor">
+            <a:schemeClr val="lt1"/>
+          </a:fontRef>
+        </p:style>
+        <p:txBody>
+          <a:bodyPr rtlCol="0" anchor="ctr"/>
+          <a:lstStyle/>
+          <a:p>
+            <a:pPr algn="ctr"/>
+          </a:p>
+        </p:txBody>
+      </p:sp>
+      <p:sp>
+        <p:nvSpPr>
+          <p:cNvPr id="22" name="Rectangle 21"/>
+          <p:cNvSpPr/>
+          <p:nvPr/>
+        </p:nvSpPr>
+        <p:spPr>
+          <a:xfrm rot="2100000">
+            <a:off x="11109960" y="274320"/>
+            <a:ext cx="1005840" cy="365760"/>
+          </a:xfrm>
+          <a:prstGeom prst="rect">
+            <a:avLst/>
+          </a:prstGeom>
+          <a:solidFill>
+            <a:srgbClr val="1D4ED8"/>
+          </a:solidFill>
+          <a:ln>
+            <a:noFill/>
+          </a:ln>
+          <a:effectLst/>
+        </p:spPr>
+        <p:style>
+          <a:lnRef idx="1">
+            <a:schemeClr val="accent1"/>
+          </a:lnRef>
+          <a:fillRef idx="3">
+            <a:schemeClr val="accent1"/>
+          </a:fillRef>
+          <a:effectRef idx="2">
+            <a:schemeClr val="accent1"/>
+          </a:effectRef>
+          <a:fontRef idx="minor">
+            <a:schemeClr val="lt1"/>
+          </a:fontRef>
+        </p:style>
+        <p:txBody>
+          <a:bodyPr rtlCol="0" anchor="ctr"/>
+          <a:lstStyle/>
+          <a:p>
+            <a:pPr algn="ctr"/>
+          </a:p>
+        </p:txBody>
+      </p:sp>
+      <p:sp>
+        <p:nvSpPr>
+          <p:cNvPr id="23" name="Rectangle 22"/>
+          <p:cNvSpPr/>
+          <p:nvPr/>
+        </p:nvSpPr>
+        <p:spPr>
+          <a:xfrm rot="2100000">
+            <a:off x="10835640" y="5989320"/>
+            <a:ext cx="1280160" cy="457200"/>
+          </a:xfrm>
+          <a:prstGeom prst="rect">
+            <a:avLst/>
+          </a:prstGeom>
+          <a:solidFill>
+            <a:srgbClr val="1E3A8A"/>
+          </a:solidFill>
+          <a:ln>
+            <a:noFill/>
+          </a:ln>
+          <a:effectLst/>
+        </p:spPr>
+        <p:style>
+          <a:lnRef idx="1">
+            <a:schemeClr val="accent1"/>
+          </a:lnRef>
+          <a:fillRef idx="3">
+            <a:schemeClr val="accent1"/>
+          </a:fillRef>
+          <a:effectRef idx="2">
+            <a:schemeClr val="accent1"/>
+          </a:effectRef>
+          <a:fontRef idx="minor">
+            <a:schemeClr val="lt1"/>
+          </a:fontRef>
+        </p:style>
+        <p:txBody>
+          <a:bodyPr rtlCol="0" anchor="ctr"/>
+          <a:lstStyle/>
+          <a:p>
+            <a:pPr algn="ctr"/>
+          </a:p>
+        </p:txBody>
+      </p:sp>
+      <p:sp>
+        <p:nvSpPr>
+          <p:cNvPr id="24" name="Rectangle 23"/>
+          <p:cNvSpPr/>
+          <p:nvPr/>
+        </p:nvSpPr>
+        <p:spPr>
+          <a:xfrm rot="2100000">
+            <a:off x="11109960" y="6199632"/>
+            <a:ext cx="1005840" cy="365760"/>
+          </a:xfrm>
+          <a:prstGeom prst="rect">
+            <a:avLst/>
+          </a:prstGeom>
+          <a:solidFill>
+            <a:srgbClr val="1D4ED8"/>
+          </a:solidFill>
+          <a:ln>
+            <a:noFill/>
+          </a:ln>
+          <a:effectLst/>
+        </p:spPr>
+        <p:style>
+          <a:lnRef idx="1">
+            <a:schemeClr val="accent1"/>
+          </a:lnRef>
+          <a:fillRef idx="3">
+            <a:schemeClr val="accent1"/>
+          </a:fillRef>
+          <a:effectRef idx="2">
+            <a:schemeClr val="accent1"/>
+          </a:effectRef>
+          <a:fontRef idx="minor">
+            <a:schemeClr val="lt1"/>
+          </a:fontRef>
+        </p:style>
+        <p:txBody>
+          <a:bodyPr rtlCol="0" anchor="ctr"/>
+          <a:lstStyle/>
+          <a:p>
+            <a:pPr algn="ctr"/>
           </a:p>
         </p:txBody>
       </p:sp>
@@ -6867,7 +6936,7 @@
 </file>
 
 <file path=ppt/slides/slide6.xml><?xml version="1.0" encoding="utf-8"?>
-<p:sld xmlns:a="http://schemas.openxmlformats.org/drawingml/2006/main" xmlns:p="http://schemas.openxmlformats.org/presentationml/2006/main" xmlns:r="http://schemas.openxmlformats.org/officeDocument/2006/relationships">
+<p:sld xmlns:a="http://schemas.openxmlformats.org/drawingml/2006/main" xmlns:r="http://schemas.openxmlformats.org/officeDocument/2006/relationships" xmlns:p="http://schemas.openxmlformats.org/presentationml/2006/main">
   <p:cSld>
     <p:spTree>
       <p:nvGrpSpPr>
@@ -6875,17 +6944,519 @@
         <p:cNvGrpSpPr/>
         <p:nvPr/>
       </p:nvGrpSpPr>
-      <p:grpSpPr/>
-      <p:sp>
-        <p:nvSpPr>
-          <p:cNvPr id="2" name="Rectangle 1"/>
+      <p:grpSpPr>
+        <a:xfrm>
+          <a:off x="0" y="0"/>
+          <a:ext cx="0" cy="0"/>
+          <a:chOff x="0" y="0"/>
+          <a:chExt cx="0" cy="0"/>
+        </a:xfrm>
+      </p:grpSpPr>
+      <p:sp>
+        <p:nvSpPr>
+          <p:cNvPr id="6" name="Rectangle 5"/>
           <p:cNvSpPr/>
           <p:nvPr/>
         </p:nvSpPr>
         <p:spPr>
+          <a:xfrm>
+            <a:off x="777240" y="548640"/>
+            <a:ext cx="146304" cy="868680"/>
+          </a:xfrm>
+          <a:prstGeom prst="rect">
+            <a:avLst/>
+          </a:prstGeom>
+          <a:solidFill>
+            <a:srgbClr val="1D4ED8"/>
+          </a:solidFill>
+          <a:ln>
+            <a:noFill/>
+          </a:ln>
+          <a:effectLst/>
+        </p:spPr>
+        <p:style>
+          <a:lnRef idx="1">
+            <a:schemeClr val="accent1"/>
+          </a:lnRef>
+          <a:fillRef idx="3">
+            <a:schemeClr val="accent1"/>
+          </a:fillRef>
+          <a:effectRef idx="2">
+            <a:schemeClr val="accent1"/>
+          </a:effectRef>
+          <a:fontRef idx="minor">
+            <a:schemeClr val="lt1"/>
+          </a:fontRef>
+        </p:style>
+        <p:txBody>
+          <a:bodyPr rtlCol="0" anchor="ctr"/>
+          <a:lstStyle/>
+          <a:p>
+            <a:pPr algn="ctr"/>
+            <a:endParaRPr/>
+          </a:p>
+        </p:txBody>
+      </p:sp>
+      <p:sp>
+        <p:nvSpPr>
+          <p:cNvPr id="7" name="TextBox 6"/>
+          <p:cNvSpPr txBox="1"/>
+          <p:nvPr/>
+        </p:nvSpPr>
+        <p:spPr>
+          <a:xfrm>
+            <a:off x="1051560" y="502920"/>
+            <a:ext cx="10241280" cy="1005840"/>
+          </a:xfrm>
+          <a:prstGeom prst="rect">
+            <a:avLst/>
+          </a:prstGeom>
+          <a:noFill/>
+        </p:spPr>
+        <p:txBody>
+          <a:bodyPr wrap="square" lIns="0" tIns="0" rIns="0" bIns="0" anchor="t">
+            <a:spAutoFit/>
+          </a:bodyPr>
+          <a:lstStyle/>
+          <a:p>
+            <a:pPr algn="l">
+              <a:spcAft>
+                <a:spcPts val="200"/>
+              </a:spcAft>
+            </a:pPr>
+            <a:r>
+              <a:rPr sz="3400" b="1">
+                <a:solidFill>
+                  <a:srgbClr val="1E3A8A"/>
+                </a:solidFill>
+                <a:latin typeface="Cambria"/>
+              </a:rPr>
+              <a:t>Karşılanan Proje İsterleri</a:t>
+            </a:r>
+          </a:p>
+          <a:p>
+            <a:pPr algn="l">
+              <a:spcAft>
+                <a:spcPts val="600"/>
+              </a:spcAft>
+            </a:pPr>
+            <a:r>
+              <a:rPr sz="1400" b="0">
+                <a:solidFill>
+                  <a:srgbClr val="475569"/>
+                </a:solidFill>
+                <a:latin typeface="Calibri"/>
+              </a:rPr>
+              <a:t>Zorunlu isterlerin tamamı uygulandı</a:t>
+            </a:r>
+          </a:p>
+        </p:txBody>
+      </p:sp>
+      <p:sp>
+        <p:nvSpPr>
+          <p:cNvPr id="8" name="Rectangle 7"/>
+          <p:cNvSpPr/>
+          <p:nvPr/>
+        </p:nvSpPr>
+        <p:spPr>
+          <a:xfrm>
+            <a:off x="1051560" y="1481328"/>
+            <a:ext cx="2926080" cy="45720"/>
+          </a:xfrm>
+          <a:prstGeom prst="rect">
+            <a:avLst/>
+          </a:prstGeom>
+          <a:solidFill>
+            <a:srgbClr val="DBEAFE"/>
+          </a:solidFill>
+          <a:ln>
+            <a:noFill/>
+          </a:ln>
+          <a:effectLst/>
+        </p:spPr>
+        <p:style>
+          <a:lnRef idx="1">
+            <a:schemeClr val="accent1"/>
+          </a:lnRef>
+          <a:fillRef idx="3">
+            <a:schemeClr val="accent1"/>
+          </a:fillRef>
+          <a:effectRef idx="2">
+            <a:schemeClr val="accent1"/>
+          </a:effectRef>
+          <a:fontRef idx="minor">
+            <a:schemeClr val="lt1"/>
+          </a:fontRef>
+        </p:style>
+        <p:txBody>
+          <a:bodyPr rtlCol="0" anchor="ctr"/>
+          <a:lstStyle/>
+          <a:p>
+            <a:pPr algn="ctr"/>
+            <a:endParaRPr/>
+          </a:p>
+        </p:txBody>
+      </p:sp>
+      <p:sp>
+        <p:nvSpPr>
+          <p:cNvPr id="9" name="TextBox 8"/>
+          <p:cNvSpPr txBox="1"/>
+          <p:nvPr/>
+        </p:nvSpPr>
+        <p:spPr>
+          <a:xfrm>
+            <a:off x="1051560" y="1874519"/>
+            <a:ext cx="5029200" cy="4206240"/>
+          </a:xfrm>
+          <a:prstGeom prst="rect">
+            <a:avLst/>
+          </a:prstGeom>
+          <a:noFill/>
+        </p:spPr>
+        <p:txBody>
+          <a:bodyPr wrap="square" lIns="0" tIns="0" rIns="0" bIns="0" anchor="t">
+            <a:spAutoFit/>
+          </a:bodyPr>
+          <a:lstStyle/>
+          <a:p>
+            <a:pPr algn="l">
+              <a:spcAft>
+                <a:spcPts val="100"/>
+              </a:spcAft>
+            </a:pPr>
+            <a:r>
+              <a:rPr sz="1500" b="1">
+                <a:solidFill>
+                  <a:srgbClr val="15803D"/>
+                </a:solidFill>
+                <a:latin typeface="Cambria"/>
+              </a:rPr>
+              <a:t>✓  Frontend</a:t>
+            </a:r>
+          </a:p>
+          <a:p>
+            <a:pPr algn="l">
+              <a:spcAft>
+                <a:spcPts val="900"/>
+              </a:spcAft>
+            </a:pPr>
+            <a:r>
+              <a:rPr sz="1250" b="0">
+                <a:solidFill>
+                  <a:srgbClr val="1F2937"/>
+                </a:solidFill>
+                <a:latin typeface="Calibri"/>
+              </a:rPr>
+              <a:t>     ReactJS</a:t>
+            </a:r>
+          </a:p>
+          <a:p>
+            <a:pPr algn="l">
+              <a:spcAft>
+                <a:spcPts val="100"/>
+              </a:spcAft>
+            </a:pPr>
+            <a:r>
+              <a:rPr sz="1500" b="1">
+                <a:solidFill>
+                  <a:srgbClr val="15803D"/>
+                </a:solidFill>
+                <a:latin typeface="Cambria"/>
+              </a:rPr>
+              <a:t>✓  Backend</a:t>
+            </a:r>
+          </a:p>
+          <a:p>
+            <a:pPr algn="l">
+              <a:spcAft>
+                <a:spcPts val="900"/>
+              </a:spcAft>
+            </a:pPr>
+            <a:r>
+              <a:rPr sz="1250" b="0">
+                <a:solidFill>
+                  <a:srgbClr val="1F2937"/>
+                </a:solidFill>
+                <a:latin typeface="Calibri"/>
+              </a:rPr>
+              <a:t>     Java 21 · Spring Boot 3.x · Log4j2</a:t>
+            </a:r>
+          </a:p>
+          <a:p>
+            <a:pPr algn="l">
+              <a:spcAft>
+                <a:spcPts val="100"/>
+              </a:spcAft>
+            </a:pPr>
+            <a:r>
+              <a:rPr sz="1500" b="1">
+                <a:solidFill>
+                  <a:srgbClr val="15803D"/>
+                </a:solidFill>
+                <a:latin typeface="Cambria"/>
+              </a:rPr>
+              <a:t>✓  Veri &amp; ORM</a:t>
+            </a:r>
+          </a:p>
+          <a:p>
+            <a:pPr algn="l">
+              <a:spcAft>
+                <a:spcPts val="900"/>
+              </a:spcAft>
+            </a:pPr>
+            <a:r>
+              <a:rPr sz="1250" b="0">
+                <a:solidFill>
+                  <a:srgbClr val="1F2937"/>
+                </a:solidFill>
+                <a:latin typeface="Calibri"/>
+              </a:rPr>
+              <a:t>     PostgreSQL · Spring Data JPA/Hibernate · Flyway</a:t>
+            </a:r>
+          </a:p>
+          <a:p>
+            <a:pPr algn="l">
+              <a:spcAft>
+                <a:spcPts val="100"/>
+              </a:spcAft>
+            </a:pPr>
+            <a:r>
+              <a:rPr sz="1500" b="1">
+                <a:solidFill>
+                  <a:srgbClr val="15803D"/>
+                </a:solidFill>
+                <a:latin typeface="Cambria"/>
+              </a:rPr>
+              <a:t>✓  Güvenlik</a:t>
+            </a:r>
+          </a:p>
+          <a:p>
+            <a:pPr algn="l">
+              <a:spcAft>
+                <a:spcPts val="900"/>
+              </a:spcAft>
+            </a:pPr>
+            <a:r>
+              <a:rPr sz="1250" b="0">
+                <a:solidFill>
+                  <a:srgbClr val="1F2937"/>
+                </a:solidFill>
+                <a:latin typeface="Calibri"/>
+              </a:rPr>
+              <a:t>     JWT + Keycloak · 2FA (TOTP)</a:t>
+            </a:r>
+          </a:p>
+          <a:p>
+            <a:pPr algn="l">
+              <a:spcAft>
+                <a:spcPts val="100"/>
+              </a:spcAft>
+            </a:pPr>
+            <a:r>
+              <a:rPr sz="1500" b="1">
+                <a:solidFill>
+                  <a:srgbClr val="15803D"/>
+                </a:solidFill>
+                <a:latin typeface="Cambria"/>
+              </a:rPr>
+              <a:t>✓  Gözlemlenebilirlik</a:t>
+            </a:r>
+          </a:p>
+          <a:p>
+            <a:pPr algn="l">
+              <a:spcAft>
+                <a:spcPts val="900"/>
+              </a:spcAft>
+            </a:pPr>
+            <a:r>
+              <a:rPr sz="1250" b="0">
+                <a:solidFill>
+                  <a:srgbClr val="1F2937"/>
+                </a:solidFill>
+                <a:latin typeface="Calibri"/>
+              </a:rPr>
+              <a:t>     OpenTelemetry · Grafana+Prometheus · OpenSearch</a:t>
+            </a:r>
+          </a:p>
+        </p:txBody>
+      </p:sp>
+      <p:sp>
+        <p:nvSpPr>
+          <p:cNvPr id="10" name="TextBox 9"/>
+          <p:cNvSpPr txBox="1"/>
+          <p:nvPr/>
+        </p:nvSpPr>
+        <p:spPr>
+          <a:xfrm>
+            <a:off x="6400800" y="1874519"/>
+            <a:ext cx="5029200" cy="4206240"/>
+          </a:xfrm>
+          <a:prstGeom prst="rect">
+            <a:avLst/>
+          </a:prstGeom>
+          <a:noFill/>
+        </p:spPr>
+        <p:txBody>
+          <a:bodyPr wrap="square" lIns="0" tIns="0" rIns="0" bIns="0" anchor="t">
+            <a:spAutoFit/>
+          </a:bodyPr>
+          <a:lstStyle/>
+          <a:p>
+            <a:pPr algn="l">
+              <a:spcAft>
+                <a:spcPts val="100"/>
+              </a:spcAft>
+            </a:pPr>
+            <a:r>
+              <a:rPr sz="1500" b="1">
+                <a:solidFill>
+                  <a:srgbClr val="15803D"/>
+                </a:solidFill>
+                <a:latin typeface="Cambria"/>
+              </a:rPr>
+              <a:t>✓  Log aktarımı</a:t>
+            </a:r>
+          </a:p>
+          <a:p>
+            <a:pPr algn="l">
+              <a:spcAft>
+                <a:spcPts val="900"/>
+              </a:spcAft>
+            </a:pPr>
+            <a:r>
+              <a:rPr sz="1250" b="0">
+                <a:solidFill>
+                  <a:srgbClr val="1F2937"/>
+                </a:solidFill>
+                <a:latin typeface="Calibri"/>
+              </a:rPr>
+              <a:t>     Kafka (log4j → Kafka → tüketici → OpenSearch)</a:t>
+            </a:r>
+          </a:p>
+          <a:p>
+            <a:pPr algn="l">
+              <a:spcAft>
+                <a:spcPts val="100"/>
+              </a:spcAft>
+            </a:pPr>
+            <a:r>
+              <a:rPr sz="1500" b="1">
+                <a:solidFill>
+                  <a:srgbClr val="15803D"/>
+                </a:solidFill>
+                <a:latin typeface="Cambria"/>
+              </a:rPr>
+              <a:t>✓  DevOps</a:t>
+            </a:r>
+          </a:p>
+          <a:p>
+            <a:pPr algn="l">
+              <a:spcAft>
+                <a:spcPts val="900"/>
+              </a:spcAft>
+            </a:pPr>
+            <a:r>
+              <a:rPr sz="1250" b="0">
+                <a:solidFill>
+                  <a:srgbClr val="1F2937"/>
+                </a:solidFill>
+                <a:latin typeface="Calibri"/>
+              </a:rPr>
+              <a:t>     Docker · Git (düzenli commit trafiği)</a:t>
+            </a:r>
+          </a:p>
+          <a:p>
+            <a:pPr algn="l">
+              <a:spcAft>
+                <a:spcPts val="100"/>
+              </a:spcAft>
+            </a:pPr>
+            <a:r>
+              <a:rPr sz="1500" b="1">
+                <a:solidFill>
+                  <a:srgbClr val="15803D"/>
+                </a:solidFill>
+                <a:latin typeface="Cambria"/>
+              </a:rPr>
+              <a:t>✓  Performans</a:t>
+            </a:r>
+          </a:p>
+          <a:p>
+            <a:pPr algn="l">
+              <a:spcAft>
+                <a:spcPts val="900"/>
+              </a:spcAft>
+            </a:pPr>
+            <a:r>
+              <a:rPr sz="1250" b="0">
+                <a:solidFill>
+                  <a:srgbClr val="1F2937"/>
+                </a:solidFill>
+                <a:latin typeface="Calibri"/>
+              </a:rPr>
+              <a:t>     Cache — Caffeine (in-memory)</a:t>
+            </a:r>
+          </a:p>
+          <a:p>
+            <a:pPr algn="l">
+              <a:spcAft>
+                <a:spcPts val="100"/>
+              </a:spcAft>
+            </a:pPr>
+            <a:r>
+              <a:rPr sz="1500" b="1">
+                <a:solidFill>
+                  <a:srgbClr val="15803D"/>
+                </a:solidFill>
+                <a:latin typeface="Cambria"/>
+              </a:rPr>
+              <a:t>✓  Dokümantasyon &amp; Kalite</a:t>
+            </a:r>
+          </a:p>
+          <a:p>
+            <a:pPr algn="l">
+              <a:spcAft>
+                <a:spcPts val="900"/>
+              </a:spcAft>
+            </a:pPr>
+            <a:r>
+              <a:rPr sz="1250" b="0">
+                <a:solidFill>
+                  <a:srgbClr val="1F2937"/>
+                </a:solidFill>
+                <a:latin typeface="Calibri"/>
+              </a:rPr>
+              <a:t>     REST /api/v1 versioning · OpenAPI/Swagger · Javadocs · README</a:t>
+            </a:r>
+          </a:p>
+          <a:p>
+            <a:pPr algn="l">
+              <a:spcAft>
+                <a:spcPts val="900"/>
+              </a:spcAft>
+            </a:pPr>
+            <a:r>
+              <a:rPr sz="1250" b="0">
+                <a:solidFill>
+                  <a:srgbClr val="1F2937"/>
+                </a:solidFill>
+                <a:latin typeface="Calibri"/>
+              </a:rPr>
+              <a:t>     Unit Test · Error Handling · Katmanlı Mimari / OOP</a:t>
+            </a:r>
+          </a:p>
+        </p:txBody>
+      </p:sp>
+      <p:sp>
+        <p:nvSpPr>
+          <p:cNvPr id="11" name="Rectangle 10"/>
+          <p:cNvSpPr/>
+          <p:nvPr/>
+        </p:nvSpPr>
+        <p:spPr>
           <a:xfrm rot="2100000">
-            <a:off x="11430000" y="-731520"/>
-            <a:ext cx="1920240" cy="1371600"/>
+            <a:off x="10835640" y="411480"/>
+            <a:ext cx="1280160" cy="457200"/>
           </a:xfrm>
           <a:prstGeom prst="rect">
             <a:avLst/>
@@ -6922,14 +7493,14 @@
       </p:sp>
       <p:sp>
         <p:nvSpPr>
-          <p:cNvPr id="3" name="Rectangle 2"/>
+          <p:cNvPr id="12" name="Rectangle 11"/>
           <p:cNvSpPr/>
           <p:nvPr/>
         </p:nvSpPr>
         <p:spPr>
           <a:xfrm rot="2100000">
-            <a:off x="11795760" y="-457200"/>
-            <a:ext cx="1645920" cy="1188720"/>
+            <a:off x="11109960" y="274320"/>
+            <a:ext cx="1005840" cy="365760"/>
           </a:xfrm>
           <a:prstGeom prst="rect">
             <a:avLst/>
@@ -6966,14 +7537,14 @@
       </p:sp>
       <p:sp>
         <p:nvSpPr>
-          <p:cNvPr id="4" name="Rectangle 3"/>
+          <p:cNvPr id="13" name="Rectangle 12"/>
           <p:cNvSpPr/>
           <p:nvPr/>
         </p:nvSpPr>
         <p:spPr>
           <a:xfrm rot="2100000">
-            <a:off x="11155680" y="6035040"/>
-            <a:ext cx="2377440" cy="1828800"/>
+            <a:off x="10835640" y="5989320"/>
+            <a:ext cx="1280160" cy="457200"/>
           </a:xfrm>
           <a:prstGeom prst="rect">
             <a:avLst/>
@@ -7010,14 +7581,14 @@
       </p:sp>
       <p:sp>
         <p:nvSpPr>
-          <p:cNvPr id="5" name="Rectangle 4"/>
+          <p:cNvPr id="14" name="Rectangle 13"/>
           <p:cNvSpPr/>
           <p:nvPr/>
         </p:nvSpPr>
         <p:spPr>
           <a:xfrm rot="2100000">
-            <a:off x="11521440" y="6400800"/>
-            <a:ext cx="2194560" cy="1645920"/>
+            <a:off x="11109960" y="6199632"/>
+            <a:ext cx="1005840" cy="365760"/>
           </a:xfrm>
           <a:prstGeom prst="rect">
             <a:avLst/>
@@ -7049,499 +7620,6 @@
           <a:lstStyle/>
           <a:p>
             <a:pPr algn="ctr"/>
-          </a:p>
-        </p:txBody>
-      </p:sp>
-      <p:sp>
-        <p:nvSpPr>
-          <p:cNvPr id="6" name="Rectangle 5"/>
-          <p:cNvSpPr/>
-          <p:nvPr/>
-        </p:nvSpPr>
-        <p:spPr>
-          <a:xfrm>
-            <a:off x="777240" y="548640"/>
-            <a:ext cx="146304" cy="868680"/>
-          </a:xfrm>
-          <a:prstGeom prst="rect">
-            <a:avLst/>
-          </a:prstGeom>
-          <a:solidFill>
-            <a:srgbClr val="1D4ED8"/>
-          </a:solidFill>
-          <a:ln>
-            <a:noFill/>
-          </a:ln>
-          <a:effectLst/>
-        </p:spPr>
-        <p:style>
-          <a:lnRef idx="1">
-            <a:schemeClr val="accent1"/>
-          </a:lnRef>
-          <a:fillRef idx="3">
-            <a:schemeClr val="accent1"/>
-          </a:fillRef>
-          <a:effectRef idx="2">
-            <a:schemeClr val="accent1"/>
-          </a:effectRef>
-          <a:fontRef idx="minor">
-            <a:schemeClr val="lt1"/>
-          </a:fontRef>
-        </p:style>
-        <p:txBody>
-          <a:bodyPr rtlCol="0" anchor="ctr"/>
-          <a:lstStyle/>
-          <a:p>
-            <a:pPr algn="ctr"/>
-          </a:p>
-        </p:txBody>
-      </p:sp>
-      <p:sp>
-        <p:nvSpPr>
-          <p:cNvPr id="7" name="TextBox 6"/>
-          <p:cNvSpPr txBox="1"/>
-          <p:nvPr/>
-        </p:nvSpPr>
-        <p:spPr>
-          <a:xfrm>
-            <a:off x="1051560" y="502920"/>
-            <a:ext cx="10241280" cy="1005840"/>
-          </a:xfrm>
-          <a:prstGeom prst="rect">
-            <a:avLst/>
-          </a:prstGeom>
-          <a:noFill/>
-        </p:spPr>
-        <p:txBody>
-          <a:bodyPr wrap="square" anchor="t" lIns="0" rIns="0" tIns="0" bIns="0">
-            <a:spAutoFit/>
-          </a:bodyPr>
-          <a:lstStyle/>
-          <a:p>
-            <a:pPr algn="l">
-              <a:spcAft>
-                <a:spcPts val="200"/>
-              </a:spcAft>
-            </a:pPr>
-            <a:r>
-              <a:rPr sz="3400" b="1">
-                <a:solidFill>
-                  <a:srgbClr val="1E3A8A"/>
-                </a:solidFill>
-                <a:latin typeface="Cambria"/>
-              </a:rPr>
-              <a:t>Karşılanan Proje İsterleri</a:t>
-            </a:r>
-          </a:p>
-          <a:p>
-            <a:pPr algn="l">
-              <a:spcAft>
-                <a:spcPts val="600"/>
-              </a:spcAft>
-            </a:pPr>
-            <a:r>
-              <a:rPr sz="1400" b="0">
-                <a:solidFill>
-                  <a:srgbClr val="475569"/>
-                </a:solidFill>
-                <a:latin typeface="Calibri"/>
-              </a:rPr>
-              <a:t>Zorunlu isterlerin tamamı uygulandı</a:t>
-            </a:r>
-          </a:p>
-        </p:txBody>
-      </p:sp>
-      <p:sp>
-        <p:nvSpPr>
-          <p:cNvPr id="8" name="Rectangle 7"/>
-          <p:cNvSpPr/>
-          <p:nvPr/>
-        </p:nvSpPr>
-        <p:spPr>
-          <a:xfrm>
-            <a:off x="1051560" y="1481328"/>
-            <a:ext cx="2926080" cy="45720"/>
-          </a:xfrm>
-          <a:prstGeom prst="rect">
-            <a:avLst/>
-          </a:prstGeom>
-          <a:solidFill>
-            <a:srgbClr val="DBEAFE"/>
-          </a:solidFill>
-          <a:ln>
-            <a:noFill/>
-          </a:ln>
-          <a:effectLst/>
-        </p:spPr>
-        <p:style>
-          <a:lnRef idx="1">
-            <a:schemeClr val="accent1"/>
-          </a:lnRef>
-          <a:fillRef idx="3">
-            <a:schemeClr val="accent1"/>
-          </a:fillRef>
-          <a:effectRef idx="2">
-            <a:schemeClr val="accent1"/>
-          </a:effectRef>
-          <a:fontRef idx="minor">
-            <a:schemeClr val="lt1"/>
-          </a:fontRef>
-        </p:style>
-        <p:txBody>
-          <a:bodyPr rtlCol="0" anchor="ctr"/>
-          <a:lstStyle/>
-          <a:p>
-            <a:pPr algn="ctr"/>
-          </a:p>
-        </p:txBody>
-      </p:sp>
-      <p:sp>
-        <p:nvSpPr>
-          <p:cNvPr id="9" name="TextBox 8"/>
-          <p:cNvSpPr txBox="1"/>
-          <p:nvPr/>
-        </p:nvSpPr>
-        <p:spPr>
-          <a:xfrm>
-            <a:off x="1051560" y="1874519"/>
-            <a:ext cx="5029200" cy="4206240"/>
-          </a:xfrm>
-          <a:prstGeom prst="rect">
-            <a:avLst/>
-          </a:prstGeom>
-          <a:noFill/>
-        </p:spPr>
-        <p:txBody>
-          <a:bodyPr wrap="square" anchor="t" lIns="0" rIns="0" tIns="0" bIns="0">
-            <a:spAutoFit/>
-          </a:bodyPr>
-          <a:lstStyle/>
-          <a:p>
-            <a:pPr algn="l">
-              <a:spcAft>
-                <a:spcPts val="100"/>
-              </a:spcAft>
-            </a:pPr>
-            <a:r>
-              <a:rPr sz="1500" b="1">
-                <a:solidFill>
-                  <a:srgbClr val="15803D"/>
-                </a:solidFill>
-                <a:latin typeface="Cambria"/>
-              </a:rPr>
-              <a:t>✓  Frontend</a:t>
-            </a:r>
-          </a:p>
-          <a:p>
-            <a:pPr algn="l">
-              <a:spcAft>
-                <a:spcPts val="900"/>
-              </a:spcAft>
-            </a:pPr>
-            <a:r>
-              <a:rPr sz="1250" b="0">
-                <a:solidFill>
-                  <a:srgbClr val="1F2937"/>
-                </a:solidFill>
-                <a:latin typeface="Calibri"/>
-              </a:rPr>
-              <a:t>     ReactJS</a:t>
-            </a:r>
-          </a:p>
-          <a:p>
-            <a:pPr algn="l">
-              <a:spcAft>
-                <a:spcPts val="100"/>
-              </a:spcAft>
-            </a:pPr>
-            <a:r>
-              <a:rPr sz="1500" b="1">
-                <a:solidFill>
-                  <a:srgbClr val="15803D"/>
-                </a:solidFill>
-                <a:latin typeface="Cambria"/>
-              </a:rPr>
-              <a:t>✓  Backend</a:t>
-            </a:r>
-          </a:p>
-          <a:p>
-            <a:pPr algn="l">
-              <a:spcAft>
-                <a:spcPts val="900"/>
-              </a:spcAft>
-            </a:pPr>
-            <a:r>
-              <a:rPr sz="1250" b="0">
-                <a:solidFill>
-                  <a:srgbClr val="1F2937"/>
-                </a:solidFill>
-                <a:latin typeface="Calibri"/>
-              </a:rPr>
-              <a:t>     Java 21 · Spring Boot 3.x · Log4j2</a:t>
-            </a:r>
-          </a:p>
-          <a:p>
-            <a:pPr algn="l">
-              <a:spcAft>
-                <a:spcPts val="100"/>
-              </a:spcAft>
-            </a:pPr>
-            <a:r>
-              <a:rPr sz="1500" b="1">
-                <a:solidFill>
-                  <a:srgbClr val="15803D"/>
-                </a:solidFill>
-                <a:latin typeface="Cambria"/>
-              </a:rPr>
-              <a:t>✓  Veri &amp; ORM</a:t>
-            </a:r>
-          </a:p>
-          <a:p>
-            <a:pPr algn="l">
-              <a:spcAft>
-                <a:spcPts val="900"/>
-              </a:spcAft>
-            </a:pPr>
-            <a:r>
-              <a:rPr sz="1250" b="0">
-                <a:solidFill>
-                  <a:srgbClr val="1F2937"/>
-                </a:solidFill>
-                <a:latin typeface="Calibri"/>
-              </a:rPr>
-              <a:t>     PostgreSQL · Spring Data JPA/Hibernate · Flyway</a:t>
-            </a:r>
-          </a:p>
-          <a:p>
-            <a:pPr algn="l">
-              <a:spcAft>
-                <a:spcPts val="100"/>
-              </a:spcAft>
-            </a:pPr>
-            <a:r>
-              <a:rPr sz="1500" b="1">
-                <a:solidFill>
-                  <a:srgbClr val="15803D"/>
-                </a:solidFill>
-                <a:latin typeface="Cambria"/>
-              </a:rPr>
-              <a:t>✓  Güvenlik</a:t>
-            </a:r>
-          </a:p>
-          <a:p>
-            <a:pPr algn="l">
-              <a:spcAft>
-                <a:spcPts val="900"/>
-              </a:spcAft>
-            </a:pPr>
-            <a:r>
-              <a:rPr sz="1250" b="0">
-                <a:solidFill>
-                  <a:srgbClr val="1F2937"/>
-                </a:solidFill>
-                <a:latin typeface="Calibri"/>
-              </a:rPr>
-              <a:t>     JWT + Keycloak · 2FA (TOTP)</a:t>
-            </a:r>
-          </a:p>
-          <a:p>
-            <a:pPr algn="l">
-              <a:spcAft>
-                <a:spcPts val="100"/>
-              </a:spcAft>
-            </a:pPr>
-            <a:r>
-              <a:rPr sz="1500" b="1">
-                <a:solidFill>
-                  <a:srgbClr val="15803D"/>
-                </a:solidFill>
-                <a:latin typeface="Cambria"/>
-              </a:rPr>
-              <a:t>✓  Gözlemlenebilirlik</a:t>
-            </a:r>
-          </a:p>
-          <a:p>
-            <a:pPr algn="l">
-              <a:spcAft>
-                <a:spcPts val="900"/>
-              </a:spcAft>
-            </a:pPr>
-            <a:r>
-              <a:rPr sz="1250" b="0">
-                <a:solidFill>
-                  <a:srgbClr val="1F2937"/>
-                </a:solidFill>
-                <a:latin typeface="Calibri"/>
-              </a:rPr>
-              <a:t>     OpenTelemetry · Grafana+Prometheus · OpenSearch</a:t>
-            </a:r>
-          </a:p>
-        </p:txBody>
-      </p:sp>
-      <p:sp>
-        <p:nvSpPr>
-          <p:cNvPr id="10" name="TextBox 9"/>
-          <p:cNvSpPr txBox="1"/>
-          <p:nvPr/>
-        </p:nvSpPr>
-        <p:spPr>
-          <a:xfrm>
-            <a:off x="6400800" y="1874519"/>
-            <a:ext cx="5029200" cy="4206240"/>
-          </a:xfrm>
-          <a:prstGeom prst="rect">
-            <a:avLst/>
-          </a:prstGeom>
-          <a:noFill/>
-        </p:spPr>
-        <p:txBody>
-          <a:bodyPr wrap="square" anchor="t" lIns="0" rIns="0" tIns="0" bIns="0">
-            <a:spAutoFit/>
-          </a:bodyPr>
-          <a:lstStyle/>
-          <a:p>
-            <a:pPr algn="l">
-              <a:spcAft>
-                <a:spcPts val="100"/>
-              </a:spcAft>
-            </a:pPr>
-            <a:r>
-              <a:rPr sz="1500" b="1">
-                <a:solidFill>
-                  <a:srgbClr val="15803D"/>
-                </a:solidFill>
-                <a:latin typeface="Cambria"/>
-              </a:rPr>
-              <a:t>✓  Log aktarımı</a:t>
-            </a:r>
-          </a:p>
-          <a:p>
-            <a:pPr algn="l">
-              <a:spcAft>
-                <a:spcPts val="900"/>
-              </a:spcAft>
-            </a:pPr>
-            <a:r>
-              <a:rPr sz="1250" b="0">
-                <a:solidFill>
-                  <a:srgbClr val="1F2937"/>
-                </a:solidFill>
-                <a:latin typeface="Calibri"/>
-              </a:rPr>
-              <a:t>     Kafka (log4j → Kafka → tüketici → OpenSearch)</a:t>
-            </a:r>
-          </a:p>
-          <a:p>
-            <a:pPr algn="l">
-              <a:spcAft>
-                <a:spcPts val="100"/>
-              </a:spcAft>
-            </a:pPr>
-            <a:r>
-              <a:rPr sz="1500" b="1">
-                <a:solidFill>
-                  <a:srgbClr val="15803D"/>
-                </a:solidFill>
-                <a:latin typeface="Cambria"/>
-              </a:rPr>
-              <a:t>✓  DevOps</a:t>
-            </a:r>
-          </a:p>
-          <a:p>
-            <a:pPr algn="l">
-              <a:spcAft>
-                <a:spcPts val="900"/>
-              </a:spcAft>
-            </a:pPr>
-            <a:r>
-              <a:rPr sz="1250" b="0">
-                <a:solidFill>
-                  <a:srgbClr val="1F2937"/>
-                </a:solidFill>
-                <a:latin typeface="Calibri"/>
-              </a:rPr>
-              <a:t>     Docker · Git (düzenli commit trafiği)</a:t>
-            </a:r>
-          </a:p>
-          <a:p>
-            <a:pPr algn="l">
-              <a:spcAft>
-                <a:spcPts val="100"/>
-              </a:spcAft>
-            </a:pPr>
-            <a:r>
-              <a:rPr sz="1500" b="1">
-                <a:solidFill>
-                  <a:srgbClr val="15803D"/>
-                </a:solidFill>
-                <a:latin typeface="Cambria"/>
-              </a:rPr>
-              <a:t>✓  Performans</a:t>
-            </a:r>
-          </a:p>
-          <a:p>
-            <a:pPr algn="l">
-              <a:spcAft>
-                <a:spcPts val="900"/>
-              </a:spcAft>
-            </a:pPr>
-            <a:r>
-              <a:rPr sz="1250" b="0">
-                <a:solidFill>
-                  <a:srgbClr val="1F2937"/>
-                </a:solidFill>
-                <a:latin typeface="Calibri"/>
-              </a:rPr>
-              <a:t>     Cache — Caffeine (in-memory)</a:t>
-            </a:r>
-          </a:p>
-          <a:p>
-            <a:pPr algn="l">
-              <a:spcAft>
-                <a:spcPts val="100"/>
-              </a:spcAft>
-            </a:pPr>
-            <a:r>
-              <a:rPr sz="1500" b="1">
-                <a:solidFill>
-                  <a:srgbClr val="15803D"/>
-                </a:solidFill>
-                <a:latin typeface="Cambria"/>
-              </a:rPr>
-              <a:t>✓  Dokümantasyon &amp; Kalite</a:t>
-            </a:r>
-          </a:p>
-          <a:p>
-            <a:pPr algn="l">
-              <a:spcAft>
-                <a:spcPts val="900"/>
-              </a:spcAft>
-            </a:pPr>
-            <a:r>
-              <a:rPr sz="1250" b="0">
-                <a:solidFill>
-                  <a:srgbClr val="1F2937"/>
-                </a:solidFill>
-                <a:latin typeface="Calibri"/>
-              </a:rPr>
-              <a:t>     REST /api/v1 versioning · OpenAPI/Swagger · Javadocs · README</a:t>
-            </a:r>
-          </a:p>
-          <a:p>
-            <a:pPr algn="l">
-              <a:spcAft>
-                <a:spcPts val="900"/>
-              </a:spcAft>
-            </a:pPr>
-            <a:r>
-              <a:rPr sz="1250" b="0">
-                <a:solidFill>
-                  <a:srgbClr val="1F2937"/>
-                </a:solidFill>
-                <a:latin typeface="Calibri"/>
-              </a:rPr>
-              <a:t>     Unit Test · Error Handling · Katmanlı Mimari / OOP</a:t>
-            </a:r>
           </a:p>
         </p:txBody>
       </p:sp>
@@ -7554,7 +7632,7 @@
 </file>
 
 <file path=ppt/slides/slide7.xml><?xml version="1.0" encoding="utf-8"?>
-<p:sld xmlns:a="http://schemas.openxmlformats.org/drawingml/2006/main" xmlns:p="http://schemas.openxmlformats.org/presentationml/2006/main" xmlns:r="http://schemas.openxmlformats.org/officeDocument/2006/relationships">
+<p:sld xmlns:a="http://schemas.openxmlformats.org/drawingml/2006/main" xmlns:r="http://schemas.openxmlformats.org/officeDocument/2006/relationships" xmlns:p="http://schemas.openxmlformats.org/presentationml/2006/main">
   <p:cSld>
     <p:spTree>
       <p:nvGrpSpPr>
@@ -7562,17 +7640,835 @@
         <p:cNvGrpSpPr/>
         <p:nvPr/>
       </p:nvGrpSpPr>
-      <p:grpSpPr/>
-      <p:sp>
-        <p:nvSpPr>
-          <p:cNvPr id="2" name="Rectangle 1"/>
+      <p:grpSpPr>
+        <a:xfrm>
+          <a:off x="0" y="0"/>
+          <a:ext cx="0" cy="0"/>
+          <a:chOff x="0" y="0"/>
+          <a:chExt cx="0" cy="0"/>
+        </a:xfrm>
+      </p:grpSpPr>
+      <p:sp>
+        <p:nvSpPr>
+          <p:cNvPr id="6" name="Rectangle 5"/>
           <p:cNvSpPr/>
           <p:nvPr/>
         </p:nvSpPr>
         <p:spPr>
+          <a:xfrm>
+            <a:off x="777240" y="548640"/>
+            <a:ext cx="146304" cy="868680"/>
+          </a:xfrm>
+          <a:prstGeom prst="rect">
+            <a:avLst/>
+          </a:prstGeom>
+          <a:solidFill>
+            <a:srgbClr val="1D4ED8"/>
+          </a:solidFill>
+          <a:ln>
+            <a:noFill/>
+          </a:ln>
+          <a:effectLst/>
+        </p:spPr>
+        <p:style>
+          <a:lnRef idx="1">
+            <a:schemeClr val="accent1"/>
+          </a:lnRef>
+          <a:fillRef idx="3">
+            <a:schemeClr val="accent1"/>
+          </a:fillRef>
+          <a:effectRef idx="2">
+            <a:schemeClr val="accent1"/>
+          </a:effectRef>
+          <a:fontRef idx="minor">
+            <a:schemeClr val="lt1"/>
+          </a:fontRef>
+        </p:style>
+        <p:txBody>
+          <a:bodyPr rtlCol="0" anchor="ctr"/>
+          <a:lstStyle/>
+          <a:p>
+            <a:pPr algn="ctr"/>
+            <a:endParaRPr/>
+          </a:p>
+        </p:txBody>
+      </p:sp>
+      <p:sp>
+        <p:nvSpPr>
+          <p:cNvPr id="7" name="TextBox 6"/>
+          <p:cNvSpPr txBox="1"/>
+          <p:nvPr/>
+        </p:nvSpPr>
+        <p:spPr>
+          <a:xfrm>
+            <a:off x="1051560" y="502920"/>
+            <a:ext cx="10241280" cy="1005840"/>
+          </a:xfrm>
+          <a:prstGeom prst="rect">
+            <a:avLst/>
+          </a:prstGeom>
+          <a:noFill/>
+        </p:spPr>
+        <p:txBody>
+          <a:bodyPr wrap="square" lIns="0" tIns="0" rIns="0" bIns="0" anchor="t">
+            <a:spAutoFit/>
+          </a:bodyPr>
+          <a:lstStyle/>
+          <a:p>
+            <a:pPr algn="l">
+              <a:spcAft>
+                <a:spcPts val="200"/>
+              </a:spcAft>
+            </a:pPr>
+            <a:r>
+              <a:rPr sz="3400" b="1">
+                <a:solidFill>
+                  <a:srgbClr val="1E3A8A"/>
+                </a:solidFill>
+                <a:latin typeface="Cambria"/>
+              </a:rPr>
+              <a:t>Ekstra Teknolojiler</a:t>
+            </a:r>
+          </a:p>
+          <a:p>
+            <a:pPr algn="l">
+              <a:spcAft>
+                <a:spcPts val="600"/>
+              </a:spcAft>
+            </a:pPr>
+            <a:r>
+              <a:rPr sz="1400" b="0">
+                <a:solidFill>
+                  <a:srgbClr val="475569"/>
+                </a:solidFill>
+                <a:latin typeface="Calibri"/>
+              </a:rPr>
+              <a:t>İsterlerin ötesinde eklediklerimiz</a:t>
+            </a:r>
+          </a:p>
+        </p:txBody>
+      </p:sp>
+      <p:sp>
+        <p:nvSpPr>
+          <p:cNvPr id="8" name="Rectangle 7"/>
+          <p:cNvSpPr/>
+          <p:nvPr/>
+        </p:nvSpPr>
+        <p:spPr>
+          <a:xfrm>
+            <a:off x="1051560" y="1481328"/>
+            <a:ext cx="2926080" cy="45720"/>
+          </a:xfrm>
+          <a:prstGeom prst="rect">
+            <a:avLst/>
+          </a:prstGeom>
+          <a:solidFill>
+            <a:srgbClr val="DBEAFE"/>
+          </a:solidFill>
+          <a:ln>
+            <a:noFill/>
+          </a:ln>
+          <a:effectLst/>
+        </p:spPr>
+        <p:style>
+          <a:lnRef idx="1">
+            <a:schemeClr val="accent1"/>
+          </a:lnRef>
+          <a:fillRef idx="3">
+            <a:schemeClr val="accent1"/>
+          </a:fillRef>
+          <a:effectRef idx="2">
+            <a:schemeClr val="accent1"/>
+          </a:effectRef>
+          <a:fontRef idx="minor">
+            <a:schemeClr val="lt1"/>
+          </a:fontRef>
+        </p:style>
+        <p:txBody>
+          <a:bodyPr rtlCol="0" anchor="ctr"/>
+          <a:lstStyle/>
+          <a:p>
+            <a:pPr algn="ctr"/>
+            <a:endParaRPr/>
+          </a:p>
+        </p:txBody>
+      </p:sp>
+      <p:sp>
+        <p:nvSpPr>
+          <p:cNvPr id="9" name="TextBox 8"/>
+          <p:cNvSpPr txBox="1"/>
+          <p:nvPr/>
+        </p:nvSpPr>
+        <p:spPr>
+          <a:xfrm>
+            <a:off x="1051560" y="1874519"/>
+            <a:ext cx="5074920" cy="4389120"/>
+          </a:xfrm>
+          <a:prstGeom prst="rect">
+            <a:avLst/>
+          </a:prstGeom>
+          <a:noFill/>
+        </p:spPr>
+        <p:txBody>
+          <a:bodyPr wrap="square" lIns="0" tIns="0" rIns="0" bIns="0" anchor="t">
+            <a:spAutoFit/>
+          </a:bodyPr>
+          <a:lstStyle/>
+          <a:p>
+            <a:pPr algn="l">
+              <a:spcAft>
+                <a:spcPts val="100"/>
+              </a:spcAft>
+            </a:pPr>
+            <a:r>
+              <a:rPr sz="1400" b="1">
+                <a:solidFill>
+                  <a:srgbClr val="1E3A8A"/>
+                </a:solidFill>
+                <a:latin typeface="Cambria"/>
+              </a:rPr>
+              <a:t>▸  Kubernetes · Kustomize · GKE</a:t>
+            </a:r>
+          </a:p>
+          <a:p>
+            <a:pPr algn="l">
+              <a:spcAft>
+                <a:spcPts val="900"/>
+              </a:spcAft>
+            </a:pPr>
+            <a:r>
+              <a:rPr sz="1150" b="0">
+                <a:solidFill>
+                  <a:srgbClr val="475569"/>
+                </a:solidFill>
+                <a:latin typeface="Calibri"/>
+              </a:rPr>
+              <a:t>     Docker'ın ötesinde üretim orkestrasyonu (WIF ile anahtarsız deploy)</a:t>
+            </a:r>
+          </a:p>
+          <a:p>
+            <a:pPr algn="l">
+              <a:spcAft>
+                <a:spcPts val="100"/>
+              </a:spcAft>
+            </a:pPr>
+            <a:r>
+              <a:rPr sz="1400" b="1">
+                <a:solidFill>
+                  <a:srgbClr val="1E3A8A"/>
+                </a:solidFill>
+                <a:latin typeface="Cambria"/>
+              </a:rPr>
+              <a:t>▸  GitHub Actions CI/CD</a:t>
+            </a:r>
+          </a:p>
+          <a:p>
+            <a:pPr algn="l">
+              <a:spcAft>
+                <a:spcPts val="900"/>
+              </a:spcAft>
+            </a:pPr>
+            <a:r>
+              <a:rPr sz="1150" b="0">
+                <a:solidFill>
+                  <a:srgbClr val="475569"/>
+                </a:solidFill>
+                <a:latin typeface="Calibri"/>
+              </a:rPr>
+              <a:t>     Otomatik build, test ve dağıtım hattı</a:t>
+            </a:r>
+          </a:p>
+          <a:p>
+            <a:pPr algn="l">
+              <a:spcAft>
+                <a:spcPts val="100"/>
+              </a:spcAft>
+            </a:pPr>
+            <a:r>
+              <a:rPr sz="1400" b="1">
+                <a:solidFill>
+                  <a:srgbClr val="1E3A8A"/>
+                </a:solidFill>
+                <a:latin typeface="Cambria"/>
+              </a:rPr>
+              <a:t>▸  SonarCloud + JaCoCo</a:t>
+            </a:r>
+          </a:p>
+          <a:p>
+            <a:pPr algn="l">
+              <a:spcAft>
+                <a:spcPts val="900"/>
+              </a:spcAft>
+            </a:pPr>
+            <a:r>
+              <a:rPr sz="1150" b="0">
+                <a:solidFill>
+                  <a:srgbClr val="475569"/>
+                </a:solidFill>
+                <a:latin typeface="Calibri"/>
+              </a:rPr>
+              <a:t>     Kod kalite kapıları + test kapsamı ölçümü</a:t>
+            </a:r>
+          </a:p>
+          <a:p>
+            <a:pPr algn="l">
+              <a:spcAft>
+                <a:spcPts val="100"/>
+              </a:spcAft>
+            </a:pPr>
+            <a:r>
+              <a:rPr sz="1400" b="1">
+                <a:solidFill>
+                  <a:srgbClr val="1E3A8A"/>
+                </a:solidFill>
+                <a:latin typeface="Cambria"/>
+              </a:rPr>
+              <a:t>▸  Jaeger</a:t>
+            </a:r>
+          </a:p>
+          <a:p>
+            <a:pPr algn="l">
+              <a:spcAft>
+                <a:spcPts val="900"/>
+              </a:spcAft>
+            </a:pPr>
+            <a:r>
+              <a:rPr sz="1150" b="0">
+                <a:solidFill>
+                  <a:srgbClr val="475569"/>
+                </a:solidFill>
+                <a:latin typeface="Calibri"/>
+              </a:rPr>
+              <a:t>     Dağıtık iz (trace) görüntüleme — OTel ile</a:t>
+            </a:r>
+          </a:p>
+          <a:p>
+            <a:pPr algn="l">
+              <a:spcAft>
+                <a:spcPts val="100"/>
+              </a:spcAft>
+            </a:pPr>
+            <a:r>
+              <a:rPr sz="1400" b="1">
+                <a:solidFill>
+                  <a:srgbClr val="1E3A8A"/>
+                </a:solidFill>
+                <a:latin typeface="Cambria"/>
+              </a:rPr>
+              <a:t>▸  ShedLock</a:t>
+            </a:r>
+          </a:p>
+          <a:p>
+            <a:pPr algn="l">
+              <a:spcAft>
+                <a:spcPts val="900"/>
+              </a:spcAft>
+            </a:pPr>
+            <a:r>
+              <a:rPr sz="1150" b="0">
+                <a:solidFill>
+                  <a:srgbClr val="475569"/>
+                </a:solidFill>
+                <a:latin typeface="Calibri"/>
+              </a:rPr>
+              <a:t>     Dağıtık zamanlayıcı kilidi (çok-replika güvenliği)</a:t>
+            </a:r>
+          </a:p>
+          <a:p>
+            <a:pPr algn="l">
+              <a:spcAft>
+                <a:spcPts val="100"/>
+              </a:spcAft>
+            </a:pPr>
+            <a:r>
+              <a:rPr sz="1400" b="1">
+                <a:solidFill>
+                  <a:srgbClr val="1E3A8A"/>
+                </a:solidFill>
+                <a:latin typeface="Cambria"/>
+              </a:rPr>
+              <a:t>▸  LLM / Yapay zeka danışman</a:t>
+            </a:r>
+          </a:p>
+          <a:p>
+            <a:pPr algn="l">
+              <a:spcAft>
+                <a:spcPts val="900"/>
+              </a:spcAft>
+            </a:pPr>
+            <a:r>
+              <a:rPr sz="1150" b="0">
+                <a:solidFill>
+                  <a:srgbClr val="475569"/>
+                </a:solidFill>
+                <a:latin typeface="Calibri"/>
+              </a:rPr>
+              <a:t>     OpenAI-uyumlu (Groq) sohbet asistanı</a:t>
+            </a:r>
+          </a:p>
+        </p:txBody>
+      </p:sp>
+      <p:sp>
+        <p:nvSpPr>
+          <p:cNvPr id="10" name="TextBox 9"/>
+          <p:cNvSpPr txBox="1"/>
+          <p:nvPr/>
+        </p:nvSpPr>
+        <p:spPr>
+          <a:xfrm>
+            <a:off x="6400800" y="1874519"/>
+            <a:ext cx="5074920" cy="1967205"/>
+          </a:xfrm>
+          <a:prstGeom prst="rect">
+            <a:avLst/>
+          </a:prstGeom>
+          <a:noFill/>
+        </p:spPr>
+        <p:txBody>
+          <a:bodyPr wrap="square" lIns="0" tIns="0" rIns="0" bIns="0" anchor="t">
+            <a:spAutoFit/>
+          </a:bodyPr>
+          <a:lstStyle/>
+          <a:p>
+            <a:pPr algn="l">
+              <a:spcAft>
+                <a:spcPts val="100"/>
+              </a:spcAft>
+            </a:pPr>
+            <a:r>
+              <a:rPr sz="1400" b="1" dirty="0">
+                <a:solidFill>
+                  <a:srgbClr val="1E3A8A"/>
+                </a:solidFill>
+                <a:latin typeface="Cambria"/>
+              </a:rPr>
+              <a:t>▸  </a:t>
+            </a:r>
+            <a:r>
+              <a:rPr sz="1400" b="1" dirty="0" err="1">
+                <a:solidFill>
+                  <a:srgbClr val="1E3A8A"/>
+                </a:solidFill>
+                <a:latin typeface="Cambria"/>
+              </a:rPr>
+              <a:t>LibreTranslate</a:t>
+            </a:r>
+            <a:endParaRPr sz="1400" b="1" dirty="0">
+              <a:solidFill>
+                <a:srgbClr val="1E3A8A"/>
+              </a:solidFill>
+              <a:latin typeface="Cambria"/>
+            </a:endParaRPr>
+          </a:p>
+          <a:p>
+            <a:pPr algn="l">
+              <a:spcAft>
+                <a:spcPts val="900"/>
+              </a:spcAft>
+            </a:pPr>
+            <a:r>
+              <a:rPr sz="1150" b="0" dirty="0">
+                <a:solidFill>
+                  <a:srgbClr val="475569"/>
+                </a:solidFill>
+                <a:latin typeface="Calibri"/>
+              </a:rPr>
+              <a:t>     Self-hosted TR↔EN </a:t>
+            </a:r>
+            <a:r>
+              <a:rPr sz="1150" b="0" dirty="0" err="1">
+                <a:solidFill>
+                  <a:srgbClr val="475569"/>
+                </a:solidFill>
+                <a:latin typeface="Calibri"/>
+              </a:rPr>
+              <a:t>haber</a:t>
+            </a:r>
+            <a:r>
+              <a:rPr sz="1150" b="0" dirty="0">
+                <a:solidFill>
+                  <a:srgbClr val="475569"/>
+                </a:solidFill>
+                <a:latin typeface="Calibri"/>
+              </a:rPr>
+              <a:t> </a:t>
+            </a:r>
+            <a:r>
+              <a:rPr sz="1150" b="0" dirty="0" err="1">
+                <a:solidFill>
+                  <a:srgbClr val="475569"/>
+                </a:solidFill>
+                <a:latin typeface="Calibri"/>
+              </a:rPr>
+              <a:t>çevirisi</a:t>
+            </a:r>
+            <a:endParaRPr sz="1150" b="0" dirty="0">
+              <a:solidFill>
+                <a:srgbClr val="475569"/>
+              </a:solidFill>
+              <a:latin typeface="Calibri"/>
+            </a:endParaRPr>
+          </a:p>
+          <a:p>
+            <a:pPr algn="l">
+              <a:spcAft>
+                <a:spcPts val="100"/>
+              </a:spcAft>
+            </a:pPr>
+            <a:r>
+              <a:rPr sz="1400" b="1" dirty="0">
+                <a:solidFill>
+                  <a:srgbClr val="1E3A8A"/>
+                </a:solidFill>
+                <a:latin typeface="Cambria"/>
+              </a:rPr>
+              <a:t>▸  </a:t>
+            </a:r>
+            <a:r>
+              <a:rPr sz="1400" b="1" dirty="0" err="1">
+                <a:solidFill>
+                  <a:srgbClr val="1E3A8A"/>
+                </a:solidFill>
+                <a:latin typeface="Cambria"/>
+              </a:rPr>
+              <a:t>OpenLDAP</a:t>
+            </a:r>
+            <a:endParaRPr sz="1400" b="1" dirty="0">
+              <a:solidFill>
+                <a:srgbClr val="1E3A8A"/>
+              </a:solidFill>
+              <a:latin typeface="Cambria"/>
+            </a:endParaRPr>
+          </a:p>
+          <a:p>
+            <a:pPr algn="l">
+              <a:spcAft>
+                <a:spcPts val="900"/>
+              </a:spcAft>
+            </a:pPr>
+            <a:r>
+              <a:rPr sz="1150" b="0" dirty="0">
+                <a:solidFill>
+                  <a:srgbClr val="475569"/>
+                </a:solidFill>
+                <a:latin typeface="Calibri"/>
+              </a:rPr>
+              <a:t>     </a:t>
+            </a:r>
+            <a:r>
+              <a:rPr sz="1150" b="0" dirty="0" err="1">
+                <a:solidFill>
+                  <a:srgbClr val="475569"/>
+                </a:solidFill>
+                <a:latin typeface="Calibri"/>
+              </a:rPr>
+              <a:t>Keycloak</a:t>
+            </a:r>
+            <a:r>
+              <a:rPr sz="1150" b="0" dirty="0">
+                <a:solidFill>
+                  <a:srgbClr val="475569"/>
+                </a:solidFill>
+                <a:latin typeface="Calibri"/>
+              </a:rPr>
+              <a:t> </a:t>
+            </a:r>
+            <a:r>
+              <a:rPr sz="1150" b="0" dirty="0" err="1">
+                <a:solidFill>
+                  <a:srgbClr val="475569"/>
+                </a:solidFill>
+                <a:latin typeface="Calibri"/>
+              </a:rPr>
+              <a:t>kullanıcı</a:t>
+            </a:r>
+            <a:r>
+              <a:rPr sz="1150" b="0" dirty="0">
+                <a:solidFill>
+                  <a:srgbClr val="475569"/>
+                </a:solidFill>
+                <a:latin typeface="Calibri"/>
+              </a:rPr>
+              <a:t> </a:t>
+            </a:r>
+            <a:r>
+              <a:rPr sz="1150" b="0" dirty="0" err="1">
+                <a:solidFill>
+                  <a:srgbClr val="475569"/>
+                </a:solidFill>
+                <a:latin typeface="Calibri"/>
+              </a:rPr>
+              <a:t>federasyonu</a:t>
+            </a:r>
+            <a:endParaRPr sz="1150" b="0" dirty="0">
+              <a:solidFill>
+                <a:srgbClr val="475569"/>
+              </a:solidFill>
+              <a:latin typeface="Calibri"/>
+            </a:endParaRPr>
+          </a:p>
+          <a:p>
+            <a:pPr algn="l">
+              <a:spcAft>
+                <a:spcPts val="100"/>
+              </a:spcAft>
+            </a:pPr>
+            <a:r>
+              <a:rPr sz="1400" b="1" dirty="0">
+                <a:solidFill>
+                  <a:srgbClr val="1E3A8A"/>
+                </a:solidFill>
+                <a:latin typeface="Cambria"/>
+              </a:rPr>
+              <a:t>▸  Spring Mail + </a:t>
+            </a:r>
+            <a:r>
+              <a:rPr sz="1400" b="1" dirty="0" err="1">
+                <a:solidFill>
+                  <a:srgbClr val="1E3A8A"/>
+                </a:solidFill>
+                <a:latin typeface="Cambria"/>
+              </a:rPr>
+              <a:t>Mailpit</a:t>
+            </a:r>
+            <a:endParaRPr sz="1400" b="1" dirty="0">
+              <a:solidFill>
+                <a:srgbClr val="1E3A8A"/>
+              </a:solidFill>
+              <a:latin typeface="Cambria"/>
+            </a:endParaRPr>
+          </a:p>
+          <a:p>
+            <a:pPr algn="l">
+              <a:spcAft>
+                <a:spcPts val="900"/>
+              </a:spcAft>
+            </a:pPr>
+            <a:r>
+              <a:rPr sz="1150" b="0" dirty="0">
+                <a:solidFill>
+                  <a:srgbClr val="475569"/>
+                </a:solidFill>
+                <a:latin typeface="Calibri"/>
+              </a:rPr>
+              <a:t>     E-</a:t>
+            </a:r>
+            <a:r>
+              <a:rPr sz="1150" b="0" dirty="0" err="1">
+                <a:solidFill>
+                  <a:srgbClr val="475569"/>
+                </a:solidFill>
+                <a:latin typeface="Calibri"/>
+              </a:rPr>
+              <a:t>posta</a:t>
+            </a:r>
+            <a:r>
+              <a:rPr sz="1150" b="0" dirty="0">
+                <a:solidFill>
+                  <a:srgbClr val="475569"/>
+                </a:solidFill>
+                <a:latin typeface="Calibri"/>
+              </a:rPr>
+              <a:t> </a:t>
+            </a:r>
+            <a:r>
+              <a:rPr sz="1150" b="0" dirty="0" err="1">
+                <a:solidFill>
+                  <a:srgbClr val="475569"/>
+                </a:solidFill>
+                <a:latin typeface="Calibri"/>
+              </a:rPr>
+              <a:t>fiyat</a:t>
+            </a:r>
+            <a:r>
+              <a:rPr sz="1150" b="0" dirty="0">
+                <a:solidFill>
+                  <a:srgbClr val="475569"/>
+                </a:solidFill>
+                <a:latin typeface="Calibri"/>
+              </a:rPr>
+              <a:t> </a:t>
+            </a:r>
+            <a:r>
+              <a:rPr sz="1150" b="0" dirty="0" err="1">
+                <a:solidFill>
+                  <a:srgbClr val="475569"/>
+                </a:solidFill>
+                <a:latin typeface="Calibri"/>
+              </a:rPr>
+              <a:t>alarmı</a:t>
+            </a:r>
+            <a:r>
+              <a:rPr sz="1150" b="0" dirty="0">
+                <a:solidFill>
+                  <a:srgbClr val="475569"/>
+                </a:solidFill>
+                <a:latin typeface="Calibri"/>
+              </a:rPr>
+              <a:t> </a:t>
+            </a:r>
+            <a:r>
+              <a:rPr sz="1150" b="0" dirty="0" err="1">
+                <a:solidFill>
+                  <a:srgbClr val="475569"/>
+                </a:solidFill>
+                <a:latin typeface="Calibri"/>
+              </a:rPr>
+              <a:t>bildirimleri</a:t>
+            </a:r>
+            <a:endParaRPr sz="1150" b="0" dirty="0">
+              <a:solidFill>
+                <a:srgbClr val="475569"/>
+              </a:solidFill>
+              <a:latin typeface="Calibri"/>
+            </a:endParaRPr>
+          </a:p>
+          <a:p>
+            <a:pPr algn="l">
+              <a:spcAft>
+                <a:spcPts val="100"/>
+              </a:spcAft>
+            </a:pPr>
+            <a:r>
+              <a:rPr sz="1400" b="1" dirty="0">
+                <a:solidFill>
+                  <a:srgbClr val="1E3A8A"/>
+                </a:solidFill>
+                <a:latin typeface="Cambria"/>
+              </a:rPr>
+              <a:t>▸  Apache POI + </a:t>
+            </a:r>
+            <a:r>
+              <a:rPr sz="1400" b="1" dirty="0" err="1">
+                <a:solidFill>
+                  <a:srgbClr val="1E3A8A"/>
+                </a:solidFill>
+                <a:latin typeface="Cambria"/>
+              </a:rPr>
+              <a:t>SheetJS</a:t>
+            </a:r>
+            <a:endParaRPr sz="1400" b="1" dirty="0">
+              <a:solidFill>
+                <a:srgbClr val="1E3A8A"/>
+              </a:solidFill>
+              <a:latin typeface="Cambria"/>
+            </a:endParaRPr>
+          </a:p>
+          <a:p>
+            <a:pPr algn="l">
+              <a:spcAft>
+                <a:spcPts val="900"/>
+              </a:spcAft>
+            </a:pPr>
+            <a:r>
+              <a:rPr sz="1150" b="0" dirty="0">
+                <a:solidFill>
+                  <a:srgbClr val="475569"/>
+                </a:solidFill>
+                <a:latin typeface="Calibri"/>
+              </a:rPr>
+              <a:t>     Excel </a:t>
+            </a:r>
+            <a:r>
+              <a:rPr sz="1150" b="0" dirty="0" err="1">
+                <a:solidFill>
+                  <a:srgbClr val="475569"/>
+                </a:solidFill>
+                <a:latin typeface="Calibri"/>
+              </a:rPr>
+              <a:t>ile</a:t>
+            </a:r>
+            <a:r>
+              <a:rPr sz="1150" b="0" dirty="0">
+                <a:solidFill>
+                  <a:srgbClr val="475569"/>
+                </a:solidFill>
+                <a:latin typeface="Calibri"/>
+              </a:rPr>
+              <a:t> </a:t>
+            </a:r>
+            <a:r>
+              <a:rPr sz="1150" b="0" dirty="0" err="1">
+                <a:solidFill>
+                  <a:srgbClr val="475569"/>
+                </a:solidFill>
+                <a:latin typeface="Calibri"/>
+              </a:rPr>
+              <a:t>portföy</a:t>
+            </a:r>
+            <a:r>
+              <a:rPr sz="1150" b="0" dirty="0">
+                <a:solidFill>
+                  <a:srgbClr val="475569"/>
+                </a:solidFill>
+                <a:latin typeface="Calibri"/>
+              </a:rPr>
+              <a:t> </a:t>
+            </a:r>
+            <a:r>
+              <a:rPr sz="1150" b="0" dirty="0" err="1">
+                <a:solidFill>
+                  <a:srgbClr val="475569"/>
+                </a:solidFill>
+                <a:latin typeface="Calibri"/>
+              </a:rPr>
+              <a:t>içe</a:t>
+            </a:r>
+            <a:r>
+              <a:rPr sz="1150" b="0" dirty="0">
+                <a:solidFill>
+                  <a:srgbClr val="475569"/>
+                </a:solidFill>
+                <a:latin typeface="Calibri"/>
+              </a:rPr>
+              <a:t>/</a:t>
+            </a:r>
+            <a:r>
+              <a:rPr sz="1150" b="0" dirty="0" err="1">
+                <a:solidFill>
+                  <a:srgbClr val="475569"/>
+                </a:solidFill>
+                <a:latin typeface="Calibri"/>
+              </a:rPr>
+              <a:t>dışa</a:t>
+            </a:r>
+            <a:r>
+              <a:rPr sz="1150" b="0" dirty="0">
+                <a:solidFill>
+                  <a:srgbClr val="475569"/>
+                </a:solidFill>
+                <a:latin typeface="Calibri"/>
+              </a:rPr>
+              <a:t> </a:t>
+            </a:r>
+            <a:r>
+              <a:rPr sz="1150" b="0" dirty="0" err="1">
+                <a:solidFill>
+                  <a:srgbClr val="475569"/>
+                </a:solidFill>
+                <a:latin typeface="Calibri"/>
+              </a:rPr>
+              <a:t>aktarma</a:t>
+            </a:r>
+            <a:endParaRPr sz="1150" b="0" dirty="0">
+              <a:solidFill>
+                <a:srgbClr val="475569"/>
+              </a:solidFill>
+              <a:latin typeface="Calibri"/>
+            </a:endParaRPr>
+          </a:p>
+        </p:txBody>
+      </p:sp>
+      <p:sp>
+        <p:nvSpPr>
+          <p:cNvPr id="11" name="Rectangle 10"/>
+          <p:cNvSpPr/>
+          <p:nvPr/>
+        </p:nvSpPr>
+        <p:spPr>
           <a:xfrm rot="2100000">
-            <a:off x="11430000" y="-731520"/>
-            <a:ext cx="1920240" cy="1371600"/>
+            <a:off x="10835640" y="411480"/>
+            <a:ext cx="1280160" cy="457200"/>
           </a:xfrm>
           <a:prstGeom prst="rect">
             <a:avLst/>
@@ -7609,14 +8505,14 @@
       </p:sp>
       <p:sp>
         <p:nvSpPr>
-          <p:cNvPr id="3" name="Rectangle 2"/>
+          <p:cNvPr id="12" name="Rectangle 11"/>
           <p:cNvSpPr/>
           <p:nvPr/>
         </p:nvSpPr>
         <p:spPr>
           <a:xfrm rot="2100000">
-            <a:off x="11795760" y="-457200"/>
-            <a:ext cx="1645920" cy="1188720"/>
+            <a:off x="11109960" y="274320"/>
+            <a:ext cx="1005840" cy="365760"/>
           </a:xfrm>
           <a:prstGeom prst="rect">
             <a:avLst/>
@@ -7653,14 +8549,14 @@
       </p:sp>
       <p:sp>
         <p:nvSpPr>
-          <p:cNvPr id="4" name="Rectangle 3"/>
+          <p:cNvPr id="13" name="Rectangle 12"/>
           <p:cNvSpPr/>
           <p:nvPr/>
         </p:nvSpPr>
         <p:spPr>
           <a:xfrm rot="2100000">
-            <a:off x="11155680" y="6035040"/>
-            <a:ext cx="2377440" cy="1828800"/>
+            <a:off x="10835640" y="5989320"/>
+            <a:ext cx="1280160" cy="457200"/>
           </a:xfrm>
           <a:prstGeom prst="rect">
             <a:avLst/>
@@ -7697,14 +8593,14 @@
       </p:sp>
       <p:sp>
         <p:nvSpPr>
-          <p:cNvPr id="5" name="Rectangle 4"/>
+          <p:cNvPr id="14" name="Rectangle 13"/>
           <p:cNvSpPr/>
           <p:nvPr/>
         </p:nvSpPr>
         <p:spPr>
           <a:xfrm rot="2100000">
-            <a:off x="11521440" y="6400800"/>
-            <a:ext cx="2194560" cy="1645920"/>
+            <a:off x="11109960" y="6199632"/>
+            <a:ext cx="1005840" cy="365760"/>
           </a:xfrm>
           <a:prstGeom prst="rect">
             <a:avLst/>
@@ -7736,579 +8632,6 @@
           <a:lstStyle/>
           <a:p>
             <a:pPr algn="ctr"/>
-          </a:p>
-        </p:txBody>
-      </p:sp>
-      <p:sp>
-        <p:nvSpPr>
-          <p:cNvPr id="6" name="Rectangle 5"/>
-          <p:cNvSpPr/>
-          <p:nvPr/>
-        </p:nvSpPr>
-        <p:spPr>
-          <a:xfrm>
-            <a:off x="777240" y="548640"/>
-            <a:ext cx="146304" cy="868680"/>
-          </a:xfrm>
-          <a:prstGeom prst="rect">
-            <a:avLst/>
-          </a:prstGeom>
-          <a:solidFill>
-            <a:srgbClr val="1D4ED8"/>
-          </a:solidFill>
-          <a:ln>
-            <a:noFill/>
-          </a:ln>
-          <a:effectLst/>
-        </p:spPr>
-        <p:style>
-          <a:lnRef idx="1">
-            <a:schemeClr val="accent1"/>
-          </a:lnRef>
-          <a:fillRef idx="3">
-            <a:schemeClr val="accent1"/>
-          </a:fillRef>
-          <a:effectRef idx="2">
-            <a:schemeClr val="accent1"/>
-          </a:effectRef>
-          <a:fontRef idx="minor">
-            <a:schemeClr val="lt1"/>
-          </a:fontRef>
-        </p:style>
-        <p:txBody>
-          <a:bodyPr rtlCol="0" anchor="ctr"/>
-          <a:lstStyle/>
-          <a:p>
-            <a:pPr algn="ctr"/>
-          </a:p>
-        </p:txBody>
-      </p:sp>
-      <p:sp>
-        <p:nvSpPr>
-          <p:cNvPr id="7" name="TextBox 6"/>
-          <p:cNvSpPr txBox="1"/>
-          <p:nvPr/>
-        </p:nvSpPr>
-        <p:spPr>
-          <a:xfrm>
-            <a:off x="1051560" y="502920"/>
-            <a:ext cx="10241280" cy="1005840"/>
-          </a:xfrm>
-          <a:prstGeom prst="rect">
-            <a:avLst/>
-          </a:prstGeom>
-          <a:noFill/>
-        </p:spPr>
-        <p:txBody>
-          <a:bodyPr wrap="square" anchor="t" lIns="0" rIns="0" tIns="0" bIns="0">
-            <a:spAutoFit/>
-          </a:bodyPr>
-          <a:lstStyle/>
-          <a:p>
-            <a:pPr algn="l">
-              <a:spcAft>
-                <a:spcPts val="200"/>
-              </a:spcAft>
-            </a:pPr>
-            <a:r>
-              <a:rPr sz="3400" b="1">
-                <a:solidFill>
-                  <a:srgbClr val="1E3A8A"/>
-                </a:solidFill>
-                <a:latin typeface="Cambria"/>
-              </a:rPr>
-              <a:t>Ekstra Teknolojiler</a:t>
-            </a:r>
-          </a:p>
-          <a:p>
-            <a:pPr algn="l">
-              <a:spcAft>
-                <a:spcPts val="600"/>
-              </a:spcAft>
-            </a:pPr>
-            <a:r>
-              <a:rPr sz="1400" b="0">
-                <a:solidFill>
-                  <a:srgbClr val="475569"/>
-                </a:solidFill>
-                <a:latin typeface="Calibri"/>
-              </a:rPr>
-              <a:t>İsterlerin ötesinde eklediklerimiz</a:t>
-            </a:r>
-          </a:p>
-        </p:txBody>
-      </p:sp>
-      <p:sp>
-        <p:nvSpPr>
-          <p:cNvPr id="8" name="Rectangle 7"/>
-          <p:cNvSpPr/>
-          <p:nvPr/>
-        </p:nvSpPr>
-        <p:spPr>
-          <a:xfrm>
-            <a:off x="1051560" y="1481328"/>
-            <a:ext cx="2926080" cy="45720"/>
-          </a:xfrm>
-          <a:prstGeom prst="rect">
-            <a:avLst/>
-          </a:prstGeom>
-          <a:solidFill>
-            <a:srgbClr val="DBEAFE"/>
-          </a:solidFill>
-          <a:ln>
-            <a:noFill/>
-          </a:ln>
-          <a:effectLst/>
-        </p:spPr>
-        <p:style>
-          <a:lnRef idx="1">
-            <a:schemeClr val="accent1"/>
-          </a:lnRef>
-          <a:fillRef idx="3">
-            <a:schemeClr val="accent1"/>
-          </a:fillRef>
-          <a:effectRef idx="2">
-            <a:schemeClr val="accent1"/>
-          </a:effectRef>
-          <a:fontRef idx="minor">
-            <a:schemeClr val="lt1"/>
-          </a:fontRef>
-        </p:style>
-        <p:txBody>
-          <a:bodyPr rtlCol="0" anchor="ctr"/>
-          <a:lstStyle/>
-          <a:p>
-            <a:pPr algn="ctr"/>
-          </a:p>
-        </p:txBody>
-      </p:sp>
-      <p:sp>
-        <p:nvSpPr>
-          <p:cNvPr id="9" name="TextBox 8"/>
-          <p:cNvSpPr txBox="1"/>
-          <p:nvPr/>
-        </p:nvSpPr>
-        <p:spPr>
-          <a:xfrm>
-            <a:off x="1051560" y="1874519"/>
-            <a:ext cx="5074920" cy="4389120"/>
-          </a:xfrm>
-          <a:prstGeom prst="rect">
-            <a:avLst/>
-          </a:prstGeom>
-          <a:noFill/>
-        </p:spPr>
-        <p:txBody>
-          <a:bodyPr wrap="square" anchor="t" lIns="0" rIns="0" tIns="0" bIns="0">
-            <a:spAutoFit/>
-          </a:bodyPr>
-          <a:lstStyle/>
-          <a:p>
-            <a:pPr algn="l">
-              <a:spcAft>
-                <a:spcPts val="100"/>
-              </a:spcAft>
-            </a:pPr>
-            <a:r>
-              <a:rPr sz="1400" b="1">
-                <a:solidFill>
-                  <a:srgbClr val="1E3A8A"/>
-                </a:solidFill>
-                <a:latin typeface="Cambria"/>
-              </a:rPr>
-              <a:t>▸  Kubernetes · Kustomize · GKE</a:t>
-            </a:r>
-          </a:p>
-          <a:p>
-            <a:pPr algn="l">
-              <a:spcAft>
-                <a:spcPts val="900"/>
-              </a:spcAft>
-            </a:pPr>
-            <a:r>
-              <a:rPr sz="1150" b="0">
-                <a:solidFill>
-                  <a:srgbClr val="475569"/>
-                </a:solidFill>
-                <a:latin typeface="Calibri"/>
-              </a:rPr>
-              <a:t>     Docker'ın ötesinde üretim orkestrasyonu (WIF ile anahtarsız deploy)</a:t>
-            </a:r>
-          </a:p>
-          <a:p>
-            <a:pPr algn="l">
-              <a:spcAft>
-                <a:spcPts val="100"/>
-              </a:spcAft>
-            </a:pPr>
-            <a:r>
-              <a:rPr sz="1400" b="1">
-                <a:solidFill>
-                  <a:srgbClr val="1E3A8A"/>
-                </a:solidFill>
-                <a:latin typeface="Cambria"/>
-              </a:rPr>
-              <a:t>▸  GitHub Actions CI/CD</a:t>
-            </a:r>
-          </a:p>
-          <a:p>
-            <a:pPr algn="l">
-              <a:spcAft>
-                <a:spcPts val="900"/>
-              </a:spcAft>
-            </a:pPr>
-            <a:r>
-              <a:rPr sz="1150" b="0">
-                <a:solidFill>
-                  <a:srgbClr val="475569"/>
-                </a:solidFill>
-                <a:latin typeface="Calibri"/>
-              </a:rPr>
-              <a:t>     Otomatik build, test ve dağıtım hattı</a:t>
-            </a:r>
-          </a:p>
-          <a:p>
-            <a:pPr algn="l">
-              <a:spcAft>
-                <a:spcPts val="100"/>
-              </a:spcAft>
-            </a:pPr>
-            <a:r>
-              <a:rPr sz="1400" b="1">
-                <a:solidFill>
-                  <a:srgbClr val="1E3A8A"/>
-                </a:solidFill>
-                <a:latin typeface="Cambria"/>
-              </a:rPr>
-              <a:t>▸  SonarCloud + JaCoCo</a:t>
-            </a:r>
-          </a:p>
-          <a:p>
-            <a:pPr algn="l">
-              <a:spcAft>
-                <a:spcPts val="900"/>
-              </a:spcAft>
-            </a:pPr>
-            <a:r>
-              <a:rPr sz="1150" b="0">
-                <a:solidFill>
-                  <a:srgbClr val="475569"/>
-                </a:solidFill>
-                <a:latin typeface="Calibri"/>
-              </a:rPr>
-              <a:t>     Kod kalite kapıları + test kapsamı ölçümü</a:t>
-            </a:r>
-          </a:p>
-          <a:p>
-            <a:pPr algn="l">
-              <a:spcAft>
-                <a:spcPts val="100"/>
-              </a:spcAft>
-            </a:pPr>
-            <a:r>
-              <a:rPr sz="1400" b="1">
-                <a:solidFill>
-                  <a:srgbClr val="1E3A8A"/>
-                </a:solidFill>
-                <a:latin typeface="Cambria"/>
-              </a:rPr>
-              <a:t>▸  Jaeger</a:t>
-            </a:r>
-          </a:p>
-          <a:p>
-            <a:pPr algn="l">
-              <a:spcAft>
-                <a:spcPts val="900"/>
-              </a:spcAft>
-            </a:pPr>
-            <a:r>
-              <a:rPr sz="1150" b="0">
-                <a:solidFill>
-                  <a:srgbClr val="475569"/>
-                </a:solidFill>
-                <a:latin typeface="Calibri"/>
-              </a:rPr>
-              <a:t>     Dağıtık iz (trace) görüntüleme — OTel ile</a:t>
-            </a:r>
-          </a:p>
-          <a:p>
-            <a:pPr algn="l">
-              <a:spcAft>
-                <a:spcPts val="100"/>
-              </a:spcAft>
-            </a:pPr>
-            <a:r>
-              <a:rPr sz="1400" b="1">
-                <a:solidFill>
-                  <a:srgbClr val="1E3A8A"/>
-                </a:solidFill>
-                <a:latin typeface="Cambria"/>
-              </a:rPr>
-              <a:t>▸  ShedLock</a:t>
-            </a:r>
-          </a:p>
-          <a:p>
-            <a:pPr algn="l">
-              <a:spcAft>
-                <a:spcPts val="900"/>
-              </a:spcAft>
-            </a:pPr>
-            <a:r>
-              <a:rPr sz="1150" b="0">
-                <a:solidFill>
-                  <a:srgbClr val="475569"/>
-                </a:solidFill>
-                <a:latin typeface="Calibri"/>
-              </a:rPr>
-              <a:t>     Dağıtık zamanlayıcı kilidi (çok-replika güvenliği)</a:t>
-            </a:r>
-          </a:p>
-          <a:p>
-            <a:pPr algn="l">
-              <a:spcAft>
-                <a:spcPts val="100"/>
-              </a:spcAft>
-            </a:pPr>
-            <a:r>
-              <a:rPr sz="1400" b="1">
-                <a:solidFill>
-                  <a:srgbClr val="1E3A8A"/>
-                </a:solidFill>
-                <a:latin typeface="Cambria"/>
-              </a:rPr>
-              <a:t>▸  LLM / Yapay zeka danışman</a:t>
-            </a:r>
-          </a:p>
-          <a:p>
-            <a:pPr algn="l">
-              <a:spcAft>
-                <a:spcPts val="900"/>
-              </a:spcAft>
-            </a:pPr>
-            <a:r>
-              <a:rPr sz="1150" b="0">
-                <a:solidFill>
-                  <a:srgbClr val="475569"/>
-                </a:solidFill>
-                <a:latin typeface="Calibri"/>
-              </a:rPr>
-              <a:t>     OpenAI-uyumlu (Groq) sohbet asistanı</a:t>
-            </a:r>
-          </a:p>
-        </p:txBody>
-      </p:sp>
-      <p:sp>
-        <p:nvSpPr>
-          <p:cNvPr id="10" name="TextBox 9"/>
-          <p:cNvSpPr txBox="1"/>
-          <p:nvPr/>
-        </p:nvSpPr>
-        <p:spPr>
-          <a:xfrm>
-            <a:off x="6400800" y="1874519"/>
-            <a:ext cx="5074920" cy="4389120"/>
-          </a:xfrm>
-          <a:prstGeom prst="rect">
-            <a:avLst/>
-          </a:prstGeom>
-          <a:noFill/>
-        </p:spPr>
-        <p:txBody>
-          <a:bodyPr wrap="square" anchor="t" lIns="0" rIns="0" tIns="0" bIns="0">
-            <a:spAutoFit/>
-          </a:bodyPr>
-          <a:lstStyle/>
-          <a:p>
-            <a:pPr algn="l">
-              <a:spcAft>
-                <a:spcPts val="100"/>
-              </a:spcAft>
-            </a:pPr>
-            <a:r>
-              <a:rPr sz="1400" b="1">
-                <a:solidFill>
-                  <a:srgbClr val="1E3A8A"/>
-                </a:solidFill>
-                <a:latin typeface="Cambria"/>
-              </a:rPr>
-              <a:t>▸  LibreTranslate</a:t>
-            </a:r>
-          </a:p>
-          <a:p>
-            <a:pPr algn="l">
-              <a:spcAft>
-                <a:spcPts val="900"/>
-              </a:spcAft>
-            </a:pPr>
-            <a:r>
-              <a:rPr sz="1150" b="0">
-                <a:solidFill>
-                  <a:srgbClr val="475569"/>
-                </a:solidFill>
-                <a:latin typeface="Calibri"/>
-              </a:rPr>
-              <a:t>     Self-hosted TR↔EN haber çevirisi</a:t>
-            </a:r>
-          </a:p>
-          <a:p>
-            <a:pPr algn="l">
-              <a:spcAft>
-                <a:spcPts val="100"/>
-              </a:spcAft>
-            </a:pPr>
-            <a:r>
-              <a:rPr sz="1400" b="1">
-                <a:solidFill>
-                  <a:srgbClr val="1E3A8A"/>
-                </a:solidFill>
-                <a:latin typeface="Cambria"/>
-              </a:rPr>
-              <a:t>▸  Playwright (headless Chromium)</a:t>
-            </a:r>
-          </a:p>
-          <a:p>
-            <a:pPr algn="l">
-              <a:spcAft>
-                <a:spcPts val="900"/>
-              </a:spcAft>
-            </a:pPr>
-            <a:r>
-              <a:rPr sz="1150" b="0">
-                <a:solidFill>
-                  <a:srgbClr val="475569"/>
-                </a:solidFill>
-                <a:latin typeface="Calibri"/>
-              </a:rPr>
-              <a:t>     Bot-korumalı sayfalardan veri çekimi</a:t>
-            </a:r>
-          </a:p>
-          <a:p>
-            <a:pPr algn="l">
-              <a:spcAft>
-                <a:spcPts val="100"/>
-              </a:spcAft>
-            </a:pPr>
-            <a:r>
-              <a:rPr sz="1400" b="1">
-                <a:solidFill>
-                  <a:srgbClr val="1E3A8A"/>
-                </a:solidFill>
-                <a:latin typeface="Cambria"/>
-              </a:rPr>
-              <a:t>▸  OpenLDAP</a:t>
-            </a:r>
-          </a:p>
-          <a:p>
-            <a:pPr algn="l">
-              <a:spcAft>
-                <a:spcPts val="900"/>
-              </a:spcAft>
-            </a:pPr>
-            <a:r>
-              <a:rPr sz="1150" b="0">
-                <a:solidFill>
-                  <a:srgbClr val="475569"/>
-                </a:solidFill>
-                <a:latin typeface="Calibri"/>
-              </a:rPr>
-              <a:t>     Keycloak kullanıcı federasyonu</a:t>
-            </a:r>
-          </a:p>
-          <a:p>
-            <a:pPr algn="l">
-              <a:spcAft>
-                <a:spcPts val="100"/>
-              </a:spcAft>
-            </a:pPr>
-            <a:r>
-              <a:rPr sz="1400" b="1">
-                <a:solidFill>
-                  <a:srgbClr val="1E3A8A"/>
-                </a:solidFill>
-                <a:latin typeface="Cambria"/>
-              </a:rPr>
-              <a:t>▸  Spring Mail + Mailpit</a:t>
-            </a:r>
-          </a:p>
-          <a:p>
-            <a:pPr algn="l">
-              <a:spcAft>
-                <a:spcPts val="900"/>
-              </a:spcAft>
-            </a:pPr>
-            <a:r>
-              <a:rPr sz="1150" b="0">
-                <a:solidFill>
-                  <a:srgbClr val="475569"/>
-                </a:solidFill>
-                <a:latin typeface="Calibri"/>
-              </a:rPr>
-              <a:t>     E-posta fiyat alarmı bildirimleri</a:t>
-            </a:r>
-          </a:p>
-          <a:p>
-            <a:pPr algn="l">
-              <a:spcAft>
-                <a:spcPts val="100"/>
-              </a:spcAft>
-            </a:pPr>
-            <a:r>
-              <a:rPr sz="1400" b="1">
-                <a:solidFill>
-                  <a:srgbClr val="1E3A8A"/>
-                </a:solidFill>
-                <a:latin typeface="Cambria"/>
-              </a:rPr>
-              <a:t>▸  Apache POI + SheetJS</a:t>
-            </a:r>
-          </a:p>
-          <a:p>
-            <a:pPr algn="l">
-              <a:spcAft>
-                <a:spcPts val="900"/>
-              </a:spcAft>
-            </a:pPr>
-            <a:r>
-              <a:rPr sz="1150" b="0">
-                <a:solidFill>
-                  <a:srgbClr val="475569"/>
-                </a:solidFill>
-                <a:latin typeface="Calibri"/>
-              </a:rPr>
-              <a:t>     Excel ile portföy içe/dışa aktarma</a:t>
-            </a:r>
-          </a:p>
-          <a:p>
-            <a:pPr algn="l">
-              <a:spcAft>
-                <a:spcPts val="100"/>
-              </a:spcAft>
-            </a:pPr>
-            <a:r>
-              <a:rPr sz="1400" b="1">
-                <a:solidFill>
-                  <a:srgbClr val="1E3A8A"/>
-                </a:solidFill>
-                <a:latin typeface="Cambria"/>
-              </a:rPr>
-              <a:t>▸  Yahoo · TCMB EVDS3 · TEFAS · FRED · İş Yatırım</a:t>
-            </a:r>
-          </a:p>
-          <a:p>
-            <a:pPr algn="l">
-              <a:spcAft>
-                <a:spcPts val="900"/>
-              </a:spcAft>
-            </a:pPr>
-            <a:r>
-              <a:rPr sz="1150" b="0">
-                <a:solidFill>
-                  <a:srgbClr val="475569"/>
-                </a:solidFill>
-                <a:latin typeface="Calibri"/>
-              </a:rPr>
-              <a:t>     Canlı dış veri entegrasyonları</a:t>
-            </a:r>
           </a:p>
         </p:txBody>
       </p:sp>
@@ -8321,7 +8644,7 @@
 </file>
 
 <file path=ppt/slides/slide8.xml><?xml version="1.0" encoding="utf-8"?>
-<p:sld xmlns:a="http://schemas.openxmlformats.org/drawingml/2006/main" xmlns:p="http://schemas.openxmlformats.org/presentationml/2006/main" xmlns:r="http://schemas.openxmlformats.org/officeDocument/2006/relationships">
+<p:sld xmlns:a="http://schemas.openxmlformats.org/drawingml/2006/main" xmlns:r="http://schemas.openxmlformats.org/officeDocument/2006/relationships" xmlns:p="http://schemas.openxmlformats.org/presentationml/2006/main">
   <p:cSld>
     <p:spTree>
       <p:nvGrpSpPr>
@@ -8329,17 +8652,366 @@
         <p:cNvGrpSpPr/>
         <p:nvPr/>
       </p:nvGrpSpPr>
-      <p:grpSpPr/>
-      <p:sp>
-        <p:nvSpPr>
-          <p:cNvPr id="2" name="Rectangle 1"/>
+      <p:grpSpPr>
+        <a:xfrm>
+          <a:off x="0" y="0"/>
+          <a:ext cx="0" cy="0"/>
+          <a:chOff x="0" y="0"/>
+          <a:chExt cx="0" cy="0"/>
+        </a:xfrm>
+      </p:grpSpPr>
+      <p:sp>
+        <p:nvSpPr>
+          <p:cNvPr id="6" name="Rectangle 5"/>
           <p:cNvSpPr/>
           <p:nvPr/>
         </p:nvSpPr>
         <p:spPr>
+          <a:xfrm>
+            <a:off x="777240" y="548640"/>
+            <a:ext cx="146304" cy="868680"/>
+          </a:xfrm>
+          <a:prstGeom prst="rect">
+            <a:avLst/>
+          </a:prstGeom>
+          <a:solidFill>
+            <a:srgbClr val="1D4ED8"/>
+          </a:solidFill>
+          <a:ln>
+            <a:noFill/>
+          </a:ln>
+          <a:effectLst/>
+        </p:spPr>
+        <p:style>
+          <a:lnRef idx="1">
+            <a:schemeClr val="accent1"/>
+          </a:lnRef>
+          <a:fillRef idx="3">
+            <a:schemeClr val="accent1"/>
+          </a:fillRef>
+          <a:effectRef idx="2">
+            <a:schemeClr val="accent1"/>
+          </a:effectRef>
+          <a:fontRef idx="minor">
+            <a:schemeClr val="lt1"/>
+          </a:fontRef>
+        </p:style>
+        <p:txBody>
+          <a:bodyPr rtlCol="0" anchor="ctr"/>
+          <a:lstStyle/>
+          <a:p>
+            <a:pPr algn="ctr"/>
+            <a:endParaRPr/>
+          </a:p>
+        </p:txBody>
+      </p:sp>
+      <p:sp>
+        <p:nvSpPr>
+          <p:cNvPr id="7" name="TextBox 6"/>
+          <p:cNvSpPr txBox="1"/>
+          <p:nvPr/>
+        </p:nvSpPr>
+        <p:spPr>
+          <a:xfrm>
+            <a:off x="1051560" y="502920"/>
+            <a:ext cx="10241280" cy="1005840"/>
+          </a:xfrm>
+          <a:prstGeom prst="rect">
+            <a:avLst/>
+          </a:prstGeom>
+          <a:noFill/>
+        </p:spPr>
+        <p:txBody>
+          <a:bodyPr wrap="square" lIns="0" tIns="0" rIns="0" bIns="0" anchor="t">
+            <a:spAutoFit/>
+          </a:bodyPr>
+          <a:lstStyle/>
+          <a:p>
+            <a:pPr algn="l">
+              <a:spcAft>
+                <a:spcPts val="200"/>
+              </a:spcAft>
+            </a:pPr>
+            <a:r>
+              <a:rPr sz="3400" b="1">
+                <a:solidFill>
+                  <a:srgbClr val="1E3A8A"/>
+                </a:solidFill>
+                <a:latin typeface="Cambria"/>
+              </a:rPr>
+              <a:t>Zorluklar ve Öğrendiklerim</a:t>
+            </a:r>
+          </a:p>
+        </p:txBody>
+      </p:sp>
+      <p:sp>
+        <p:nvSpPr>
+          <p:cNvPr id="8" name="Rectangle 7"/>
+          <p:cNvSpPr/>
+          <p:nvPr/>
+        </p:nvSpPr>
+        <p:spPr>
+          <a:xfrm>
+            <a:off x="1051560" y="1481328"/>
+            <a:ext cx="2926080" cy="45720"/>
+          </a:xfrm>
+          <a:prstGeom prst="rect">
+            <a:avLst/>
+          </a:prstGeom>
+          <a:solidFill>
+            <a:srgbClr val="DBEAFE"/>
+          </a:solidFill>
+          <a:ln>
+            <a:noFill/>
+          </a:ln>
+          <a:effectLst/>
+        </p:spPr>
+        <p:style>
+          <a:lnRef idx="1">
+            <a:schemeClr val="accent1"/>
+          </a:lnRef>
+          <a:fillRef idx="3">
+            <a:schemeClr val="accent1"/>
+          </a:fillRef>
+          <a:effectRef idx="2">
+            <a:schemeClr val="accent1"/>
+          </a:effectRef>
+          <a:fontRef idx="minor">
+            <a:schemeClr val="lt1"/>
+          </a:fontRef>
+        </p:style>
+        <p:txBody>
+          <a:bodyPr rtlCol="0" anchor="ctr"/>
+          <a:lstStyle/>
+          <a:p>
+            <a:pPr algn="ctr"/>
+            <a:endParaRPr/>
+          </a:p>
+        </p:txBody>
+      </p:sp>
+      <p:sp>
+        <p:nvSpPr>
+          <p:cNvPr id="9" name="TextBox 8"/>
+          <p:cNvSpPr txBox="1"/>
+          <p:nvPr/>
+        </p:nvSpPr>
+        <p:spPr>
+          <a:xfrm>
+            <a:off x="1051560" y="1920240"/>
+            <a:ext cx="3383280" cy="4206240"/>
+          </a:xfrm>
+          <a:prstGeom prst="rect">
+            <a:avLst/>
+          </a:prstGeom>
+          <a:noFill/>
+        </p:spPr>
+        <p:txBody>
+          <a:bodyPr wrap="square" lIns="0" tIns="0" rIns="0" bIns="0" anchor="t">
+            <a:spAutoFit/>
+          </a:bodyPr>
+          <a:lstStyle/>
+          <a:p>
+            <a:pPr algn="l">
+              <a:spcAft>
+                <a:spcPts val="200"/>
+              </a:spcAft>
+            </a:pPr>
+            <a:r>
+              <a:rPr sz="4000" b="1">
+                <a:solidFill>
+                  <a:srgbClr val="DBEAFE"/>
+                </a:solidFill>
+                <a:latin typeface="Cambria"/>
+              </a:rPr>
+              <a:t>01</a:t>
+            </a:r>
+          </a:p>
+          <a:p>
+            <a:pPr algn="l">
+              <a:spcAft>
+                <a:spcPts val="800"/>
+              </a:spcAft>
+            </a:pPr>
+            <a:r>
+              <a:rPr sz="1700" b="1">
+                <a:solidFill>
+                  <a:srgbClr val="1E3A8A"/>
+                </a:solidFill>
+                <a:latin typeface="Cambria"/>
+              </a:rPr>
+              <a:t>CI/CD Pipeline</a:t>
+            </a:r>
+          </a:p>
+          <a:p>
+            <a:pPr algn="l">
+              <a:spcAft>
+                <a:spcPts val="400"/>
+              </a:spcAft>
+            </a:pPr>
+            <a:r>
+              <a:rPr sz="1250" b="0">
+                <a:solidFill>
+                  <a:srgbClr val="1F2937"/>
+                </a:solidFill>
+                <a:latin typeface="Calibri"/>
+              </a:rPr>
+              <a:t>Daha önce daha basit projelerimde uyguladığım CI ve CD Pipeline, bu kapsamlı projede özellikle CD kısmı beni en çok zorlayan bölümlerden oldu.</a:t>
+            </a:r>
+          </a:p>
+        </p:txBody>
+      </p:sp>
+      <p:sp>
+        <p:nvSpPr>
+          <p:cNvPr id="10" name="TextBox 9"/>
+          <p:cNvSpPr txBox="1"/>
+          <p:nvPr/>
+        </p:nvSpPr>
+        <p:spPr>
+          <a:xfrm>
+            <a:off x="4754880" y="1920240"/>
+            <a:ext cx="3383280" cy="4206240"/>
+          </a:xfrm>
+          <a:prstGeom prst="rect">
+            <a:avLst/>
+          </a:prstGeom>
+          <a:noFill/>
+        </p:spPr>
+        <p:txBody>
+          <a:bodyPr wrap="square" lIns="0" tIns="0" rIns="0" bIns="0" anchor="t">
+            <a:spAutoFit/>
+          </a:bodyPr>
+          <a:lstStyle/>
+          <a:p>
+            <a:pPr algn="l">
+              <a:spcAft>
+                <a:spcPts val="200"/>
+              </a:spcAft>
+            </a:pPr>
+            <a:r>
+              <a:rPr sz="4000" b="1">
+                <a:solidFill>
+                  <a:srgbClr val="DBEAFE"/>
+                </a:solidFill>
+                <a:latin typeface="Cambria"/>
+              </a:rPr>
+              <a:t>02</a:t>
+            </a:r>
+          </a:p>
+          <a:p>
+            <a:pPr algn="l">
+              <a:spcAft>
+                <a:spcPts val="800"/>
+              </a:spcAft>
+            </a:pPr>
+            <a:r>
+              <a:rPr sz="1700" b="1">
+                <a:solidFill>
+                  <a:srgbClr val="1E3A8A"/>
+                </a:solidFill>
+                <a:latin typeface="Cambria"/>
+              </a:rPr>
+              <a:t>Finansal Okuryazarlık</a:t>
+            </a:r>
+          </a:p>
+          <a:p>
+            <a:pPr algn="l">
+              <a:spcAft>
+                <a:spcPts val="400"/>
+              </a:spcAft>
+            </a:pPr>
+            <a:r>
+              <a:rPr sz="1250" b="0">
+                <a:solidFill>
+                  <a:srgbClr val="1F2937"/>
+                </a:solidFill>
+                <a:latin typeface="Calibri"/>
+              </a:rPr>
+              <a:t>Sistemi yalnızca geliştirici değil, gerçek bir kullanıcının ihtiyaçları üzerinden değerlendirmeye çalıştım. Başlangıçta finansal kavramları, yatırım araçlarını ve kullanıcı beklentilerini öğrenmeye odaklandım.</a:t>
+            </a:r>
+          </a:p>
+        </p:txBody>
+      </p:sp>
+      <p:sp>
+        <p:nvSpPr>
+          <p:cNvPr id="11" name="TextBox 10"/>
+          <p:cNvSpPr txBox="1"/>
+          <p:nvPr/>
+        </p:nvSpPr>
+        <p:spPr>
+          <a:xfrm>
+            <a:off x="8458200" y="1920240"/>
+            <a:ext cx="3383280" cy="4206240"/>
+          </a:xfrm>
+          <a:prstGeom prst="rect">
+            <a:avLst/>
+          </a:prstGeom>
+          <a:noFill/>
+        </p:spPr>
+        <p:txBody>
+          <a:bodyPr wrap="square" lIns="0" tIns="0" rIns="0" bIns="0" anchor="t">
+            <a:spAutoFit/>
+          </a:bodyPr>
+          <a:lstStyle/>
+          <a:p>
+            <a:pPr algn="l">
+              <a:spcAft>
+                <a:spcPts val="200"/>
+              </a:spcAft>
+            </a:pPr>
+            <a:r>
+              <a:rPr sz="4000" b="1">
+                <a:solidFill>
+                  <a:srgbClr val="DBEAFE"/>
+                </a:solidFill>
+                <a:latin typeface="Cambria"/>
+              </a:rPr>
+              <a:t>03</a:t>
+            </a:r>
+          </a:p>
+          <a:p>
+            <a:pPr algn="l">
+              <a:spcAft>
+                <a:spcPts val="800"/>
+              </a:spcAft>
+            </a:pPr>
+            <a:r>
+              <a:rPr sz="1700" b="1">
+                <a:solidFill>
+                  <a:srgbClr val="1E3A8A"/>
+                </a:solidFill>
+                <a:latin typeface="Cambria"/>
+              </a:rPr>
+              <a:t>Yeni Teknolojiler</a:t>
+            </a:r>
+          </a:p>
+          <a:p>
+            <a:pPr algn="l">
+              <a:spcAft>
+                <a:spcPts val="400"/>
+              </a:spcAft>
+            </a:pPr>
+            <a:r>
+              <a:rPr sz="1250" b="0">
+                <a:solidFill>
+                  <a:srgbClr val="1F2937"/>
+                </a:solidFill>
+                <a:latin typeface="Calibri"/>
+              </a:rPr>
+              <a:t>SonarCloud, JaCoCo ve Grafana gibi araçlar başta zorladı; ancak bu süreç kod kalitesi, test kapsamı ve sistem izleme konularında bakış açımı geliştirdi.</a:t>
+            </a:r>
+          </a:p>
+        </p:txBody>
+      </p:sp>
+      <p:sp>
+        <p:nvSpPr>
+          <p:cNvPr id="12" name="Rectangle 11"/>
+          <p:cNvSpPr/>
+          <p:nvPr/>
+        </p:nvSpPr>
+        <p:spPr>
           <a:xfrm rot="2100000">
-            <a:off x="11430000" y="-731520"/>
-            <a:ext cx="1920240" cy="1371600"/>
+            <a:off x="10835640" y="411480"/>
+            <a:ext cx="1280160" cy="457200"/>
           </a:xfrm>
           <a:prstGeom prst="rect">
             <a:avLst/>
@@ -8376,14 +9048,14 @@
       </p:sp>
       <p:sp>
         <p:nvSpPr>
-          <p:cNvPr id="3" name="Rectangle 2"/>
+          <p:cNvPr id="13" name="Rectangle 12"/>
           <p:cNvSpPr/>
           <p:nvPr/>
         </p:nvSpPr>
         <p:spPr>
           <a:xfrm rot="2100000">
-            <a:off x="11795760" y="-457200"/>
-            <a:ext cx="1645920" cy="1188720"/>
+            <a:off x="11109960" y="274320"/>
+            <a:ext cx="1005840" cy="365760"/>
           </a:xfrm>
           <a:prstGeom prst="rect">
             <a:avLst/>
@@ -8420,14 +9092,14 @@
       </p:sp>
       <p:sp>
         <p:nvSpPr>
-          <p:cNvPr id="4" name="Rectangle 3"/>
+          <p:cNvPr id="14" name="Rectangle 13"/>
           <p:cNvSpPr/>
           <p:nvPr/>
         </p:nvSpPr>
         <p:spPr>
           <a:xfrm rot="2100000">
-            <a:off x="11155680" y="6035040"/>
-            <a:ext cx="2377440" cy="1828800"/>
+            <a:off x="10835640" y="5989320"/>
+            <a:ext cx="1280160" cy="457200"/>
           </a:xfrm>
           <a:prstGeom prst="rect">
             <a:avLst/>
@@ -8464,14 +9136,14 @@
       </p:sp>
       <p:sp>
         <p:nvSpPr>
-          <p:cNvPr id="5" name="Rectangle 4"/>
+          <p:cNvPr id="15" name="Rectangle 14"/>
           <p:cNvSpPr/>
           <p:nvPr/>
         </p:nvSpPr>
         <p:spPr>
           <a:xfrm rot="2100000">
-            <a:off x="11521440" y="6400800"/>
-            <a:ext cx="2194560" cy="1645920"/>
+            <a:off x="11109960" y="6199632"/>
+            <a:ext cx="1005840" cy="365760"/>
           </a:xfrm>
           <a:prstGeom prst="rect">
             <a:avLst/>
@@ -8503,346 +9175,6 @@
           <a:lstStyle/>
           <a:p>
             <a:pPr algn="ctr"/>
-          </a:p>
-        </p:txBody>
-      </p:sp>
-      <p:sp>
-        <p:nvSpPr>
-          <p:cNvPr id="6" name="Rectangle 5"/>
-          <p:cNvSpPr/>
-          <p:nvPr/>
-        </p:nvSpPr>
-        <p:spPr>
-          <a:xfrm>
-            <a:off x="777240" y="548640"/>
-            <a:ext cx="146304" cy="868680"/>
-          </a:xfrm>
-          <a:prstGeom prst="rect">
-            <a:avLst/>
-          </a:prstGeom>
-          <a:solidFill>
-            <a:srgbClr val="1D4ED8"/>
-          </a:solidFill>
-          <a:ln>
-            <a:noFill/>
-          </a:ln>
-          <a:effectLst/>
-        </p:spPr>
-        <p:style>
-          <a:lnRef idx="1">
-            <a:schemeClr val="accent1"/>
-          </a:lnRef>
-          <a:fillRef idx="3">
-            <a:schemeClr val="accent1"/>
-          </a:fillRef>
-          <a:effectRef idx="2">
-            <a:schemeClr val="accent1"/>
-          </a:effectRef>
-          <a:fontRef idx="minor">
-            <a:schemeClr val="lt1"/>
-          </a:fontRef>
-        </p:style>
-        <p:txBody>
-          <a:bodyPr rtlCol="0" anchor="ctr"/>
-          <a:lstStyle/>
-          <a:p>
-            <a:pPr algn="ctr"/>
-          </a:p>
-        </p:txBody>
-      </p:sp>
-      <p:sp>
-        <p:nvSpPr>
-          <p:cNvPr id="7" name="TextBox 6"/>
-          <p:cNvSpPr txBox="1"/>
-          <p:nvPr/>
-        </p:nvSpPr>
-        <p:spPr>
-          <a:xfrm>
-            <a:off x="1051560" y="502920"/>
-            <a:ext cx="10241280" cy="1005840"/>
-          </a:xfrm>
-          <a:prstGeom prst="rect">
-            <a:avLst/>
-          </a:prstGeom>
-          <a:noFill/>
-        </p:spPr>
-        <p:txBody>
-          <a:bodyPr wrap="square" anchor="t" lIns="0" rIns="0" tIns="0" bIns="0">
-            <a:spAutoFit/>
-          </a:bodyPr>
-          <a:lstStyle/>
-          <a:p>
-            <a:pPr algn="l">
-              <a:spcAft>
-                <a:spcPts val="200"/>
-              </a:spcAft>
-            </a:pPr>
-            <a:r>
-              <a:rPr sz="3400" b="1">
-                <a:solidFill>
-                  <a:srgbClr val="1E3A8A"/>
-                </a:solidFill>
-                <a:latin typeface="Cambria"/>
-              </a:rPr>
-              <a:t>Zorluklar ve Öğrendiklerim</a:t>
-            </a:r>
-          </a:p>
-        </p:txBody>
-      </p:sp>
-      <p:sp>
-        <p:nvSpPr>
-          <p:cNvPr id="8" name="Rectangle 7"/>
-          <p:cNvSpPr/>
-          <p:nvPr/>
-        </p:nvSpPr>
-        <p:spPr>
-          <a:xfrm>
-            <a:off x="1051560" y="1481328"/>
-            <a:ext cx="2926080" cy="45720"/>
-          </a:xfrm>
-          <a:prstGeom prst="rect">
-            <a:avLst/>
-          </a:prstGeom>
-          <a:solidFill>
-            <a:srgbClr val="DBEAFE"/>
-          </a:solidFill>
-          <a:ln>
-            <a:noFill/>
-          </a:ln>
-          <a:effectLst/>
-        </p:spPr>
-        <p:style>
-          <a:lnRef idx="1">
-            <a:schemeClr val="accent1"/>
-          </a:lnRef>
-          <a:fillRef idx="3">
-            <a:schemeClr val="accent1"/>
-          </a:fillRef>
-          <a:effectRef idx="2">
-            <a:schemeClr val="accent1"/>
-          </a:effectRef>
-          <a:fontRef idx="minor">
-            <a:schemeClr val="lt1"/>
-          </a:fontRef>
-        </p:style>
-        <p:txBody>
-          <a:bodyPr rtlCol="0" anchor="ctr"/>
-          <a:lstStyle/>
-          <a:p>
-            <a:pPr algn="ctr"/>
-          </a:p>
-        </p:txBody>
-      </p:sp>
-      <p:sp>
-        <p:nvSpPr>
-          <p:cNvPr id="9" name="TextBox 8"/>
-          <p:cNvSpPr txBox="1"/>
-          <p:nvPr/>
-        </p:nvSpPr>
-        <p:spPr>
-          <a:xfrm>
-            <a:off x="1051560" y="1920240"/>
-            <a:ext cx="3383280" cy="4206240"/>
-          </a:xfrm>
-          <a:prstGeom prst="rect">
-            <a:avLst/>
-          </a:prstGeom>
-          <a:noFill/>
-        </p:spPr>
-        <p:txBody>
-          <a:bodyPr wrap="square" anchor="t" lIns="0" rIns="0" tIns="0" bIns="0">
-            <a:spAutoFit/>
-          </a:bodyPr>
-          <a:lstStyle/>
-          <a:p>
-            <a:pPr algn="l">
-              <a:spcAft>
-                <a:spcPts val="200"/>
-              </a:spcAft>
-            </a:pPr>
-            <a:r>
-              <a:rPr sz="4000" b="1">
-                <a:solidFill>
-                  <a:srgbClr val="DBEAFE"/>
-                </a:solidFill>
-                <a:latin typeface="Cambria"/>
-              </a:rPr>
-              <a:t>01</a:t>
-            </a:r>
-          </a:p>
-          <a:p>
-            <a:pPr algn="l">
-              <a:spcAft>
-                <a:spcPts val="800"/>
-              </a:spcAft>
-            </a:pPr>
-            <a:r>
-              <a:rPr sz="1700" b="1">
-                <a:solidFill>
-                  <a:srgbClr val="1E3A8A"/>
-                </a:solidFill>
-                <a:latin typeface="Cambria"/>
-              </a:rPr>
-              <a:t>CI/CD Pipeline</a:t>
-            </a:r>
-          </a:p>
-          <a:p>
-            <a:pPr algn="l">
-              <a:spcAft>
-                <a:spcPts val="400"/>
-              </a:spcAft>
-            </a:pPr>
-            <a:r>
-              <a:rPr sz="1250" b="0">
-                <a:solidFill>
-                  <a:srgbClr val="1F2937"/>
-                </a:solidFill>
-                <a:latin typeface="Calibri"/>
-              </a:rPr>
-              <a:t>Daha önce daha basit projelerimde uyguladığım CI ve CD Pipeline, bu kapsamlı projede özellikle CD kısmı beni en çok zorlayan bölümlerden oldu.</a:t>
-            </a:r>
-          </a:p>
-        </p:txBody>
-      </p:sp>
-      <p:sp>
-        <p:nvSpPr>
-          <p:cNvPr id="10" name="TextBox 9"/>
-          <p:cNvSpPr txBox="1"/>
-          <p:nvPr/>
-        </p:nvSpPr>
-        <p:spPr>
-          <a:xfrm>
-            <a:off x="4754880" y="1920240"/>
-            <a:ext cx="3383280" cy="4206240"/>
-          </a:xfrm>
-          <a:prstGeom prst="rect">
-            <a:avLst/>
-          </a:prstGeom>
-          <a:noFill/>
-        </p:spPr>
-        <p:txBody>
-          <a:bodyPr wrap="square" anchor="t" lIns="0" rIns="0" tIns="0" bIns="0">
-            <a:spAutoFit/>
-          </a:bodyPr>
-          <a:lstStyle/>
-          <a:p>
-            <a:pPr algn="l">
-              <a:spcAft>
-                <a:spcPts val="200"/>
-              </a:spcAft>
-            </a:pPr>
-            <a:r>
-              <a:rPr sz="4000" b="1">
-                <a:solidFill>
-                  <a:srgbClr val="DBEAFE"/>
-                </a:solidFill>
-                <a:latin typeface="Cambria"/>
-              </a:rPr>
-              <a:t>02</a:t>
-            </a:r>
-          </a:p>
-          <a:p>
-            <a:pPr algn="l">
-              <a:spcAft>
-                <a:spcPts val="800"/>
-              </a:spcAft>
-            </a:pPr>
-            <a:r>
-              <a:rPr sz="1700" b="1">
-                <a:solidFill>
-                  <a:srgbClr val="1E3A8A"/>
-                </a:solidFill>
-                <a:latin typeface="Cambria"/>
-              </a:rPr>
-              <a:t>Finansal Okuryazarlık</a:t>
-            </a:r>
-          </a:p>
-          <a:p>
-            <a:pPr algn="l">
-              <a:spcAft>
-                <a:spcPts val="400"/>
-              </a:spcAft>
-            </a:pPr>
-            <a:r>
-              <a:rPr sz="1250" b="0">
-                <a:solidFill>
-                  <a:srgbClr val="1F2937"/>
-                </a:solidFill>
-                <a:latin typeface="Calibri"/>
-              </a:rPr>
-              <a:t>Sistemi yalnızca geliştirici değil, gerçek bir kullanıcının ihtiyaçları üzerinden değerlendirmeye çalıştım. Başlangıçta finansal kavramları, yatırım araçlarını ve kullanıcı beklentilerini öğrenmeye odaklandım.</a:t>
-            </a:r>
-          </a:p>
-        </p:txBody>
-      </p:sp>
-      <p:sp>
-        <p:nvSpPr>
-          <p:cNvPr id="11" name="TextBox 10"/>
-          <p:cNvSpPr txBox="1"/>
-          <p:nvPr/>
-        </p:nvSpPr>
-        <p:spPr>
-          <a:xfrm>
-            <a:off x="8458200" y="1920240"/>
-            <a:ext cx="3383280" cy="4206240"/>
-          </a:xfrm>
-          <a:prstGeom prst="rect">
-            <a:avLst/>
-          </a:prstGeom>
-          <a:noFill/>
-        </p:spPr>
-        <p:txBody>
-          <a:bodyPr wrap="square" anchor="t" lIns="0" rIns="0" tIns="0" bIns="0">
-            <a:spAutoFit/>
-          </a:bodyPr>
-          <a:lstStyle/>
-          <a:p>
-            <a:pPr algn="l">
-              <a:spcAft>
-                <a:spcPts val="200"/>
-              </a:spcAft>
-            </a:pPr>
-            <a:r>
-              <a:rPr sz="4000" b="1">
-                <a:solidFill>
-                  <a:srgbClr val="DBEAFE"/>
-                </a:solidFill>
-                <a:latin typeface="Cambria"/>
-              </a:rPr>
-              <a:t>03</a:t>
-            </a:r>
-          </a:p>
-          <a:p>
-            <a:pPr algn="l">
-              <a:spcAft>
-                <a:spcPts val="800"/>
-              </a:spcAft>
-            </a:pPr>
-            <a:r>
-              <a:rPr sz="1700" b="1">
-                <a:solidFill>
-                  <a:srgbClr val="1E3A8A"/>
-                </a:solidFill>
-                <a:latin typeface="Cambria"/>
-              </a:rPr>
-              <a:t>Yeni Teknolojiler</a:t>
-            </a:r>
-          </a:p>
-          <a:p>
-            <a:pPr algn="l">
-              <a:spcAft>
-                <a:spcPts val="400"/>
-              </a:spcAft>
-            </a:pPr>
-            <a:r>
-              <a:rPr sz="1250" b="0">
-                <a:solidFill>
-                  <a:srgbClr val="1F2937"/>
-                </a:solidFill>
-                <a:latin typeface="Calibri"/>
-              </a:rPr>
-              <a:t>SonarCloud, JaCoCo ve Grafana gibi araçlar başta zorladı; ancak bu süreç kod kalitesi, test kapsamı ve sistem izleme konularında bakış açımı geliştirdi.</a:t>
-            </a:r>
           </a:p>
         </p:txBody>
       </p:sp>
@@ -8855,7 +9187,7 @@
 </file>
 
 <file path=ppt/slides/slide9.xml><?xml version="1.0" encoding="utf-8"?>
-<p:sld xmlns:a="http://schemas.openxmlformats.org/drawingml/2006/main" xmlns:p="http://schemas.openxmlformats.org/presentationml/2006/main" xmlns:r="http://schemas.openxmlformats.org/officeDocument/2006/relationships">
+<p:sld xmlns:a="http://schemas.openxmlformats.org/drawingml/2006/main" xmlns:r="http://schemas.openxmlformats.org/officeDocument/2006/relationships" xmlns:p="http://schemas.openxmlformats.org/presentationml/2006/main">
   <p:cSld>
     <p:spTree>
       <p:nvGrpSpPr>
@@ -8863,61 +9195,24 @@
         <p:cNvGrpSpPr/>
         <p:nvPr/>
       </p:nvGrpSpPr>
-      <p:grpSpPr/>
-      <p:sp>
-        <p:nvSpPr>
-          <p:cNvPr id="2" name="Rectangle 1"/>
+      <p:grpSpPr>
+        <a:xfrm>
+          <a:off x="0" y="0"/>
+          <a:ext cx="0" cy="0"/>
+          <a:chOff x="0" y="0"/>
+          <a:chExt cx="0" cy="0"/>
+        </a:xfrm>
+      </p:grpSpPr>
+      <p:sp>
+        <p:nvSpPr>
+          <p:cNvPr id="6" name="Rectangle 5"/>
           <p:cNvSpPr/>
           <p:nvPr/>
         </p:nvSpPr>
         <p:spPr>
-          <a:xfrm rot="2100000">
-            <a:off x="11430000" y="-731520"/>
-            <a:ext cx="1920240" cy="1371600"/>
-          </a:xfrm>
-          <a:prstGeom prst="rect">
-            <a:avLst/>
-          </a:prstGeom>
-          <a:solidFill>
-            <a:srgbClr val="1E3A8A"/>
-          </a:solidFill>
-          <a:ln>
-            <a:noFill/>
-          </a:ln>
-          <a:effectLst/>
-        </p:spPr>
-        <p:style>
-          <a:lnRef idx="1">
-            <a:schemeClr val="accent1"/>
-          </a:lnRef>
-          <a:fillRef idx="3">
-            <a:schemeClr val="accent1"/>
-          </a:fillRef>
-          <a:effectRef idx="2">
-            <a:schemeClr val="accent1"/>
-          </a:effectRef>
-          <a:fontRef idx="minor">
-            <a:schemeClr val="lt1"/>
-          </a:fontRef>
-        </p:style>
-        <p:txBody>
-          <a:bodyPr rtlCol="0" anchor="ctr"/>
-          <a:lstStyle/>
-          <a:p>
-            <a:pPr algn="ctr"/>
-          </a:p>
-        </p:txBody>
-      </p:sp>
-      <p:sp>
-        <p:nvSpPr>
-          <p:cNvPr id="3" name="Rectangle 2"/>
-          <p:cNvSpPr/>
-          <p:nvPr/>
-        </p:nvSpPr>
-        <p:spPr>
-          <a:xfrm rot="2100000">
-            <a:off x="11795760" y="-457200"/>
-            <a:ext cx="1645920" cy="1188720"/>
+          <a:xfrm>
+            <a:off x="777240" y="548640"/>
+            <a:ext cx="146304" cy="868680"/>
           </a:xfrm>
           <a:prstGeom prst="rect">
             <a:avLst/>
@@ -8949,138 +9244,7 @@
           <a:lstStyle/>
           <a:p>
             <a:pPr algn="ctr"/>
-          </a:p>
-        </p:txBody>
-      </p:sp>
-      <p:sp>
-        <p:nvSpPr>
-          <p:cNvPr id="4" name="Rectangle 3"/>
-          <p:cNvSpPr/>
-          <p:nvPr/>
-        </p:nvSpPr>
-        <p:spPr>
-          <a:xfrm rot="2100000">
-            <a:off x="11155680" y="6035040"/>
-            <a:ext cx="2377440" cy="1828800"/>
-          </a:xfrm>
-          <a:prstGeom prst="rect">
-            <a:avLst/>
-          </a:prstGeom>
-          <a:solidFill>
-            <a:srgbClr val="1E3A8A"/>
-          </a:solidFill>
-          <a:ln>
-            <a:noFill/>
-          </a:ln>
-          <a:effectLst/>
-        </p:spPr>
-        <p:style>
-          <a:lnRef idx="1">
-            <a:schemeClr val="accent1"/>
-          </a:lnRef>
-          <a:fillRef idx="3">
-            <a:schemeClr val="accent1"/>
-          </a:fillRef>
-          <a:effectRef idx="2">
-            <a:schemeClr val="accent1"/>
-          </a:effectRef>
-          <a:fontRef idx="minor">
-            <a:schemeClr val="lt1"/>
-          </a:fontRef>
-        </p:style>
-        <p:txBody>
-          <a:bodyPr rtlCol="0" anchor="ctr"/>
-          <a:lstStyle/>
-          <a:p>
-            <a:pPr algn="ctr"/>
-          </a:p>
-        </p:txBody>
-      </p:sp>
-      <p:sp>
-        <p:nvSpPr>
-          <p:cNvPr id="5" name="Rectangle 4"/>
-          <p:cNvSpPr/>
-          <p:nvPr/>
-        </p:nvSpPr>
-        <p:spPr>
-          <a:xfrm rot="2100000">
-            <a:off x="11521440" y="6400800"/>
-            <a:ext cx="2194560" cy="1645920"/>
-          </a:xfrm>
-          <a:prstGeom prst="rect">
-            <a:avLst/>
-          </a:prstGeom>
-          <a:solidFill>
-            <a:srgbClr val="1D4ED8"/>
-          </a:solidFill>
-          <a:ln>
-            <a:noFill/>
-          </a:ln>
-          <a:effectLst/>
-        </p:spPr>
-        <p:style>
-          <a:lnRef idx="1">
-            <a:schemeClr val="accent1"/>
-          </a:lnRef>
-          <a:fillRef idx="3">
-            <a:schemeClr val="accent1"/>
-          </a:fillRef>
-          <a:effectRef idx="2">
-            <a:schemeClr val="accent1"/>
-          </a:effectRef>
-          <a:fontRef idx="minor">
-            <a:schemeClr val="lt1"/>
-          </a:fontRef>
-        </p:style>
-        <p:txBody>
-          <a:bodyPr rtlCol="0" anchor="ctr"/>
-          <a:lstStyle/>
-          <a:p>
-            <a:pPr algn="ctr"/>
-          </a:p>
-        </p:txBody>
-      </p:sp>
-      <p:sp>
-        <p:nvSpPr>
-          <p:cNvPr id="6" name="Rectangle 5"/>
-          <p:cNvSpPr/>
-          <p:nvPr/>
-        </p:nvSpPr>
-        <p:spPr>
-          <a:xfrm>
-            <a:off x="777240" y="548640"/>
-            <a:ext cx="146304" cy="868680"/>
-          </a:xfrm>
-          <a:prstGeom prst="rect">
-            <a:avLst/>
-          </a:prstGeom>
-          <a:solidFill>
-            <a:srgbClr val="1D4ED8"/>
-          </a:solidFill>
-          <a:ln>
-            <a:noFill/>
-          </a:ln>
-          <a:effectLst/>
-        </p:spPr>
-        <p:style>
-          <a:lnRef idx="1">
-            <a:schemeClr val="accent1"/>
-          </a:lnRef>
-          <a:fillRef idx="3">
-            <a:schemeClr val="accent1"/>
-          </a:fillRef>
-          <a:effectRef idx="2">
-            <a:schemeClr val="accent1"/>
-          </a:effectRef>
-          <a:fontRef idx="minor">
-            <a:schemeClr val="lt1"/>
-          </a:fontRef>
-        </p:style>
-        <p:txBody>
-          <a:bodyPr rtlCol="0" anchor="ctr"/>
-          <a:lstStyle/>
-          <a:p>
-            <a:pPr algn="ctr"/>
+            <a:endParaRPr/>
           </a:p>
         </p:txBody>
       </p:sp>
@@ -9101,7 +9265,7 @@
           <a:noFill/>
         </p:spPr>
         <p:txBody>
-          <a:bodyPr wrap="square" anchor="t" lIns="0" rIns="0" tIns="0" bIns="0">
+          <a:bodyPr wrap="square" lIns="0" tIns="0" rIns="0" bIns="0" anchor="t">
             <a:spAutoFit/>
           </a:bodyPr>
           <a:lstStyle/>
@@ -9164,6 +9328,7 @@
           <a:lstStyle/>
           <a:p>
             <a:pPr algn="ctr"/>
+            <a:endParaRPr/>
           </a:p>
         </p:txBody>
       </p:sp>
@@ -9210,6 +9375,7 @@
           <a:lstStyle/>
           <a:p>
             <a:pPr algn="ctr"/>
+            <a:endParaRPr/>
           </a:p>
         </p:txBody>
       </p:sp>
@@ -9230,7 +9396,7 @@
           <a:noFill/>
         </p:spPr>
         <p:txBody>
-          <a:bodyPr wrap="square" anchor="ctr" lIns="0" rIns="0" tIns="0" bIns="0">
+          <a:bodyPr wrap="square" lIns="0" tIns="0" rIns="0" bIns="0" anchor="ctr">
             <a:spAutoFit/>
           </a:bodyPr>
           <a:lstStyle/>
@@ -9269,7 +9435,7 @@
           <a:noFill/>
         </p:spPr>
         <p:txBody>
-          <a:bodyPr wrap="square" anchor="t" lIns="0" rIns="0" tIns="0" bIns="0">
+          <a:bodyPr wrap="square" lIns="0" tIns="0" rIns="0" bIns="0" anchor="t">
             <a:spAutoFit/>
           </a:bodyPr>
           <a:lstStyle/>
@@ -9336,6 +9502,182 @@
               </a:rPr>
               <a:t>▸  GKE'ye otomatik CD şu an maliyet nedeniyle manuel tetiklemeye alınmıştır; deploy hattı çalışır durumdadır.</a:t>
             </a:r>
+          </a:p>
+        </p:txBody>
+      </p:sp>
+      <p:sp>
+        <p:nvSpPr>
+          <p:cNvPr id="12" name="Rectangle 11"/>
+          <p:cNvSpPr/>
+          <p:nvPr/>
+        </p:nvSpPr>
+        <p:spPr>
+          <a:xfrm rot="2100000">
+            <a:off x="10835640" y="411480"/>
+            <a:ext cx="1280160" cy="457200"/>
+          </a:xfrm>
+          <a:prstGeom prst="rect">
+            <a:avLst/>
+          </a:prstGeom>
+          <a:solidFill>
+            <a:srgbClr val="1E3A8A"/>
+          </a:solidFill>
+          <a:ln>
+            <a:noFill/>
+          </a:ln>
+          <a:effectLst/>
+        </p:spPr>
+        <p:style>
+          <a:lnRef idx="1">
+            <a:schemeClr val="accent1"/>
+          </a:lnRef>
+          <a:fillRef idx="3">
+            <a:schemeClr val="accent1"/>
+          </a:fillRef>
+          <a:effectRef idx="2">
+            <a:schemeClr val="accent1"/>
+          </a:effectRef>
+          <a:fontRef idx="minor">
+            <a:schemeClr val="lt1"/>
+          </a:fontRef>
+        </p:style>
+        <p:txBody>
+          <a:bodyPr rtlCol="0" anchor="ctr"/>
+          <a:lstStyle/>
+          <a:p>
+            <a:pPr algn="ctr"/>
+          </a:p>
+        </p:txBody>
+      </p:sp>
+      <p:sp>
+        <p:nvSpPr>
+          <p:cNvPr id="13" name="Rectangle 12"/>
+          <p:cNvSpPr/>
+          <p:nvPr/>
+        </p:nvSpPr>
+        <p:spPr>
+          <a:xfrm rot="2100000">
+            <a:off x="11109960" y="274320"/>
+            <a:ext cx="1005840" cy="365760"/>
+          </a:xfrm>
+          <a:prstGeom prst="rect">
+            <a:avLst/>
+          </a:prstGeom>
+          <a:solidFill>
+            <a:srgbClr val="1D4ED8"/>
+          </a:solidFill>
+          <a:ln>
+            <a:noFill/>
+          </a:ln>
+          <a:effectLst/>
+        </p:spPr>
+        <p:style>
+          <a:lnRef idx="1">
+            <a:schemeClr val="accent1"/>
+          </a:lnRef>
+          <a:fillRef idx="3">
+            <a:schemeClr val="accent1"/>
+          </a:fillRef>
+          <a:effectRef idx="2">
+            <a:schemeClr val="accent1"/>
+          </a:effectRef>
+          <a:fontRef idx="minor">
+            <a:schemeClr val="lt1"/>
+          </a:fontRef>
+        </p:style>
+        <p:txBody>
+          <a:bodyPr rtlCol="0" anchor="ctr"/>
+          <a:lstStyle/>
+          <a:p>
+            <a:pPr algn="ctr"/>
+          </a:p>
+        </p:txBody>
+      </p:sp>
+      <p:sp>
+        <p:nvSpPr>
+          <p:cNvPr id="14" name="Rectangle 13"/>
+          <p:cNvSpPr/>
+          <p:nvPr/>
+        </p:nvSpPr>
+        <p:spPr>
+          <a:xfrm rot="2100000">
+            <a:off x="10835640" y="5989320"/>
+            <a:ext cx="1280160" cy="457200"/>
+          </a:xfrm>
+          <a:prstGeom prst="rect">
+            <a:avLst/>
+          </a:prstGeom>
+          <a:solidFill>
+            <a:srgbClr val="1E3A8A"/>
+          </a:solidFill>
+          <a:ln>
+            <a:noFill/>
+          </a:ln>
+          <a:effectLst/>
+        </p:spPr>
+        <p:style>
+          <a:lnRef idx="1">
+            <a:schemeClr val="accent1"/>
+          </a:lnRef>
+          <a:fillRef idx="3">
+            <a:schemeClr val="accent1"/>
+          </a:fillRef>
+          <a:effectRef idx="2">
+            <a:schemeClr val="accent1"/>
+          </a:effectRef>
+          <a:fontRef idx="minor">
+            <a:schemeClr val="lt1"/>
+          </a:fontRef>
+        </p:style>
+        <p:txBody>
+          <a:bodyPr rtlCol="0" anchor="ctr"/>
+          <a:lstStyle/>
+          <a:p>
+            <a:pPr algn="ctr"/>
+          </a:p>
+        </p:txBody>
+      </p:sp>
+      <p:sp>
+        <p:nvSpPr>
+          <p:cNvPr id="15" name="Rectangle 14"/>
+          <p:cNvSpPr/>
+          <p:nvPr/>
+        </p:nvSpPr>
+        <p:spPr>
+          <a:xfrm rot="2100000">
+            <a:off x="11109960" y="6199632"/>
+            <a:ext cx="1005840" cy="365760"/>
+          </a:xfrm>
+          <a:prstGeom prst="rect">
+            <a:avLst/>
+          </a:prstGeom>
+          <a:solidFill>
+            <a:srgbClr val="1D4ED8"/>
+          </a:solidFill>
+          <a:ln>
+            <a:noFill/>
+          </a:ln>
+          <a:effectLst/>
+        </p:spPr>
+        <p:style>
+          <a:lnRef idx="1">
+            <a:schemeClr val="accent1"/>
+          </a:lnRef>
+          <a:fillRef idx="3">
+            <a:schemeClr val="accent1"/>
+          </a:fillRef>
+          <a:effectRef idx="2">
+            <a:schemeClr val="accent1"/>
+          </a:effectRef>
+          <a:fontRef idx="minor">
+            <a:schemeClr val="lt1"/>
+          </a:fontRef>
+        </p:style>
+        <p:txBody>
+          <a:bodyPr rtlCol="0" anchor="ctr"/>
+          <a:lstStyle/>
+          <a:p>
+            <a:pPr algn="ctr"/>
           </a:p>
         </p:txBody>
       </p:sp>

--- a/docs/Finans_Portali_Sunum.pptx
+++ b/docs/Finans_Portali_Sunum.pptx
@@ -3146,16 +3146,187 @@
       </p:sp>
       <p:sp>
         <p:nvSpPr>
-          <p:cNvPr id="3" name="Rectangle 2"/>
+          <p:cNvPr id="6" name="TextBox 5"/>
+          <p:cNvSpPr txBox="1"/>
+          <p:nvPr/>
+        </p:nvSpPr>
+        <p:spPr>
+          <a:xfrm>
+            <a:off x="2194560" y="2011680"/>
+            <a:ext cx="8778240" cy="2560320"/>
+          </a:xfrm>
+          <a:prstGeom prst="rect">
+            <a:avLst/>
+          </a:prstGeom>
+          <a:noFill/>
+        </p:spPr>
+        <p:txBody>
+          <a:bodyPr wrap="square" lIns="0" tIns="0" rIns="0" bIns="0" anchor="t">
+            <a:spAutoFit/>
+          </a:bodyPr>
+          <a:lstStyle/>
+          <a:p>
+            <a:pPr algn="l">
+              <a:spcAft>
+                <a:spcPts val="600"/>
+              </a:spcAft>
+            </a:pPr>
+            <a:r>
+              <a:rPr sz="5800" b="1">
+                <a:solidFill>
+                  <a:srgbClr val="1E3A8A"/>
+                </a:solidFill>
+                <a:latin typeface="Cambria"/>
+              </a:rPr>
+              <a:t>Finans Portalı</a:t>
+            </a:r>
+          </a:p>
+          <a:p>
+            <a:pPr algn="l">
+              <a:spcAft>
+                <a:spcPts val="400"/>
+              </a:spcAft>
+            </a:pPr>
+            <a:r>
+              <a:rPr sz="2000" b="0">
+                <a:solidFill>
+                  <a:srgbClr val="475569"/>
+                </a:solidFill>
+                <a:latin typeface="Calibri"/>
+              </a:rPr>
+              <a:t>Çok-varlıklı finans portföy &amp; piyasa takip platformu</a:t>
+            </a:r>
+          </a:p>
+        </p:txBody>
+      </p:sp>
+      <p:sp>
+        <p:nvSpPr>
+          <p:cNvPr id="7" name="Rectangle 6"/>
           <p:cNvSpPr/>
           <p:nvPr/>
         </p:nvSpPr>
         <p:spPr>
-          <a:xfrm rot="720000">
-            <a:off x="-914400" y="-914400"/>
-            <a:ext cx="2743200" cy="8686800"/>
+          <a:xfrm>
+            <a:off x="2240280" y="3794760"/>
+            <a:ext cx="3291840" cy="54864"/>
           </a:xfrm>
           <a:prstGeom prst="rect">
+            <a:avLst/>
+          </a:prstGeom>
+          <a:solidFill>
+            <a:srgbClr val="1D4ED8"/>
+          </a:solidFill>
+          <a:ln>
+            <a:noFill/>
+          </a:ln>
+          <a:effectLst/>
+        </p:spPr>
+        <p:style>
+          <a:lnRef idx="1">
+            <a:schemeClr val="accent1"/>
+          </a:lnRef>
+          <a:fillRef idx="3">
+            <a:schemeClr val="accent1"/>
+          </a:fillRef>
+          <a:effectRef idx="2">
+            <a:schemeClr val="accent1"/>
+          </a:effectRef>
+          <a:fontRef idx="minor">
+            <a:schemeClr val="lt1"/>
+          </a:fontRef>
+        </p:style>
+        <p:txBody>
+          <a:bodyPr rtlCol="0" anchor="ctr"/>
+          <a:lstStyle/>
+          <a:p>
+            <a:pPr algn="ctr"/>
+            <a:endParaRPr/>
+          </a:p>
+        </p:txBody>
+      </p:sp>
+      <p:sp>
+        <p:nvSpPr>
+          <p:cNvPr id="8" name="TextBox 7"/>
+          <p:cNvSpPr txBox="1"/>
+          <p:nvPr/>
+        </p:nvSpPr>
+        <p:spPr>
+          <a:xfrm>
+            <a:off x="2194560" y="4069080"/>
+            <a:ext cx="8778240" cy="1645920"/>
+          </a:xfrm>
+          <a:prstGeom prst="rect">
+            <a:avLst/>
+          </a:prstGeom>
+          <a:noFill/>
+        </p:spPr>
+        <p:txBody>
+          <a:bodyPr wrap="square" lIns="0" tIns="0" rIns="0" bIns="0" anchor="t">
+            <a:spAutoFit/>
+          </a:bodyPr>
+          <a:lstStyle/>
+          <a:p>
+            <a:pPr algn="l">
+              <a:spcAft>
+                <a:spcPts val="1000"/>
+              </a:spcAft>
+            </a:pPr>
+            <a:r>
+              <a:rPr sz="2200" b="1">
+                <a:solidFill>
+                  <a:srgbClr val="1D4ED8"/>
+                </a:solidFill>
+                <a:latin typeface="Cambria"/>
+              </a:rPr>
+              <a:t>Proje Sunumu</a:t>
+            </a:r>
+          </a:p>
+          <a:p>
+            <a:pPr algn="l">
+              <a:spcAft>
+                <a:spcPts val="200"/>
+              </a:spcAft>
+            </a:pPr>
+            <a:r>
+              <a:rPr sz="1800" b="1">
+                <a:solidFill>
+                  <a:srgbClr val="1F2937"/>
+                </a:solidFill>
+                <a:latin typeface="Calibri"/>
+              </a:rPr>
+              <a:t>Yiğit Şeker</a:t>
+            </a:r>
+          </a:p>
+          <a:p>
+            <a:pPr algn="l">
+              <a:spcAft>
+                <a:spcPts val="600"/>
+              </a:spcAft>
+            </a:pPr>
+            <a:r>
+              <a:rPr sz="1400" b="0">
+                <a:solidFill>
+                  <a:srgbClr val="475569"/>
+                </a:solidFill>
+                <a:latin typeface="Calibri"/>
+              </a:rPr>
+              <a:t>Sakarya Üniversitesi · Yazılım Mühendisliği</a:t>
+            </a:r>
+          </a:p>
+        </p:txBody>
+      </p:sp>
+      <p:sp>
+        <p:nvSpPr>
+          <p:cNvPr id="9" name="Right Triangle 8"/>
+          <p:cNvSpPr/>
+          <p:nvPr/>
+        </p:nvSpPr>
+        <p:spPr>
+          <a:xfrm flipV="1">
+            <a:off x="0" y="0"/>
+            <a:ext cx="3017520" cy="2103120"/>
+          </a:xfrm>
+          <a:prstGeom prst="rtTriangle">
             <a:avLst/>
           </a:prstGeom>
           <a:solidFill>
@@ -3185,22 +3356,21 @@
           <a:lstStyle/>
           <a:p>
             <a:pPr algn="ctr"/>
-            <a:endParaRPr/>
-          </a:p>
-        </p:txBody>
-      </p:sp>
-      <p:sp>
-        <p:nvSpPr>
-          <p:cNvPr id="4" name="Rectangle 3"/>
+          </a:p>
+        </p:txBody>
+      </p:sp>
+      <p:sp>
+        <p:nvSpPr>
+          <p:cNvPr id="10" name="Right Triangle 9"/>
           <p:cNvSpPr/>
           <p:nvPr/>
         </p:nvSpPr>
         <p:spPr>
-          <a:xfrm rot="720000">
-            <a:off x="-1097280" y="-914400"/>
-            <a:ext cx="2011680" cy="8686800"/>
-          </a:xfrm>
-          <a:prstGeom prst="rect">
+          <a:xfrm flipV="1">
+            <a:off x="0" y="0"/>
+            <a:ext cx="1965960" cy="1371600"/>
+          </a:xfrm>
+          <a:prstGeom prst="rtTriangle">
             <a:avLst/>
           </a:prstGeom>
           <a:solidFill>
@@ -3230,22 +3400,21 @@
           <a:lstStyle/>
           <a:p>
             <a:pPr algn="ctr"/>
-            <a:endParaRPr/>
-          </a:p>
-        </p:txBody>
-      </p:sp>
-      <p:sp>
-        <p:nvSpPr>
-          <p:cNvPr id="5" name="Rectangle 4"/>
+          </a:p>
+        </p:txBody>
+      </p:sp>
+      <p:sp>
+        <p:nvSpPr>
+          <p:cNvPr id="11" name="Right Triangle 10"/>
           <p:cNvSpPr/>
           <p:nvPr/>
         </p:nvSpPr>
         <p:spPr>
-          <a:xfrm rot="1800000">
-            <a:off x="10698480" y="5394960"/>
-            <a:ext cx="2926080" cy="2377440"/>
-          </a:xfrm>
-          <a:prstGeom prst="rect">
+          <a:xfrm flipH="1">
+            <a:off x="9174480" y="4754880"/>
+            <a:ext cx="3017520" cy="2103120"/>
+          </a:xfrm>
+          <a:prstGeom prst="rtTriangle">
             <a:avLst/>
           </a:prstGeom>
           <a:solidFill>
@@ -3275,77 +3444,21 @@
           <a:lstStyle/>
           <a:p>
             <a:pPr algn="ctr"/>
-            <a:endParaRPr/>
-          </a:p>
-        </p:txBody>
-      </p:sp>
-      <p:sp>
-        <p:nvSpPr>
-          <p:cNvPr id="6" name="TextBox 5"/>
-          <p:cNvSpPr txBox="1"/>
-          <p:nvPr/>
-        </p:nvSpPr>
-        <p:spPr>
-          <a:xfrm>
-            <a:off x="2194560" y="2011680"/>
-            <a:ext cx="8778240" cy="2560320"/>
-          </a:xfrm>
-          <a:prstGeom prst="rect">
-            <a:avLst/>
-          </a:prstGeom>
-          <a:noFill/>
-        </p:spPr>
-        <p:txBody>
-          <a:bodyPr wrap="square" lIns="0" tIns="0" rIns="0" bIns="0" anchor="t">
-            <a:spAutoFit/>
-          </a:bodyPr>
-          <a:lstStyle/>
-          <a:p>
-            <a:pPr algn="l">
-              <a:spcAft>
-                <a:spcPts val="600"/>
-              </a:spcAft>
-            </a:pPr>
-            <a:r>
-              <a:rPr sz="5800" b="1">
-                <a:solidFill>
-                  <a:srgbClr val="1E3A8A"/>
-                </a:solidFill>
-                <a:latin typeface="Cambria"/>
-              </a:rPr>
-              <a:t>Finans Portalı</a:t>
-            </a:r>
-          </a:p>
-          <a:p>
-            <a:pPr algn="l">
-              <a:spcAft>
-                <a:spcPts val="400"/>
-              </a:spcAft>
-            </a:pPr>
-            <a:r>
-              <a:rPr sz="2000" b="0">
-                <a:solidFill>
-                  <a:srgbClr val="475569"/>
-                </a:solidFill>
-                <a:latin typeface="Calibri"/>
-              </a:rPr>
-              <a:t>Çok-varlıklı finans portföy &amp; piyasa takip platformu</a:t>
-            </a:r>
-          </a:p>
-        </p:txBody>
-      </p:sp>
-      <p:sp>
-        <p:nvSpPr>
-          <p:cNvPr id="7" name="Rectangle 6"/>
+          </a:p>
+        </p:txBody>
+      </p:sp>
+      <p:sp>
+        <p:nvSpPr>
+          <p:cNvPr id="12" name="Right Triangle 11"/>
           <p:cNvSpPr/>
           <p:nvPr/>
         </p:nvSpPr>
         <p:spPr>
-          <a:xfrm>
-            <a:off x="2240280" y="3794760"/>
-            <a:ext cx="3291840" cy="54864"/>
-          </a:xfrm>
-          <a:prstGeom prst="rect">
+          <a:xfrm flipH="1">
+            <a:off x="10226040" y="5486400"/>
+            <a:ext cx="1965960" cy="1371600"/>
+          </a:xfrm>
+          <a:prstGeom prst="rtTriangle">
             <a:avLst/>
           </a:prstGeom>
           <a:solidFill>
@@ -3375,78 +3488,6 @@
           <a:lstStyle/>
           <a:p>
             <a:pPr algn="ctr"/>
-            <a:endParaRPr/>
-          </a:p>
-        </p:txBody>
-      </p:sp>
-      <p:sp>
-        <p:nvSpPr>
-          <p:cNvPr id="8" name="TextBox 7"/>
-          <p:cNvSpPr txBox="1"/>
-          <p:nvPr/>
-        </p:nvSpPr>
-        <p:spPr>
-          <a:xfrm>
-            <a:off x="2194560" y="4069080"/>
-            <a:ext cx="8778240" cy="1645920"/>
-          </a:xfrm>
-          <a:prstGeom prst="rect">
-            <a:avLst/>
-          </a:prstGeom>
-          <a:noFill/>
-        </p:spPr>
-        <p:txBody>
-          <a:bodyPr wrap="square" lIns="0" tIns="0" rIns="0" bIns="0" anchor="t">
-            <a:spAutoFit/>
-          </a:bodyPr>
-          <a:lstStyle/>
-          <a:p>
-            <a:pPr algn="l">
-              <a:spcAft>
-                <a:spcPts val="1000"/>
-              </a:spcAft>
-            </a:pPr>
-            <a:r>
-              <a:rPr sz="2200" b="1">
-                <a:solidFill>
-                  <a:srgbClr val="1D4ED8"/>
-                </a:solidFill>
-                <a:latin typeface="Cambria"/>
-              </a:rPr>
-              <a:t>Proje Sunumu</a:t>
-            </a:r>
-          </a:p>
-          <a:p>
-            <a:pPr algn="l">
-              <a:spcAft>
-                <a:spcPts val="200"/>
-              </a:spcAft>
-            </a:pPr>
-            <a:r>
-              <a:rPr sz="1800" b="1">
-                <a:solidFill>
-                  <a:srgbClr val="1F2937"/>
-                </a:solidFill>
-                <a:latin typeface="Calibri"/>
-              </a:rPr>
-              <a:t>Yiğit Şeker</a:t>
-            </a:r>
-          </a:p>
-          <a:p>
-            <a:pPr algn="l">
-              <a:spcAft>
-                <a:spcPts val="600"/>
-              </a:spcAft>
-            </a:pPr>
-            <a:r>
-              <a:rPr sz="1400" b="0">
-                <a:solidFill>
-                  <a:srgbClr val="475569"/>
-                </a:solidFill>
-                <a:latin typeface="Calibri"/>
-              </a:rPr>
-              <a:t>Sakarya Üniversitesi · Yazılım Mühendisliği</a:t>
-            </a:r>
           </a:p>
         </p:txBody>
       </p:sp>
@@ -4075,16 +4116,16 @@
       </p:sp>
       <p:sp>
         <p:nvSpPr>
-          <p:cNvPr id="12" name="Rectangle 11"/>
+          <p:cNvPr id="12" name="Right Triangle 11"/>
           <p:cNvSpPr/>
           <p:nvPr/>
         </p:nvSpPr>
         <p:spPr>
-          <a:xfrm rot="2100000">
-            <a:off x="10835640" y="411480"/>
-            <a:ext cx="1280160" cy="457200"/>
-          </a:xfrm>
-          <a:prstGeom prst="rect">
+          <a:xfrm flipV="1" flipH="1">
+            <a:off x="10500360" y="0"/>
+            <a:ext cx="1691640" cy="1143000"/>
+          </a:xfrm>
+          <a:prstGeom prst="rtTriangle">
             <a:avLst/>
           </a:prstGeom>
           <a:solidFill>
@@ -4119,16 +4160,16 @@
       </p:sp>
       <p:sp>
         <p:nvSpPr>
-          <p:cNvPr id="13" name="Rectangle 12"/>
+          <p:cNvPr id="13" name="Right Triangle 12"/>
           <p:cNvSpPr/>
           <p:nvPr/>
         </p:nvSpPr>
         <p:spPr>
-          <a:xfrm rot="2100000">
-            <a:off x="11109960" y="274320"/>
-            <a:ext cx="1005840" cy="365760"/>
-          </a:xfrm>
-          <a:prstGeom prst="rect">
+          <a:xfrm flipV="1" flipH="1">
+            <a:off x="11094720" y="0"/>
+            <a:ext cx="1097280" cy="731520"/>
+          </a:xfrm>
+          <a:prstGeom prst="rtTriangle">
             <a:avLst/>
           </a:prstGeom>
           <a:solidFill>
@@ -4163,16 +4204,16 @@
       </p:sp>
       <p:sp>
         <p:nvSpPr>
-          <p:cNvPr id="14" name="Rectangle 13"/>
+          <p:cNvPr id="14" name="Right Triangle 13"/>
           <p:cNvSpPr/>
           <p:nvPr/>
         </p:nvSpPr>
         <p:spPr>
-          <a:xfrm rot="2100000">
-            <a:off x="10835640" y="5989320"/>
-            <a:ext cx="1280160" cy="457200"/>
-          </a:xfrm>
-          <a:prstGeom prst="rect">
+          <a:xfrm flipH="1">
+            <a:off x="10500360" y="5715000"/>
+            <a:ext cx="1691640" cy="1143000"/>
+          </a:xfrm>
+          <a:prstGeom prst="rtTriangle">
             <a:avLst/>
           </a:prstGeom>
           <a:solidFill>
@@ -4207,16 +4248,16 @@
       </p:sp>
       <p:sp>
         <p:nvSpPr>
-          <p:cNvPr id="15" name="Rectangle 14"/>
+          <p:cNvPr id="15" name="Right Triangle 14"/>
           <p:cNvSpPr/>
           <p:nvPr/>
         </p:nvSpPr>
         <p:spPr>
-          <a:xfrm rot="2100000">
-            <a:off x="11109960" y="6199632"/>
-            <a:ext cx="1005840" cy="365760"/>
-          </a:xfrm>
-          <a:prstGeom prst="rect">
+          <a:xfrm flipH="1">
+            <a:off x="11094720" y="6126480"/>
+            <a:ext cx="1097280" cy="731520"/>
+          </a:xfrm>
+          <a:prstGeom prst="rtTriangle">
             <a:avLst/>
           </a:prstGeom>
           <a:solidFill>
@@ -4563,16 +4604,16 @@
       </p:sp>
       <p:sp>
         <p:nvSpPr>
-          <p:cNvPr id="11" name="Rectangle 10"/>
+          <p:cNvPr id="11" name="Right Triangle 10"/>
           <p:cNvSpPr/>
           <p:nvPr/>
         </p:nvSpPr>
         <p:spPr>
-          <a:xfrm rot="2100000">
-            <a:off x="10835640" y="411480"/>
-            <a:ext cx="1280160" cy="457200"/>
-          </a:xfrm>
-          <a:prstGeom prst="rect">
+          <a:xfrm flipV="1" flipH="1">
+            <a:off x="10500360" y="0"/>
+            <a:ext cx="1691640" cy="1143000"/>
+          </a:xfrm>
+          <a:prstGeom prst="rtTriangle">
             <a:avLst/>
           </a:prstGeom>
           <a:solidFill>
@@ -4607,16 +4648,16 @@
       </p:sp>
       <p:sp>
         <p:nvSpPr>
-          <p:cNvPr id="12" name="Rectangle 11"/>
+          <p:cNvPr id="12" name="Right Triangle 11"/>
           <p:cNvSpPr/>
           <p:nvPr/>
         </p:nvSpPr>
         <p:spPr>
-          <a:xfrm rot="2100000">
-            <a:off x="11109960" y="274320"/>
-            <a:ext cx="1005840" cy="365760"/>
-          </a:xfrm>
-          <a:prstGeom prst="rect">
+          <a:xfrm flipV="1" flipH="1">
+            <a:off x="11094720" y="0"/>
+            <a:ext cx="1097280" cy="731520"/>
+          </a:xfrm>
+          <a:prstGeom prst="rtTriangle">
             <a:avLst/>
           </a:prstGeom>
           <a:solidFill>
@@ -4651,16 +4692,16 @@
       </p:sp>
       <p:sp>
         <p:nvSpPr>
-          <p:cNvPr id="13" name="Rectangle 12"/>
+          <p:cNvPr id="13" name="Right Triangle 12"/>
           <p:cNvSpPr/>
           <p:nvPr/>
         </p:nvSpPr>
         <p:spPr>
-          <a:xfrm rot="2100000">
-            <a:off x="10835640" y="5989320"/>
-            <a:ext cx="1280160" cy="457200"/>
-          </a:xfrm>
-          <a:prstGeom prst="rect">
+          <a:xfrm flipH="1">
+            <a:off x="10500360" y="5715000"/>
+            <a:ext cx="1691640" cy="1143000"/>
+          </a:xfrm>
+          <a:prstGeom prst="rtTriangle">
             <a:avLst/>
           </a:prstGeom>
           <a:solidFill>
@@ -4695,16 +4736,16 @@
       </p:sp>
       <p:sp>
         <p:nvSpPr>
-          <p:cNvPr id="14" name="Rectangle 13"/>
+          <p:cNvPr id="14" name="Right Triangle 13"/>
           <p:cNvSpPr/>
           <p:nvPr/>
         </p:nvSpPr>
         <p:spPr>
-          <a:xfrm rot="2100000">
-            <a:off x="11109960" y="6199632"/>
-            <a:ext cx="1005840" cy="365760"/>
-          </a:xfrm>
-          <a:prstGeom prst="rect">
+          <a:xfrm flipH="1">
+            <a:off x="11094720" y="6126480"/>
+            <a:ext cx="1097280" cy="731520"/>
+          </a:xfrm>
+          <a:prstGeom prst="rtTriangle">
             <a:avLst/>
           </a:prstGeom>
           <a:solidFill>
@@ -5763,16 +5804,16 @@
       </p:sp>
       <p:sp>
         <p:nvSpPr>
-          <p:cNvPr id="27" name="Rectangle 26"/>
+          <p:cNvPr id="27" name="Right Triangle 26"/>
           <p:cNvSpPr/>
           <p:nvPr/>
         </p:nvSpPr>
         <p:spPr>
-          <a:xfrm rot="2100000">
-            <a:off x="10835640" y="411480"/>
-            <a:ext cx="1280160" cy="457200"/>
-          </a:xfrm>
-          <a:prstGeom prst="rect">
+          <a:xfrm flipV="1" flipH="1">
+            <a:off x="10500360" y="0"/>
+            <a:ext cx="1691640" cy="1143000"/>
+          </a:xfrm>
+          <a:prstGeom prst="rtTriangle">
             <a:avLst/>
           </a:prstGeom>
           <a:solidFill>
@@ -5807,16 +5848,16 @@
       </p:sp>
       <p:sp>
         <p:nvSpPr>
-          <p:cNvPr id="28" name="Rectangle 27"/>
+          <p:cNvPr id="28" name="Right Triangle 27"/>
           <p:cNvSpPr/>
           <p:nvPr/>
         </p:nvSpPr>
         <p:spPr>
-          <a:xfrm rot="2100000">
-            <a:off x="11109960" y="274320"/>
-            <a:ext cx="1005840" cy="365760"/>
-          </a:xfrm>
-          <a:prstGeom prst="rect">
+          <a:xfrm flipV="1" flipH="1">
+            <a:off x="11094720" y="0"/>
+            <a:ext cx="1097280" cy="731520"/>
+          </a:xfrm>
+          <a:prstGeom prst="rtTriangle">
             <a:avLst/>
           </a:prstGeom>
           <a:solidFill>
@@ -5851,16 +5892,16 @@
       </p:sp>
       <p:sp>
         <p:nvSpPr>
-          <p:cNvPr id="29" name="Rectangle 28"/>
+          <p:cNvPr id="29" name="Right Triangle 28"/>
           <p:cNvSpPr/>
           <p:nvPr/>
         </p:nvSpPr>
         <p:spPr>
-          <a:xfrm rot="2100000">
-            <a:off x="10835640" y="5989320"/>
-            <a:ext cx="1280160" cy="457200"/>
-          </a:xfrm>
-          <a:prstGeom prst="rect">
+          <a:xfrm flipH="1">
+            <a:off x="10500360" y="5715000"/>
+            <a:ext cx="1691640" cy="1143000"/>
+          </a:xfrm>
+          <a:prstGeom prst="rtTriangle">
             <a:avLst/>
           </a:prstGeom>
           <a:solidFill>
@@ -5895,16 +5936,16 @@
       </p:sp>
       <p:sp>
         <p:nvSpPr>
-          <p:cNvPr id="30" name="Rectangle 29"/>
+          <p:cNvPr id="30" name="Right Triangle 29"/>
           <p:cNvSpPr/>
           <p:nvPr/>
         </p:nvSpPr>
         <p:spPr>
-          <a:xfrm rot="2100000">
-            <a:off x="11109960" y="6199632"/>
-            <a:ext cx="1005840" cy="365760"/>
-          </a:xfrm>
-          <a:prstGeom prst="rect">
+          <a:xfrm flipH="1">
+            <a:off x="11094720" y="6126480"/>
+            <a:ext cx="1097280" cy="731520"/>
+          </a:xfrm>
+          <a:prstGeom prst="rtTriangle">
             <a:avLst/>
           </a:prstGeom>
           <a:solidFill>
@@ -6753,16 +6794,16 @@
       </p:sp>
       <p:sp>
         <p:nvSpPr>
-          <p:cNvPr id="21" name="Rectangle 20"/>
+          <p:cNvPr id="21" name="Right Triangle 20"/>
           <p:cNvSpPr/>
           <p:nvPr/>
         </p:nvSpPr>
         <p:spPr>
-          <a:xfrm rot="2100000">
-            <a:off x="10835640" y="411480"/>
-            <a:ext cx="1280160" cy="457200"/>
-          </a:xfrm>
-          <a:prstGeom prst="rect">
+          <a:xfrm flipV="1" flipH="1">
+            <a:off x="10500360" y="0"/>
+            <a:ext cx="1691640" cy="1143000"/>
+          </a:xfrm>
+          <a:prstGeom prst="rtTriangle">
             <a:avLst/>
           </a:prstGeom>
           <a:solidFill>
@@ -6797,16 +6838,16 @@
       </p:sp>
       <p:sp>
         <p:nvSpPr>
-          <p:cNvPr id="22" name="Rectangle 21"/>
+          <p:cNvPr id="22" name="Right Triangle 21"/>
           <p:cNvSpPr/>
           <p:nvPr/>
         </p:nvSpPr>
         <p:spPr>
-          <a:xfrm rot="2100000">
-            <a:off x="11109960" y="274320"/>
-            <a:ext cx="1005840" cy="365760"/>
-          </a:xfrm>
-          <a:prstGeom prst="rect">
+          <a:xfrm flipV="1" flipH="1">
+            <a:off x="11094720" y="0"/>
+            <a:ext cx="1097280" cy="731520"/>
+          </a:xfrm>
+          <a:prstGeom prst="rtTriangle">
             <a:avLst/>
           </a:prstGeom>
           <a:solidFill>
@@ -6841,16 +6882,16 @@
       </p:sp>
       <p:sp>
         <p:nvSpPr>
-          <p:cNvPr id="23" name="Rectangle 22"/>
+          <p:cNvPr id="23" name="Right Triangle 22"/>
           <p:cNvSpPr/>
           <p:nvPr/>
         </p:nvSpPr>
         <p:spPr>
-          <a:xfrm rot="2100000">
-            <a:off x="10835640" y="5989320"/>
-            <a:ext cx="1280160" cy="457200"/>
-          </a:xfrm>
-          <a:prstGeom prst="rect">
+          <a:xfrm flipH="1">
+            <a:off x="10500360" y="5715000"/>
+            <a:ext cx="1691640" cy="1143000"/>
+          </a:xfrm>
+          <a:prstGeom prst="rtTriangle">
             <a:avLst/>
           </a:prstGeom>
           <a:solidFill>
@@ -6885,16 +6926,16 @@
       </p:sp>
       <p:sp>
         <p:nvSpPr>
-          <p:cNvPr id="24" name="Rectangle 23"/>
+          <p:cNvPr id="24" name="Right Triangle 23"/>
           <p:cNvSpPr/>
           <p:nvPr/>
         </p:nvSpPr>
         <p:spPr>
-          <a:xfrm rot="2100000">
-            <a:off x="11109960" y="6199632"/>
-            <a:ext cx="1005840" cy="365760"/>
-          </a:xfrm>
-          <a:prstGeom prst="rect">
+          <a:xfrm flipH="1">
+            <a:off x="11094720" y="6126480"/>
+            <a:ext cx="1097280" cy="731520"/>
+          </a:xfrm>
+          <a:prstGeom prst="rtTriangle">
             <a:avLst/>
           </a:prstGeom>
           <a:solidFill>
@@ -7449,16 +7490,16 @@
       </p:sp>
       <p:sp>
         <p:nvSpPr>
-          <p:cNvPr id="11" name="Rectangle 10"/>
+          <p:cNvPr id="11" name="Right Triangle 10"/>
           <p:cNvSpPr/>
           <p:nvPr/>
         </p:nvSpPr>
         <p:spPr>
-          <a:xfrm rot="2100000">
-            <a:off x="10835640" y="411480"/>
-            <a:ext cx="1280160" cy="457200"/>
-          </a:xfrm>
-          <a:prstGeom prst="rect">
+          <a:xfrm flipV="1" flipH="1">
+            <a:off x="10500360" y="0"/>
+            <a:ext cx="1691640" cy="1143000"/>
+          </a:xfrm>
+          <a:prstGeom prst="rtTriangle">
             <a:avLst/>
           </a:prstGeom>
           <a:solidFill>
@@ -7493,16 +7534,16 @@
       </p:sp>
       <p:sp>
         <p:nvSpPr>
-          <p:cNvPr id="12" name="Rectangle 11"/>
+          <p:cNvPr id="12" name="Right Triangle 11"/>
           <p:cNvSpPr/>
           <p:nvPr/>
         </p:nvSpPr>
         <p:spPr>
-          <a:xfrm rot="2100000">
-            <a:off x="11109960" y="274320"/>
-            <a:ext cx="1005840" cy="365760"/>
-          </a:xfrm>
-          <a:prstGeom prst="rect">
+          <a:xfrm flipV="1" flipH="1">
+            <a:off x="11094720" y="0"/>
+            <a:ext cx="1097280" cy="731520"/>
+          </a:xfrm>
+          <a:prstGeom prst="rtTriangle">
             <a:avLst/>
           </a:prstGeom>
           <a:solidFill>
@@ -7537,16 +7578,16 @@
       </p:sp>
       <p:sp>
         <p:nvSpPr>
-          <p:cNvPr id="13" name="Rectangle 12"/>
+          <p:cNvPr id="13" name="Right Triangle 12"/>
           <p:cNvSpPr/>
           <p:nvPr/>
         </p:nvSpPr>
         <p:spPr>
-          <a:xfrm rot="2100000">
-            <a:off x="10835640" y="5989320"/>
-            <a:ext cx="1280160" cy="457200"/>
-          </a:xfrm>
-          <a:prstGeom prst="rect">
+          <a:xfrm flipH="1">
+            <a:off x="10500360" y="5715000"/>
+            <a:ext cx="1691640" cy="1143000"/>
+          </a:xfrm>
+          <a:prstGeom prst="rtTriangle">
             <a:avLst/>
           </a:prstGeom>
           <a:solidFill>
@@ -7581,16 +7622,16 @@
       </p:sp>
       <p:sp>
         <p:nvSpPr>
-          <p:cNvPr id="14" name="Rectangle 13"/>
+          <p:cNvPr id="14" name="Right Triangle 13"/>
           <p:cNvSpPr/>
           <p:nvPr/>
         </p:nvSpPr>
         <p:spPr>
-          <a:xfrm rot="2100000">
-            <a:off x="11109960" y="6199632"/>
-            <a:ext cx="1005840" cy="365760"/>
-          </a:xfrm>
-          <a:prstGeom prst="rect">
+          <a:xfrm flipH="1">
+            <a:off x="11094720" y="6126480"/>
+            <a:ext cx="1097280" cy="731520"/>
+          </a:xfrm>
+          <a:prstGeom prst="rtTriangle">
             <a:avLst/>
           </a:prstGeom>
           <a:solidFill>
@@ -8461,16 +8502,16 @@
       </p:sp>
       <p:sp>
         <p:nvSpPr>
-          <p:cNvPr id="11" name="Rectangle 10"/>
+          <p:cNvPr id="11" name="Right Triangle 10"/>
           <p:cNvSpPr/>
           <p:nvPr/>
         </p:nvSpPr>
         <p:spPr>
-          <a:xfrm rot="2100000">
-            <a:off x="10835640" y="411480"/>
-            <a:ext cx="1280160" cy="457200"/>
-          </a:xfrm>
-          <a:prstGeom prst="rect">
+          <a:xfrm flipV="1" flipH="1">
+            <a:off x="10500360" y="0"/>
+            <a:ext cx="1691640" cy="1143000"/>
+          </a:xfrm>
+          <a:prstGeom prst="rtTriangle">
             <a:avLst/>
           </a:prstGeom>
           <a:solidFill>
@@ -8505,16 +8546,16 @@
       </p:sp>
       <p:sp>
         <p:nvSpPr>
-          <p:cNvPr id="12" name="Rectangle 11"/>
+          <p:cNvPr id="12" name="Right Triangle 11"/>
           <p:cNvSpPr/>
           <p:nvPr/>
         </p:nvSpPr>
         <p:spPr>
-          <a:xfrm rot="2100000">
-            <a:off x="11109960" y="274320"/>
-            <a:ext cx="1005840" cy="365760"/>
-          </a:xfrm>
-          <a:prstGeom prst="rect">
+          <a:xfrm flipV="1" flipH="1">
+            <a:off x="11094720" y="0"/>
+            <a:ext cx="1097280" cy="731520"/>
+          </a:xfrm>
+          <a:prstGeom prst="rtTriangle">
             <a:avLst/>
           </a:prstGeom>
           <a:solidFill>
@@ -8549,16 +8590,16 @@
       </p:sp>
       <p:sp>
         <p:nvSpPr>
-          <p:cNvPr id="13" name="Rectangle 12"/>
+          <p:cNvPr id="13" name="Right Triangle 12"/>
           <p:cNvSpPr/>
           <p:nvPr/>
         </p:nvSpPr>
         <p:spPr>
-          <a:xfrm rot="2100000">
-            <a:off x="10835640" y="5989320"/>
-            <a:ext cx="1280160" cy="457200"/>
-          </a:xfrm>
-          <a:prstGeom prst="rect">
+          <a:xfrm flipH="1">
+            <a:off x="10500360" y="5715000"/>
+            <a:ext cx="1691640" cy="1143000"/>
+          </a:xfrm>
+          <a:prstGeom prst="rtTriangle">
             <a:avLst/>
           </a:prstGeom>
           <a:solidFill>
@@ -8593,16 +8634,16 @@
       </p:sp>
       <p:sp>
         <p:nvSpPr>
-          <p:cNvPr id="14" name="Rectangle 13"/>
+          <p:cNvPr id="14" name="Right Triangle 13"/>
           <p:cNvSpPr/>
           <p:nvPr/>
         </p:nvSpPr>
         <p:spPr>
-          <a:xfrm rot="2100000">
-            <a:off x="11109960" y="6199632"/>
-            <a:ext cx="1005840" cy="365760"/>
-          </a:xfrm>
-          <a:prstGeom prst="rect">
+          <a:xfrm flipH="1">
+            <a:off x="11094720" y="6126480"/>
+            <a:ext cx="1097280" cy="731520"/>
+          </a:xfrm>
+          <a:prstGeom prst="rtTriangle">
             <a:avLst/>
           </a:prstGeom>
           <a:solidFill>
@@ -9004,16 +9045,16 @@
       </p:sp>
       <p:sp>
         <p:nvSpPr>
-          <p:cNvPr id="12" name="Rectangle 11"/>
+          <p:cNvPr id="12" name="Right Triangle 11"/>
           <p:cNvSpPr/>
           <p:nvPr/>
         </p:nvSpPr>
         <p:spPr>
-          <a:xfrm rot="2100000">
-            <a:off x="10835640" y="411480"/>
-            <a:ext cx="1280160" cy="457200"/>
-          </a:xfrm>
-          <a:prstGeom prst="rect">
+          <a:xfrm flipV="1" flipH="1">
+            <a:off x="10500360" y="0"/>
+            <a:ext cx="1691640" cy="1143000"/>
+          </a:xfrm>
+          <a:prstGeom prst="rtTriangle">
             <a:avLst/>
           </a:prstGeom>
           <a:solidFill>
@@ -9048,16 +9089,16 @@
       </p:sp>
       <p:sp>
         <p:nvSpPr>
-          <p:cNvPr id="13" name="Rectangle 12"/>
+          <p:cNvPr id="13" name="Right Triangle 12"/>
           <p:cNvSpPr/>
           <p:nvPr/>
         </p:nvSpPr>
         <p:spPr>
-          <a:xfrm rot="2100000">
-            <a:off x="11109960" y="274320"/>
-            <a:ext cx="1005840" cy="365760"/>
-          </a:xfrm>
-          <a:prstGeom prst="rect">
+          <a:xfrm flipV="1" flipH="1">
+            <a:off x="11094720" y="0"/>
+            <a:ext cx="1097280" cy="731520"/>
+          </a:xfrm>
+          <a:prstGeom prst="rtTriangle">
             <a:avLst/>
           </a:prstGeom>
           <a:solidFill>
@@ -9092,16 +9133,16 @@
       </p:sp>
       <p:sp>
         <p:nvSpPr>
-          <p:cNvPr id="14" name="Rectangle 13"/>
+          <p:cNvPr id="14" name="Right Triangle 13"/>
           <p:cNvSpPr/>
           <p:nvPr/>
         </p:nvSpPr>
         <p:spPr>
-          <a:xfrm rot="2100000">
-            <a:off x="10835640" y="5989320"/>
-            <a:ext cx="1280160" cy="457200"/>
-          </a:xfrm>
-          <a:prstGeom prst="rect">
+          <a:xfrm flipH="1">
+            <a:off x="10500360" y="5715000"/>
+            <a:ext cx="1691640" cy="1143000"/>
+          </a:xfrm>
+          <a:prstGeom prst="rtTriangle">
             <a:avLst/>
           </a:prstGeom>
           <a:solidFill>
@@ -9136,16 +9177,16 @@
       </p:sp>
       <p:sp>
         <p:nvSpPr>
-          <p:cNvPr id="15" name="Rectangle 14"/>
+          <p:cNvPr id="15" name="Right Triangle 14"/>
           <p:cNvSpPr/>
           <p:nvPr/>
         </p:nvSpPr>
         <p:spPr>
-          <a:xfrm rot="2100000">
-            <a:off x="11109960" y="6199632"/>
-            <a:ext cx="1005840" cy="365760"/>
-          </a:xfrm>
-          <a:prstGeom prst="rect">
+          <a:xfrm flipH="1">
+            <a:off x="11094720" y="6126480"/>
+            <a:ext cx="1097280" cy="731520"/>
+          </a:xfrm>
+          <a:prstGeom prst="rtTriangle">
             <a:avLst/>
           </a:prstGeom>
           <a:solidFill>
@@ -9507,16 +9548,16 @@
       </p:sp>
       <p:sp>
         <p:nvSpPr>
-          <p:cNvPr id="12" name="Rectangle 11"/>
+          <p:cNvPr id="12" name="Right Triangle 11"/>
           <p:cNvSpPr/>
           <p:nvPr/>
         </p:nvSpPr>
         <p:spPr>
-          <a:xfrm rot="2100000">
-            <a:off x="10835640" y="411480"/>
-            <a:ext cx="1280160" cy="457200"/>
-          </a:xfrm>
-          <a:prstGeom prst="rect">
+          <a:xfrm flipV="1" flipH="1">
+            <a:off x="10500360" y="0"/>
+            <a:ext cx="1691640" cy="1143000"/>
+          </a:xfrm>
+          <a:prstGeom prst="rtTriangle">
             <a:avLst/>
           </a:prstGeom>
           <a:solidFill>
@@ -9551,16 +9592,16 @@
       </p:sp>
       <p:sp>
         <p:nvSpPr>
-          <p:cNvPr id="13" name="Rectangle 12"/>
+          <p:cNvPr id="13" name="Right Triangle 12"/>
           <p:cNvSpPr/>
           <p:nvPr/>
         </p:nvSpPr>
         <p:spPr>
-          <a:xfrm rot="2100000">
-            <a:off x="11109960" y="274320"/>
-            <a:ext cx="1005840" cy="365760"/>
-          </a:xfrm>
-          <a:prstGeom prst="rect">
+          <a:xfrm flipV="1" flipH="1">
+            <a:off x="11094720" y="0"/>
+            <a:ext cx="1097280" cy="731520"/>
+          </a:xfrm>
+          <a:prstGeom prst="rtTriangle">
             <a:avLst/>
           </a:prstGeom>
           <a:solidFill>
@@ -9595,16 +9636,16 @@
       </p:sp>
       <p:sp>
         <p:nvSpPr>
-          <p:cNvPr id="14" name="Rectangle 13"/>
+          <p:cNvPr id="14" name="Right Triangle 13"/>
           <p:cNvSpPr/>
           <p:nvPr/>
         </p:nvSpPr>
         <p:spPr>
-          <a:xfrm rot="2100000">
-            <a:off x="10835640" y="5989320"/>
-            <a:ext cx="1280160" cy="457200"/>
-          </a:xfrm>
-          <a:prstGeom prst="rect">
+          <a:xfrm flipH="1">
+            <a:off x="10500360" y="5715000"/>
+            <a:ext cx="1691640" cy="1143000"/>
+          </a:xfrm>
+          <a:prstGeom prst="rtTriangle">
             <a:avLst/>
           </a:prstGeom>
           <a:solidFill>
@@ -9639,16 +9680,16 @@
       </p:sp>
       <p:sp>
         <p:nvSpPr>
-          <p:cNvPr id="15" name="Rectangle 14"/>
+          <p:cNvPr id="15" name="Right Triangle 14"/>
           <p:cNvSpPr/>
           <p:nvPr/>
         </p:nvSpPr>
         <p:spPr>
-          <a:xfrm rot="2100000">
-            <a:off x="11109960" y="6199632"/>
-            <a:ext cx="1005840" cy="365760"/>
-          </a:xfrm>
-          <a:prstGeom prst="rect">
+          <a:xfrm flipH="1">
+            <a:off x="11094720" y="6126480"/>
+            <a:ext cx="1097280" cy="731520"/>
+          </a:xfrm>
+          <a:prstGeom prst="rtTriangle">
             <a:avLst/>
           </a:prstGeom>
           <a:solidFill>

--- a/docs/Finans_Portali_Sunum.pptx
+++ b/docs/Finans_Portali_Sunum.pptx
@@ -3563,16 +3563,103 @@
       </p:sp>
       <p:sp>
         <p:nvSpPr>
-          <p:cNvPr id="3" name="Rectangle 2"/>
+          <p:cNvPr id="4" name="TextBox 3"/>
+          <p:cNvSpPr txBox="1"/>
+          <p:nvPr/>
+        </p:nvSpPr>
+        <p:spPr>
+          <a:xfrm>
+            <a:off x="2194560" y="2377440"/>
+            <a:ext cx="8778240" cy="2377440"/>
+          </a:xfrm>
+          <a:prstGeom prst="rect">
+            <a:avLst/>
+          </a:prstGeom>
+          <a:noFill/>
+        </p:spPr>
+        <p:txBody>
+          <a:bodyPr wrap="square" lIns="0" tIns="0" rIns="0" bIns="0" anchor="t">
+            <a:spAutoFit/>
+          </a:bodyPr>
+          <a:lstStyle/>
+          <a:p>
+            <a:pPr algn="l">
+              <a:spcAft>
+                <a:spcPts val="1000"/>
+              </a:spcAft>
+            </a:pPr>
+            <a:r>
+              <a:rPr sz="4600" b="1">
+                <a:solidFill>
+                  <a:srgbClr val="FFFFFF"/>
+                </a:solidFill>
+                <a:latin typeface="Cambria"/>
+              </a:rPr>
+              <a:t>Teşekkürler</a:t>
+            </a:r>
+          </a:p>
+          <a:p>
+            <a:pPr algn="l">
+              <a:spcAft>
+                <a:spcPts val="600"/>
+              </a:spcAft>
+            </a:pPr>
+            <a:r>
+              <a:rPr sz="1700" b="0">
+                <a:solidFill>
+                  <a:srgbClr val="DBEAFE"/>
+                </a:solidFill>
+                <a:latin typeface="Calibri"/>
+              </a:rPr>
+              <a:t>Finans Portalı — çok-varlıklı finans portföy &amp; piyasa takip platformu</a:t>
+            </a:r>
+          </a:p>
+          <a:p>
+            <a:pPr algn="l">
+              <a:spcAft>
+                <a:spcPts val="200"/>
+              </a:spcAft>
+            </a:pPr>
+            <a:r>
+              <a:rPr sz="1500" b="0">
+                <a:solidFill>
+                  <a:srgbClr val="FFFFFF"/>
+                </a:solidFill>
+                <a:latin typeface="Calibri"/>
+              </a:rPr>
+              <a:t>Yiğit Şeker · Sakarya Üniversitesi Yazılım Mühendisliği</a:t>
+            </a:r>
+          </a:p>
+          <a:p>
+            <a:pPr algn="l">
+              <a:spcAft>
+                <a:spcPts val="600"/>
+              </a:spcAft>
+            </a:pPr>
+            <a:r>
+              <a:rPr sz="1400" b="0">
+                <a:solidFill>
+                  <a:srgbClr val="DBEAFE"/>
+                </a:solidFill>
+                <a:latin typeface="Calibri"/>
+              </a:rPr>
+              <a:t>GitHub: github.com/yigitsheker/finans-portali</a:t>
+            </a:r>
+          </a:p>
+        </p:txBody>
+      </p:sp>
+      <p:sp>
+        <p:nvSpPr>
+          <p:cNvPr id="5" name="Right Triangle 4"/>
           <p:cNvSpPr/>
           <p:nvPr/>
         </p:nvSpPr>
         <p:spPr>
-          <a:xfrm rot="720000">
-            <a:off x="-914400" y="-914400"/>
-            <a:ext cx="2743200" cy="8686800"/>
-          </a:xfrm>
-          <a:prstGeom prst="rect">
+          <a:xfrm flipV="1">
+            <a:off x="0" y="0"/>
+            <a:ext cx="3017520" cy="2103120"/>
+          </a:xfrm>
+          <a:prstGeom prst="rtTriangle">
             <a:avLst/>
           </a:prstGeom>
           <a:solidFill>
@@ -3602,94 +3689,138 @@
           <a:lstStyle/>
           <a:p>
             <a:pPr algn="ctr"/>
-            <a:endParaRPr/>
-          </a:p>
-        </p:txBody>
-      </p:sp>
-      <p:sp>
-        <p:nvSpPr>
-          <p:cNvPr id="4" name="TextBox 3"/>
-          <p:cNvSpPr txBox="1"/>
-          <p:nvPr/>
-        </p:nvSpPr>
-        <p:spPr>
-          <a:xfrm>
-            <a:off x="2194560" y="2377440"/>
-            <a:ext cx="8778240" cy="2377440"/>
-          </a:xfrm>
-          <a:prstGeom prst="rect">
-            <a:avLst/>
-          </a:prstGeom>
-          <a:noFill/>
-        </p:spPr>
-        <p:txBody>
-          <a:bodyPr wrap="square" lIns="0" tIns="0" rIns="0" bIns="0" anchor="t">
-            <a:spAutoFit/>
-          </a:bodyPr>
-          <a:lstStyle/>
-          <a:p>
-            <a:pPr algn="l">
-              <a:spcAft>
-                <a:spcPts val="1000"/>
-              </a:spcAft>
-            </a:pPr>
-            <a:r>
-              <a:rPr sz="4600" b="1">
-                <a:solidFill>
-                  <a:srgbClr val="FFFFFF"/>
-                </a:solidFill>
-                <a:latin typeface="Cambria"/>
-              </a:rPr>
-              <a:t>Teşekkürler</a:t>
-            </a:r>
-          </a:p>
-          <a:p>
-            <a:pPr algn="l">
-              <a:spcAft>
-                <a:spcPts val="600"/>
-              </a:spcAft>
-            </a:pPr>
-            <a:r>
-              <a:rPr sz="1700" b="0">
-                <a:solidFill>
-                  <a:srgbClr val="DBEAFE"/>
-                </a:solidFill>
-                <a:latin typeface="Calibri"/>
-              </a:rPr>
-              <a:t>Finans Portalı — çok-varlıklı finans portföy &amp; piyasa takip platformu</a:t>
-            </a:r>
-          </a:p>
-          <a:p>
-            <a:pPr algn="l">
-              <a:spcAft>
-                <a:spcPts val="200"/>
-              </a:spcAft>
-            </a:pPr>
-            <a:r>
-              <a:rPr sz="1500" b="0">
-                <a:solidFill>
-                  <a:srgbClr val="FFFFFF"/>
-                </a:solidFill>
-                <a:latin typeface="Calibri"/>
-              </a:rPr>
-              <a:t>Yiğit Şeker · Sakarya Üniversitesi Yazılım Mühendisliği</a:t>
-            </a:r>
-          </a:p>
-          <a:p>
-            <a:pPr algn="l">
-              <a:spcAft>
-                <a:spcPts val="600"/>
-              </a:spcAft>
-            </a:pPr>
-            <a:r>
-              <a:rPr sz="1400" b="0">
-                <a:solidFill>
-                  <a:srgbClr val="DBEAFE"/>
-                </a:solidFill>
-                <a:latin typeface="Calibri"/>
-              </a:rPr>
-              <a:t>GitHub: github.com/yigitsheker/finans-portali</a:t>
-            </a:r>
+          </a:p>
+        </p:txBody>
+      </p:sp>
+      <p:sp>
+        <p:nvSpPr>
+          <p:cNvPr id="6" name="Right Triangle 5"/>
+          <p:cNvSpPr/>
+          <p:nvPr/>
+        </p:nvSpPr>
+        <p:spPr>
+          <a:xfrm flipV="1">
+            <a:off x="0" y="0"/>
+            <a:ext cx="1965960" cy="1371600"/>
+          </a:xfrm>
+          <a:prstGeom prst="rtTriangle">
+            <a:avLst/>
+          </a:prstGeom>
+          <a:solidFill>
+            <a:srgbClr val="60A5FA"/>
+          </a:solidFill>
+          <a:ln>
+            <a:noFill/>
+          </a:ln>
+          <a:effectLst/>
+        </p:spPr>
+        <p:style>
+          <a:lnRef idx="1">
+            <a:schemeClr val="accent1"/>
+          </a:lnRef>
+          <a:fillRef idx="3">
+            <a:schemeClr val="accent1"/>
+          </a:fillRef>
+          <a:effectRef idx="2">
+            <a:schemeClr val="accent1"/>
+          </a:effectRef>
+          <a:fontRef idx="minor">
+            <a:schemeClr val="lt1"/>
+          </a:fontRef>
+        </p:style>
+        <p:txBody>
+          <a:bodyPr rtlCol="0" anchor="ctr"/>
+          <a:lstStyle/>
+          <a:p>
+            <a:pPr algn="ctr"/>
+          </a:p>
+        </p:txBody>
+      </p:sp>
+      <p:sp>
+        <p:nvSpPr>
+          <p:cNvPr id="7" name="Right Triangle 6"/>
+          <p:cNvSpPr/>
+          <p:nvPr/>
+        </p:nvSpPr>
+        <p:spPr>
+          <a:xfrm flipH="1">
+            <a:off x="9174480" y="4754880"/>
+            <a:ext cx="3017520" cy="2103120"/>
+          </a:xfrm>
+          <a:prstGeom prst="rtTriangle">
+            <a:avLst/>
+          </a:prstGeom>
+          <a:solidFill>
+            <a:srgbClr val="1D4ED8"/>
+          </a:solidFill>
+          <a:ln>
+            <a:noFill/>
+          </a:ln>
+          <a:effectLst/>
+        </p:spPr>
+        <p:style>
+          <a:lnRef idx="1">
+            <a:schemeClr val="accent1"/>
+          </a:lnRef>
+          <a:fillRef idx="3">
+            <a:schemeClr val="accent1"/>
+          </a:fillRef>
+          <a:effectRef idx="2">
+            <a:schemeClr val="accent1"/>
+          </a:effectRef>
+          <a:fontRef idx="minor">
+            <a:schemeClr val="lt1"/>
+          </a:fontRef>
+        </p:style>
+        <p:txBody>
+          <a:bodyPr rtlCol="0" anchor="ctr"/>
+          <a:lstStyle/>
+          <a:p>
+            <a:pPr algn="ctr"/>
+          </a:p>
+        </p:txBody>
+      </p:sp>
+      <p:sp>
+        <p:nvSpPr>
+          <p:cNvPr id="8" name="Right Triangle 7"/>
+          <p:cNvSpPr/>
+          <p:nvPr/>
+        </p:nvSpPr>
+        <p:spPr>
+          <a:xfrm flipH="1">
+            <a:off x="10226040" y="5486400"/>
+            <a:ext cx="1965960" cy="1371600"/>
+          </a:xfrm>
+          <a:prstGeom prst="rtTriangle">
+            <a:avLst/>
+          </a:prstGeom>
+          <a:solidFill>
+            <a:srgbClr val="60A5FA"/>
+          </a:solidFill>
+          <a:ln>
+            <a:noFill/>
+          </a:ln>
+          <a:effectLst/>
+        </p:spPr>
+        <p:style>
+          <a:lnRef idx="1">
+            <a:schemeClr val="accent1"/>
+          </a:lnRef>
+          <a:fillRef idx="3">
+            <a:schemeClr val="accent1"/>
+          </a:fillRef>
+          <a:effectRef idx="2">
+            <a:schemeClr val="accent1"/>
+          </a:effectRef>
+          <a:fontRef idx="minor">
+            <a:schemeClr val="lt1"/>
+          </a:fontRef>
+        </p:style>
+        <p:txBody>
+          <a:bodyPr rtlCol="0" anchor="ctr"/>
+          <a:lstStyle/>
+          <a:p>
+            <a:pPr algn="ctr"/>
           </a:p>
         </p:txBody>
       </p:sp>
